--- a/docs/Analisís de cancelación.pptx
+++ b/docs/Analisís de cancelación.pptx
@@ -117,7 +117,796 @@
       </a:defRPr>
     </a:lvl9pPr>
   </p:defaultTextStyle>
+  <p:extLst>
+    <p:ext uri="{EFAFB233-063F-42B5-8137-9DF3F51BA10A}">
+      <p15:sldGuideLst xmlns:p15="http://schemas.microsoft.com/office/powerpoint/2012/main"/>
+    </p:ext>
+  </p:extLst>
 </p:presentation>
+</file>
+
+<file path=ppt/changesInfos/changesInfo1.xml><?xml version="1.0" encoding="utf-8"?>
+<pc:chgInfo xmlns:a="http://schemas.openxmlformats.org/drawingml/2006/main" xmlns:r="http://schemas.openxmlformats.org/officeDocument/2006/relationships" xmlns:ac="http://schemas.microsoft.com/office/drawing/2013/main/command" xmlns:pc="http://schemas.microsoft.com/office/powerpoint/2013/main/command">
+  <pc:docChgLst>
+    <pc:chgData name="Fernando Mercado" userId="53667e8fc0cb4dd0" providerId="LiveId" clId="{CBA7A93E-04BF-4674-99B8-1E4A92688858}"/>
+    <pc:docChg chg="custSel modSld modNotesMaster">
+      <pc:chgData name="Fernando Mercado" userId="53667e8fc0cb4dd0" providerId="LiveId" clId="{CBA7A93E-04BF-4674-99B8-1E4A92688858}" dt="2026-10-27T19:24:46.179" v="3" actId="26606"/>
+      <pc:docMkLst>
+        <pc:docMk/>
+      </pc:docMkLst>
+      <pc:sldChg chg="modSp mod modNotes">
+        <pc:chgData name="Fernando Mercado" userId="53667e8fc0cb4dd0" providerId="LiveId" clId="{CBA7A93E-04BF-4674-99B8-1E4A92688858}" dt="2026-10-27T19:24:46.179" v="3" actId="26606"/>
+        <pc:sldMkLst>
+          <pc:docMk/>
+          <pc:sldMk cId="0" sldId="256"/>
+        </pc:sldMkLst>
+        <pc:spChg chg="mod">
+          <ac:chgData name="Fernando Mercado" userId="53667e8fc0cb4dd0" providerId="LiveId" clId="{CBA7A93E-04BF-4674-99B8-1E4A92688858}" dt="2026-10-27T19:23:10.289" v="1" actId="26606"/>
+          <ac:spMkLst>
+            <pc:docMk/>
+            <pc:sldMk cId="0" sldId="256"/>
+            <ac:spMk id="10" creationId="{00000000-0000-0000-0000-000000000000}"/>
+          </ac:spMkLst>
+        </pc:spChg>
+      </pc:sldChg>
+      <pc:sldChg chg="modSp mod modNotes">
+        <pc:chgData name="Fernando Mercado" userId="53667e8fc0cb4dd0" providerId="LiveId" clId="{CBA7A93E-04BF-4674-99B8-1E4A92688858}" dt="2026-10-27T19:24:46.179" v="3" actId="26606"/>
+        <pc:sldMkLst>
+          <pc:docMk/>
+          <pc:sldMk cId="0" sldId="257"/>
+        </pc:sldMkLst>
+        <pc:spChg chg="mod">
+          <ac:chgData name="Fernando Mercado" userId="53667e8fc0cb4dd0" providerId="LiveId" clId="{CBA7A93E-04BF-4674-99B8-1E4A92688858}" dt="2026-10-27T19:23:10.289" v="1" actId="26606"/>
+          <ac:spMkLst>
+            <pc:docMk/>
+            <pc:sldMk cId="0" sldId="257"/>
+            <ac:spMk id="4" creationId="{00000000-0000-0000-0000-000000000000}"/>
+          </ac:spMkLst>
+        </pc:spChg>
+        <pc:spChg chg="mod">
+          <ac:chgData name="Fernando Mercado" userId="53667e8fc0cb4dd0" providerId="LiveId" clId="{CBA7A93E-04BF-4674-99B8-1E4A92688858}" dt="2026-10-27T19:23:10.289" v="1" actId="26606"/>
+          <ac:spMkLst>
+            <pc:docMk/>
+            <pc:sldMk cId="0" sldId="257"/>
+            <ac:spMk id="8" creationId="{00000000-0000-0000-0000-000000000000}"/>
+          </ac:spMkLst>
+        </pc:spChg>
+        <pc:spChg chg="mod">
+          <ac:chgData name="Fernando Mercado" userId="53667e8fc0cb4dd0" providerId="LiveId" clId="{CBA7A93E-04BF-4674-99B8-1E4A92688858}" dt="2026-10-27T19:23:10.289" v="1" actId="26606"/>
+          <ac:spMkLst>
+            <pc:docMk/>
+            <pc:sldMk cId="0" sldId="257"/>
+            <ac:spMk id="12" creationId="{00000000-0000-0000-0000-000000000000}"/>
+          </ac:spMkLst>
+        </pc:spChg>
+        <pc:spChg chg="mod">
+          <ac:chgData name="Fernando Mercado" userId="53667e8fc0cb4dd0" providerId="LiveId" clId="{CBA7A93E-04BF-4674-99B8-1E4A92688858}" dt="2026-10-27T19:23:10.289" v="1" actId="26606"/>
+          <ac:spMkLst>
+            <pc:docMk/>
+            <pc:sldMk cId="0" sldId="257"/>
+            <ac:spMk id="16" creationId="{00000000-0000-0000-0000-000000000000}"/>
+          </ac:spMkLst>
+        </pc:spChg>
+      </pc:sldChg>
+      <pc:sldChg chg="modSp mod modNotes">
+        <pc:chgData name="Fernando Mercado" userId="53667e8fc0cb4dd0" providerId="LiveId" clId="{CBA7A93E-04BF-4674-99B8-1E4A92688858}" dt="2026-10-27T19:24:46.179" v="3" actId="26606"/>
+        <pc:sldMkLst>
+          <pc:docMk/>
+          <pc:sldMk cId="0" sldId="258"/>
+        </pc:sldMkLst>
+        <pc:spChg chg="mod">
+          <ac:chgData name="Fernando Mercado" userId="53667e8fc0cb4dd0" providerId="LiveId" clId="{CBA7A93E-04BF-4674-99B8-1E4A92688858}" dt="2026-10-27T19:23:10.289" v="1" actId="26606"/>
+          <ac:spMkLst>
+            <pc:docMk/>
+            <pc:sldMk cId="0" sldId="258"/>
+            <ac:spMk id="8" creationId="{00000000-0000-0000-0000-000000000000}"/>
+          </ac:spMkLst>
+        </pc:spChg>
+        <pc:spChg chg="mod">
+          <ac:chgData name="Fernando Mercado" userId="53667e8fc0cb4dd0" providerId="LiveId" clId="{CBA7A93E-04BF-4674-99B8-1E4A92688858}" dt="2026-10-27T19:23:10.289" v="1" actId="26606"/>
+          <ac:spMkLst>
+            <pc:docMk/>
+            <pc:sldMk cId="0" sldId="258"/>
+            <ac:spMk id="13" creationId="{00000000-0000-0000-0000-000000000000}"/>
+          </ac:spMkLst>
+        </pc:spChg>
+      </pc:sldChg>
+      <pc:sldChg chg="modSp mod modNotes">
+        <pc:chgData name="Fernando Mercado" userId="53667e8fc0cb4dd0" providerId="LiveId" clId="{CBA7A93E-04BF-4674-99B8-1E4A92688858}" dt="2026-10-27T19:24:46.179" v="3" actId="26606"/>
+        <pc:sldMkLst>
+          <pc:docMk/>
+          <pc:sldMk cId="0" sldId="259"/>
+        </pc:sldMkLst>
+        <pc:spChg chg="mod">
+          <ac:chgData name="Fernando Mercado" userId="53667e8fc0cb4dd0" providerId="LiveId" clId="{CBA7A93E-04BF-4674-99B8-1E4A92688858}" dt="2026-10-27T19:23:10.289" v="1" actId="26606"/>
+          <ac:spMkLst>
+            <pc:docMk/>
+            <pc:sldMk cId="0" sldId="259"/>
+            <ac:spMk id="4" creationId="{00000000-0000-0000-0000-000000000000}"/>
+          </ac:spMkLst>
+        </pc:spChg>
+        <pc:spChg chg="mod">
+          <ac:chgData name="Fernando Mercado" userId="53667e8fc0cb4dd0" providerId="LiveId" clId="{CBA7A93E-04BF-4674-99B8-1E4A92688858}" dt="2026-10-27T19:23:10.289" v="1" actId="26606"/>
+          <ac:spMkLst>
+            <pc:docMk/>
+            <pc:sldMk cId="0" sldId="259"/>
+            <ac:spMk id="8" creationId="{00000000-0000-0000-0000-000000000000}"/>
+          </ac:spMkLst>
+        </pc:spChg>
+        <pc:spChg chg="mod">
+          <ac:chgData name="Fernando Mercado" userId="53667e8fc0cb4dd0" providerId="LiveId" clId="{CBA7A93E-04BF-4674-99B8-1E4A92688858}" dt="2026-10-27T19:23:10.289" v="1" actId="26606"/>
+          <ac:spMkLst>
+            <pc:docMk/>
+            <pc:sldMk cId="0" sldId="259"/>
+            <ac:spMk id="12" creationId="{00000000-0000-0000-0000-000000000000}"/>
+          </ac:spMkLst>
+        </pc:spChg>
+        <pc:spChg chg="mod">
+          <ac:chgData name="Fernando Mercado" userId="53667e8fc0cb4dd0" providerId="LiveId" clId="{CBA7A93E-04BF-4674-99B8-1E4A92688858}" dt="2026-10-27T19:23:10.289" v="1" actId="26606"/>
+          <ac:spMkLst>
+            <pc:docMk/>
+            <pc:sldMk cId="0" sldId="259"/>
+            <ac:spMk id="15" creationId="{00000000-0000-0000-0000-000000000000}"/>
+          </ac:spMkLst>
+        </pc:spChg>
+        <pc:spChg chg="mod">
+          <ac:chgData name="Fernando Mercado" userId="53667e8fc0cb4dd0" providerId="LiveId" clId="{CBA7A93E-04BF-4674-99B8-1E4A92688858}" dt="2026-10-27T19:23:10.289" v="1" actId="26606"/>
+          <ac:spMkLst>
+            <pc:docMk/>
+            <pc:sldMk cId="0" sldId="259"/>
+            <ac:spMk id="16" creationId="{00000000-0000-0000-0000-000000000000}"/>
+          </ac:spMkLst>
+        </pc:spChg>
+        <pc:spChg chg="mod">
+          <ac:chgData name="Fernando Mercado" userId="53667e8fc0cb4dd0" providerId="LiveId" clId="{CBA7A93E-04BF-4674-99B8-1E4A92688858}" dt="2026-10-27T19:23:10.289" v="1" actId="26606"/>
+          <ac:spMkLst>
+            <pc:docMk/>
+            <pc:sldMk cId="0" sldId="259"/>
+            <ac:spMk id="20" creationId="{00000000-0000-0000-0000-000000000000}"/>
+          </ac:spMkLst>
+        </pc:spChg>
+        <pc:spChg chg="mod">
+          <ac:chgData name="Fernando Mercado" userId="53667e8fc0cb4dd0" providerId="LiveId" clId="{CBA7A93E-04BF-4674-99B8-1E4A92688858}" dt="2026-10-27T19:23:10.289" v="1" actId="26606"/>
+          <ac:spMkLst>
+            <pc:docMk/>
+            <pc:sldMk cId="0" sldId="259"/>
+            <ac:spMk id="22" creationId="{00000000-0000-0000-0000-000000000000}"/>
+          </ac:spMkLst>
+        </pc:spChg>
+      </pc:sldChg>
+      <pc:sldChg chg="modSp mod modNotes">
+        <pc:chgData name="Fernando Mercado" userId="53667e8fc0cb4dd0" providerId="LiveId" clId="{CBA7A93E-04BF-4674-99B8-1E4A92688858}" dt="2026-10-27T19:24:46.179" v="3" actId="26606"/>
+        <pc:sldMkLst>
+          <pc:docMk/>
+          <pc:sldMk cId="0" sldId="260"/>
+        </pc:sldMkLst>
+        <pc:spChg chg="mod">
+          <ac:chgData name="Fernando Mercado" userId="53667e8fc0cb4dd0" providerId="LiveId" clId="{CBA7A93E-04BF-4674-99B8-1E4A92688858}" dt="2026-10-27T19:23:10.289" v="1" actId="26606"/>
+          <ac:spMkLst>
+            <pc:docMk/>
+            <pc:sldMk cId="0" sldId="260"/>
+            <ac:spMk id="4" creationId="{00000000-0000-0000-0000-000000000000}"/>
+          </ac:spMkLst>
+        </pc:spChg>
+        <pc:spChg chg="mod">
+          <ac:chgData name="Fernando Mercado" userId="53667e8fc0cb4dd0" providerId="LiveId" clId="{CBA7A93E-04BF-4674-99B8-1E4A92688858}" dt="2026-10-27T19:23:10.289" v="1" actId="26606"/>
+          <ac:spMkLst>
+            <pc:docMk/>
+            <pc:sldMk cId="0" sldId="260"/>
+            <ac:spMk id="8" creationId="{00000000-0000-0000-0000-000000000000}"/>
+          </ac:spMkLst>
+        </pc:spChg>
+        <pc:spChg chg="mod">
+          <ac:chgData name="Fernando Mercado" userId="53667e8fc0cb4dd0" providerId="LiveId" clId="{CBA7A93E-04BF-4674-99B8-1E4A92688858}" dt="2026-10-27T19:23:10.289" v="1" actId="26606"/>
+          <ac:spMkLst>
+            <pc:docMk/>
+            <pc:sldMk cId="0" sldId="260"/>
+            <ac:spMk id="12" creationId="{00000000-0000-0000-0000-000000000000}"/>
+          </ac:spMkLst>
+        </pc:spChg>
+        <pc:spChg chg="mod">
+          <ac:chgData name="Fernando Mercado" userId="53667e8fc0cb4dd0" providerId="LiveId" clId="{CBA7A93E-04BF-4674-99B8-1E4A92688858}" dt="2026-10-27T19:23:10.289" v="1" actId="26606"/>
+          <ac:spMkLst>
+            <pc:docMk/>
+            <pc:sldMk cId="0" sldId="260"/>
+            <ac:spMk id="16" creationId="{00000000-0000-0000-0000-000000000000}"/>
+          </ac:spMkLst>
+        </pc:spChg>
+        <pc:spChg chg="mod">
+          <ac:chgData name="Fernando Mercado" userId="53667e8fc0cb4dd0" providerId="LiveId" clId="{CBA7A93E-04BF-4674-99B8-1E4A92688858}" dt="2026-10-27T19:23:10.289" v="1" actId="26606"/>
+          <ac:spMkLst>
+            <pc:docMk/>
+            <pc:sldMk cId="0" sldId="260"/>
+            <ac:spMk id="20" creationId="{00000000-0000-0000-0000-000000000000}"/>
+          </ac:spMkLst>
+        </pc:spChg>
+        <pc:spChg chg="mod">
+          <ac:chgData name="Fernando Mercado" userId="53667e8fc0cb4dd0" providerId="LiveId" clId="{CBA7A93E-04BF-4674-99B8-1E4A92688858}" dt="2026-10-27T19:23:10.289" v="1" actId="26606"/>
+          <ac:spMkLst>
+            <pc:docMk/>
+            <pc:sldMk cId="0" sldId="260"/>
+            <ac:spMk id="22" creationId="{00000000-0000-0000-0000-000000000000}"/>
+          </ac:spMkLst>
+        </pc:spChg>
+      </pc:sldChg>
+      <pc:sldChg chg="modSp mod modNotes">
+        <pc:chgData name="Fernando Mercado" userId="53667e8fc0cb4dd0" providerId="LiveId" clId="{CBA7A93E-04BF-4674-99B8-1E4A92688858}" dt="2026-10-27T19:24:46.179" v="3" actId="26606"/>
+        <pc:sldMkLst>
+          <pc:docMk/>
+          <pc:sldMk cId="0" sldId="261"/>
+        </pc:sldMkLst>
+        <pc:spChg chg="mod">
+          <ac:chgData name="Fernando Mercado" userId="53667e8fc0cb4dd0" providerId="LiveId" clId="{CBA7A93E-04BF-4674-99B8-1E4A92688858}" dt="2026-10-27T19:23:10.289" v="1" actId="26606"/>
+          <ac:spMkLst>
+            <pc:docMk/>
+            <pc:sldMk cId="0" sldId="261"/>
+            <ac:spMk id="3" creationId="{00000000-0000-0000-0000-000000000000}"/>
+          </ac:spMkLst>
+        </pc:spChg>
+        <pc:spChg chg="mod">
+          <ac:chgData name="Fernando Mercado" userId="53667e8fc0cb4dd0" providerId="LiveId" clId="{CBA7A93E-04BF-4674-99B8-1E4A92688858}" dt="2026-10-27T19:23:10.289" v="1" actId="26606"/>
+          <ac:spMkLst>
+            <pc:docMk/>
+            <pc:sldMk cId="0" sldId="261"/>
+            <ac:spMk id="6" creationId="{00000000-0000-0000-0000-000000000000}"/>
+          </ac:spMkLst>
+        </pc:spChg>
+        <pc:spChg chg="mod">
+          <ac:chgData name="Fernando Mercado" userId="53667e8fc0cb4dd0" providerId="LiveId" clId="{CBA7A93E-04BF-4674-99B8-1E4A92688858}" dt="2026-10-27T19:23:10.289" v="1" actId="26606"/>
+          <ac:spMkLst>
+            <pc:docMk/>
+            <pc:sldMk cId="0" sldId="261"/>
+            <ac:spMk id="7" creationId="{00000000-0000-0000-0000-000000000000}"/>
+          </ac:spMkLst>
+        </pc:spChg>
+        <pc:spChg chg="mod">
+          <ac:chgData name="Fernando Mercado" userId="53667e8fc0cb4dd0" providerId="LiveId" clId="{CBA7A93E-04BF-4674-99B8-1E4A92688858}" dt="2026-10-27T19:23:10.289" v="1" actId="26606"/>
+          <ac:spMkLst>
+            <pc:docMk/>
+            <pc:sldMk cId="0" sldId="261"/>
+            <ac:spMk id="8" creationId="{00000000-0000-0000-0000-000000000000}"/>
+          </ac:spMkLst>
+        </pc:spChg>
+        <pc:spChg chg="mod">
+          <ac:chgData name="Fernando Mercado" userId="53667e8fc0cb4dd0" providerId="LiveId" clId="{CBA7A93E-04BF-4674-99B8-1E4A92688858}" dt="2026-10-27T19:23:10.289" v="1" actId="26606"/>
+          <ac:spMkLst>
+            <pc:docMk/>
+            <pc:sldMk cId="0" sldId="261"/>
+            <ac:spMk id="12" creationId="{00000000-0000-0000-0000-000000000000}"/>
+          </ac:spMkLst>
+        </pc:spChg>
+        <pc:spChg chg="mod">
+          <ac:chgData name="Fernando Mercado" userId="53667e8fc0cb4dd0" providerId="LiveId" clId="{CBA7A93E-04BF-4674-99B8-1E4A92688858}" dt="2026-10-27T19:23:10.289" v="1" actId="26606"/>
+          <ac:spMkLst>
+            <pc:docMk/>
+            <pc:sldMk cId="0" sldId="261"/>
+            <ac:spMk id="13" creationId="{00000000-0000-0000-0000-000000000000}"/>
+          </ac:spMkLst>
+        </pc:spChg>
+        <pc:spChg chg="mod">
+          <ac:chgData name="Fernando Mercado" userId="53667e8fc0cb4dd0" providerId="LiveId" clId="{CBA7A93E-04BF-4674-99B8-1E4A92688858}" dt="2026-10-27T19:23:10.289" v="1" actId="26606"/>
+          <ac:spMkLst>
+            <pc:docMk/>
+            <pc:sldMk cId="0" sldId="261"/>
+            <ac:spMk id="22" creationId="{00000000-0000-0000-0000-000000000000}"/>
+          </ac:spMkLst>
+        </pc:spChg>
+        <pc:spChg chg="mod">
+          <ac:chgData name="Fernando Mercado" userId="53667e8fc0cb4dd0" providerId="LiveId" clId="{CBA7A93E-04BF-4674-99B8-1E4A92688858}" dt="2026-10-27T19:23:10.289" v="1" actId="26606"/>
+          <ac:spMkLst>
+            <pc:docMk/>
+            <pc:sldMk cId="0" sldId="261"/>
+            <ac:spMk id="23" creationId="{00000000-0000-0000-0000-000000000000}"/>
+          </ac:spMkLst>
+        </pc:spChg>
+        <pc:spChg chg="mod">
+          <ac:chgData name="Fernando Mercado" userId="53667e8fc0cb4dd0" providerId="LiveId" clId="{CBA7A93E-04BF-4674-99B8-1E4A92688858}" dt="2026-10-27T19:23:10.289" v="1" actId="26606"/>
+          <ac:spMkLst>
+            <pc:docMk/>
+            <pc:sldMk cId="0" sldId="261"/>
+            <ac:spMk id="26" creationId="{00000000-0000-0000-0000-000000000000}"/>
+          </ac:spMkLst>
+        </pc:spChg>
+        <pc:spChg chg="mod">
+          <ac:chgData name="Fernando Mercado" userId="53667e8fc0cb4dd0" providerId="LiveId" clId="{CBA7A93E-04BF-4674-99B8-1E4A92688858}" dt="2026-10-27T19:23:10.289" v="1" actId="26606"/>
+          <ac:spMkLst>
+            <pc:docMk/>
+            <pc:sldMk cId="0" sldId="261"/>
+            <ac:spMk id="34" creationId="{00000000-0000-0000-0000-000000000000}"/>
+          </ac:spMkLst>
+        </pc:spChg>
+      </pc:sldChg>
+      <pc:sldChg chg="modSp mod modNotes">
+        <pc:chgData name="Fernando Mercado" userId="53667e8fc0cb4dd0" providerId="LiveId" clId="{CBA7A93E-04BF-4674-99B8-1E4A92688858}" dt="2026-10-27T19:24:46.179" v="3" actId="26606"/>
+        <pc:sldMkLst>
+          <pc:docMk/>
+          <pc:sldMk cId="0" sldId="262"/>
+        </pc:sldMkLst>
+        <pc:spChg chg="mod">
+          <ac:chgData name="Fernando Mercado" userId="53667e8fc0cb4dd0" providerId="LiveId" clId="{CBA7A93E-04BF-4674-99B8-1E4A92688858}" dt="2026-10-27T19:23:10.289" v="1" actId="26606"/>
+          <ac:spMkLst>
+            <pc:docMk/>
+            <pc:sldMk cId="0" sldId="262"/>
+            <ac:spMk id="6" creationId="{00000000-0000-0000-0000-000000000000}"/>
+          </ac:spMkLst>
+        </pc:spChg>
+        <pc:spChg chg="mod">
+          <ac:chgData name="Fernando Mercado" userId="53667e8fc0cb4dd0" providerId="LiveId" clId="{CBA7A93E-04BF-4674-99B8-1E4A92688858}" dt="2026-10-27T19:23:10.289" v="1" actId="26606"/>
+          <ac:spMkLst>
+            <pc:docMk/>
+            <pc:sldMk cId="0" sldId="262"/>
+            <ac:spMk id="7" creationId="{00000000-0000-0000-0000-000000000000}"/>
+          </ac:spMkLst>
+        </pc:spChg>
+        <pc:spChg chg="mod">
+          <ac:chgData name="Fernando Mercado" userId="53667e8fc0cb4dd0" providerId="LiveId" clId="{CBA7A93E-04BF-4674-99B8-1E4A92688858}" dt="2026-10-27T19:24:02.379" v="2" actId="26606"/>
+          <ac:spMkLst>
+            <pc:docMk/>
+            <pc:sldMk cId="0" sldId="262"/>
+            <ac:spMk id="10" creationId="{00000000-0000-0000-0000-000000000000}"/>
+          </ac:spMkLst>
+        </pc:spChg>
+        <pc:spChg chg="mod">
+          <ac:chgData name="Fernando Mercado" userId="53667e8fc0cb4dd0" providerId="LiveId" clId="{CBA7A93E-04BF-4674-99B8-1E4A92688858}" dt="2026-10-27T19:24:02.379" v="2" actId="26606"/>
+          <ac:spMkLst>
+            <pc:docMk/>
+            <pc:sldMk cId="0" sldId="262"/>
+            <ac:spMk id="11" creationId="{00000000-0000-0000-0000-000000000000}"/>
+          </ac:spMkLst>
+        </pc:spChg>
+        <pc:graphicFrameChg chg="add mod">
+          <ac:chgData name="Fernando Mercado" userId="53667e8fc0cb4dd0" providerId="LiveId" clId="{CBA7A93E-04BF-4674-99B8-1E4A92688858}" dt="2026-10-27T19:24:46.179" v="3" actId="26606"/>
+          <ac:graphicFrameMkLst>
+            <pc:docMk/>
+            <pc:sldMk cId="0" sldId="262"/>
+            <ac:graphicFrameMk id="4" creationId="{00000000-0000-0000-0000-000000000000}"/>
+          </ac:graphicFrameMkLst>
+        </pc:graphicFrameChg>
+      </pc:sldChg>
+      <pc:sldChg chg="modSp mod modNotes">
+        <pc:chgData name="Fernando Mercado" userId="53667e8fc0cb4dd0" providerId="LiveId" clId="{CBA7A93E-04BF-4674-99B8-1E4A92688858}" dt="2026-10-27T19:24:46.179" v="3" actId="26606"/>
+        <pc:sldMkLst>
+          <pc:docMk/>
+          <pc:sldMk cId="0" sldId="263"/>
+        </pc:sldMkLst>
+        <pc:spChg chg="mod">
+          <ac:chgData name="Fernando Mercado" userId="53667e8fc0cb4dd0" providerId="LiveId" clId="{CBA7A93E-04BF-4674-99B8-1E4A92688858}" dt="2026-10-27T19:23:10.289" v="1" actId="26606"/>
+          <ac:spMkLst>
+            <pc:docMk/>
+            <pc:sldMk cId="0" sldId="263"/>
+            <ac:spMk id="3" creationId="{00000000-0000-0000-0000-000000000000}"/>
+          </ac:spMkLst>
+        </pc:spChg>
+        <pc:spChg chg="mod">
+          <ac:chgData name="Fernando Mercado" userId="53667e8fc0cb4dd0" providerId="LiveId" clId="{CBA7A93E-04BF-4674-99B8-1E4A92688858}" dt="2026-10-27T19:23:10.289" v="1" actId="26606"/>
+          <ac:spMkLst>
+            <pc:docMk/>
+            <pc:sldMk cId="0" sldId="263"/>
+            <ac:spMk id="4" creationId="{00000000-0000-0000-0000-000000000000}"/>
+          </ac:spMkLst>
+        </pc:spChg>
+        <pc:spChg chg="mod">
+          <ac:chgData name="Fernando Mercado" userId="53667e8fc0cb4dd0" providerId="LiveId" clId="{CBA7A93E-04BF-4674-99B8-1E4A92688858}" dt="2026-10-27T19:23:10.289" v="1" actId="26606"/>
+          <ac:spMkLst>
+            <pc:docMk/>
+            <pc:sldMk cId="0" sldId="263"/>
+            <ac:spMk id="7" creationId="{00000000-0000-0000-0000-000000000000}"/>
+          </ac:spMkLst>
+        </pc:spChg>
+        <pc:spChg chg="mod">
+          <ac:chgData name="Fernando Mercado" userId="53667e8fc0cb4dd0" providerId="LiveId" clId="{CBA7A93E-04BF-4674-99B8-1E4A92688858}" dt="2026-10-27T19:23:10.289" v="1" actId="26606"/>
+          <ac:spMkLst>
+            <pc:docMk/>
+            <pc:sldMk cId="0" sldId="263"/>
+            <ac:spMk id="10" creationId="{00000000-0000-0000-0000-000000000000}"/>
+          </ac:spMkLst>
+        </pc:spChg>
+        <pc:spChg chg="mod">
+          <ac:chgData name="Fernando Mercado" userId="53667e8fc0cb4dd0" providerId="LiveId" clId="{CBA7A93E-04BF-4674-99B8-1E4A92688858}" dt="2026-10-27T19:23:10.289" v="1" actId="26606"/>
+          <ac:spMkLst>
+            <pc:docMk/>
+            <pc:sldMk cId="0" sldId="263"/>
+            <ac:spMk id="12" creationId="{00000000-0000-0000-0000-000000000000}"/>
+          </ac:spMkLst>
+        </pc:spChg>
+      </pc:sldChg>
+      <pc:sldChg chg="modSp mod modNotes">
+        <pc:chgData name="Fernando Mercado" userId="53667e8fc0cb4dd0" providerId="LiveId" clId="{CBA7A93E-04BF-4674-99B8-1E4A92688858}" dt="2026-10-27T19:24:46.179" v="3" actId="26606"/>
+        <pc:sldMkLst>
+          <pc:docMk/>
+          <pc:sldMk cId="0" sldId="264"/>
+        </pc:sldMkLst>
+        <pc:spChg chg="mod">
+          <ac:chgData name="Fernando Mercado" userId="53667e8fc0cb4dd0" providerId="LiveId" clId="{CBA7A93E-04BF-4674-99B8-1E4A92688858}" dt="2026-10-27T19:23:10.289" v="1" actId="26606"/>
+          <ac:spMkLst>
+            <pc:docMk/>
+            <pc:sldMk cId="0" sldId="264"/>
+            <ac:spMk id="3" creationId="{00000000-0000-0000-0000-000000000000}"/>
+          </ac:spMkLst>
+        </pc:spChg>
+        <pc:spChg chg="mod">
+          <ac:chgData name="Fernando Mercado" userId="53667e8fc0cb4dd0" providerId="LiveId" clId="{CBA7A93E-04BF-4674-99B8-1E4A92688858}" dt="2026-10-27T19:23:10.289" v="1" actId="26606"/>
+          <ac:spMkLst>
+            <pc:docMk/>
+            <pc:sldMk cId="0" sldId="264"/>
+            <ac:spMk id="7" creationId="{00000000-0000-0000-0000-000000000000}"/>
+          </ac:spMkLst>
+        </pc:spChg>
+        <pc:spChg chg="mod">
+          <ac:chgData name="Fernando Mercado" userId="53667e8fc0cb4dd0" providerId="LiveId" clId="{CBA7A93E-04BF-4674-99B8-1E4A92688858}" dt="2026-10-27T19:23:10.289" v="1" actId="26606"/>
+          <ac:spMkLst>
+            <pc:docMk/>
+            <pc:sldMk cId="0" sldId="264"/>
+            <ac:spMk id="11" creationId="{00000000-0000-0000-0000-000000000000}"/>
+          </ac:spMkLst>
+        </pc:spChg>
+        <pc:spChg chg="mod">
+          <ac:chgData name="Fernando Mercado" userId="53667e8fc0cb4dd0" providerId="LiveId" clId="{CBA7A93E-04BF-4674-99B8-1E4A92688858}" dt="2026-10-27T19:24:02.379" v="2" actId="26606"/>
+          <ac:spMkLst>
+            <pc:docMk/>
+            <pc:sldMk cId="0" sldId="264"/>
+            <ac:spMk id="13" creationId="{00000000-0000-0000-0000-000000000000}"/>
+          </ac:spMkLst>
+        </pc:spChg>
+        <pc:spChg chg="mod">
+          <ac:chgData name="Fernando Mercado" userId="53667e8fc0cb4dd0" providerId="LiveId" clId="{CBA7A93E-04BF-4674-99B8-1E4A92688858}" dt="2026-10-27T19:24:02.379" v="2" actId="26606"/>
+          <ac:spMkLst>
+            <pc:docMk/>
+            <pc:sldMk cId="0" sldId="264"/>
+            <ac:spMk id="14" creationId="{00000000-0000-0000-0000-000000000000}"/>
+          </ac:spMkLst>
+        </pc:spChg>
+        <pc:spChg chg="mod">
+          <ac:chgData name="Fernando Mercado" userId="53667e8fc0cb4dd0" providerId="LiveId" clId="{CBA7A93E-04BF-4674-99B8-1E4A92688858}" dt="2026-10-27T19:23:10.289" v="1" actId="26606"/>
+          <ac:spMkLst>
+            <pc:docMk/>
+            <pc:sldMk cId="0" sldId="264"/>
+            <ac:spMk id="15" creationId="{00000000-0000-0000-0000-000000000000}"/>
+          </ac:spMkLst>
+        </pc:spChg>
+        <pc:spChg chg="mod">
+          <ac:chgData name="Fernando Mercado" userId="53667e8fc0cb4dd0" providerId="LiveId" clId="{CBA7A93E-04BF-4674-99B8-1E4A92688858}" dt="2026-10-27T19:23:10.289" v="1" actId="26606"/>
+          <ac:spMkLst>
+            <pc:docMk/>
+            <pc:sldMk cId="0" sldId="264"/>
+            <ac:spMk id="16" creationId="{00000000-0000-0000-0000-000000000000}"/>
+          </ac:spMkLst>
+        </pc:spChg>
+      </pc:sldChg>
+      <pc:sldChg chg="modSp mod modNotes">
+        <pc:chgData name="Fernando Mercado" userId="53667e8fc0cb4dd0" providerId="LiveId" clId="{CBA7A93E-04BF-4674-99B8-1E4A92688858}" dt="2026-10-27T19:24:46.179" v="3" actId="26606"/>
+        <pc:sldMkLst>
+          <pc:docMk/>
+          <pc:sldMk cId="0" sldId="265"/>
+        </pc:sldMkLst>
+        <pc:spChg chg="mod">
+          <ac:chgData name="Fernando Mercado" userId="53667e8fc0cb4dd0" providerId="LiveId" clId="{CBA7A93E-04BF-4674-99B8-1E4A92688858}" dt="2026-10-27T19:23:10.289" v="1" actId="26606"/>
+          <ac:spMkLst>
+            <pc:docMk/>
+            <pc:sldMk cId="0" sldId="265"/>
+            <ac:spMk id="3" creationId="{00000000-0000-0000-0000-000000000000}"/>
+          </ac:spMkLst>
+        </pc:spChg>
+        <pc:spChg chg="mod">
+          <ac:chgData name="Fernando Mercado" userId="53667e8fc0cb4dd0" providerId="LiveId" clId="{CBA7A93E-04BF-4674-99B8-1E4A92688858}" dt="2026-10-27T19:23:10.289" v="1" actId="26606"/>
+          <ac:spMkLst>
+            <pc:docMk/>
+            <pc:sldMk cId="0" sldId="265"/>
+            <ac:spMk id="4" creationId="{00000000-0000-0000-0000-000000000000}"/>
+          </ac:spMkLst>
+        </pc:spChg>
+        <pc:spChg chg="mod">
+          <ac:chgData name="Fernando Mercado" userId="53667e8fc0cb4dd0" providerId="LiveId" clId="{CBA7A93E-04BF-4674-99B8-1E4A92688858}" dt="2026-10-27T19:23:10.289" v="1" actId="26606"/>
+          <ac:spMkLst>
+            <pc:docMk/>
+            <pc:sldMk cId="0" sldId="265"/>
+            <ac:spMk id="7" creationId="{00000000-0000-0000-0000-000000000000}"/>
+          </ac:spMkLst>
+        </pc:spChg>
+        <pc:spChg chg="mod">
+          <ac:chgData name="Fernando Mercado" userId="53667e8fc0cb4dd0" providerId="LiveId" clId="{CBA7A93E-04BF-4674-99B8-1E4A92688858}" dt="2026-10-27T19:23:10.289" v="1" actId="26606"/>
+          <ac:spMkLst>
+            <pc:docMk/>
+            <pc:sldMk cId="0" sldId="265"/>
+            <ac:spMk id="8" creationId="{00000000-0000-0000-0000-000000000000}"/>
+          </ac:spMkLst>
+        </pc:spChg>
+        <pc:spChg chg="mod">
+          <ac:chgData name="Fernando Mercado" userId="53667e8fc0cb4dd0" providerId="LiveId" clId="{CBA7A93E-04BF-4674-99B8-1E4A92688858}" dt="2026-10-27T19:23:10.289" v="1" actId="26606"/>
+          <ac:spMkLst>
+            <pc:docMk/>
+            <pc:sldMk cId="0" sldId="265"/>
+            <ac:spMk id="9" creationId="{00000000-0000-0000-0000-000000000000}"/>
+          </ac:spMkLst>
+        </pc:spChg>
+        <pc:spChg chg="mod">
+          <ac:chgData name="Fernando Mercado" userId="53667e8fc0cb4dd0" providerId="LiveId" clId="{CBA7A93E-04BF-4674-99B8-1E4A92688858}" dt="2026-10-27T19:23:10.289" v="1" actId="26606"/>
+          <ac:spMkLst>
+            <pc:docMk/>
+            <pc:sldMk cId="0" sldId="265"/>
+            <ac:spMk id="12" creationId="{00000000-0000-0000-0000-000000000000}"/>
+          </ac:spMkLst>
+        </pc:spChg>
+        <pc:spChg chg="mod">
+          <ac:chgData name="Fernando Mercado" userId="53667e8fc0cb4dd0" providerId="LiveId" clId="{CBA7A93E-04BF-4674-99B8-1E4A92688858}" dt="2026-10-27T19:23:10.289" v="1" actId="26606"/>
+          <ac:spMkLst>
+            <pc:docMk/>
+            <pc:sldMk cId="0" sldId="265"/>
+            <ac:spMk id="13" creationId="{00000000-0000-0000-0000-000000000000}"/>
+          </ac:spMkLst>
+        </pc:spChg>
+        <pc:spChg chg="mod">
+          <ac:chgData name="Fernando Mercado" userId="53667e8fc0cb4dd0" providerId="LiveId" clId="{CBA7A93E-04BF-4674-99B8-1E4A92688858}" dt="2026-10-27T19:23:10.289" v="1" actId="26606"/>
+          <ac:spMkLst>
+            <pc:docMk/>
+            <pc:sldMk cId="0" sldId="265"/>
+            <ac:spMk id="14" creationId="{00000000-0000-0000-0000-000000000000}"/>
+          </ac:spMkLst>
+        </pc:spChg>
+        <pc:spChg chg="mod">
+          <ac:chgData name="Fernando Mercado" userId="53667e8fc0cb4dd0" providerId="LiveId" clId="{CBA7A93E-04BF-4674-99B8-1E4A92688858}" dt="2026-10-27T19:23:10.289" v="1" actId="26606"/>
+          <ac:spMkLst>
+            <pc:docMk/>
+            <pc:sldMk cId="0" sldId="265"/>
+            <ac:spMk id="16" creationId="{00000000-0000-0000-0000-000000000000}"/>
+          </ac:spMkLst>
+        </pc:spChg>
+      </pc:sldChg>
+      <pc:sldChg chg="modSp mod modNotes">
+        <pc:chgData name="Fernando Mercado" userId="53667e8fc0cb4dd0" providerId="LiveId" clId="{CBA7A93E-04BF-4674-99B8-1E4A92688858}" dt="2026-10-27T19:24:46.179" v="3" actId="26606"/>
+        <pc:sldMkLst>
+          <pc:docMk/>
+          <pc:sldMk cId="0" sldId="266"/>
+        </pc:sldMkLst>
+        <pc:spChg chg="mod">
+          <ac:chgData name="Fernando Mercado" userId="53667e8fc0cb4dd0" providerId="LiveId" clId="{CBA7A93E-04BF-4674-99B8-1E4A92688858}" dt="2026-10-27T19:23:10.289" v="1" actId="26606"/>
+          <ac:spMkLst>
+            <pc:docMk/>
+            <pc:sldMk cId="0" sldId="266"/>
+            <ac:spMk id="3" creationId="{00000000-0000-0000-0000-000000000000}"/>
+          </ac:spMkLst>
+        </pc:spChg>
+        <pc:spChg chg="mod">
+          <ac:chgData name="Fernando Mercado" userId="53667e8fc0cb4dd0" providerId="LiveId" clId="{CBA7A93E-04BF-4674-99B8-1E4A92688858}" dt="2026-10-27T19:23:10.289" v="1" actId="26606"/>
+          <ac:spMkLst>
+            <pc:docMk/>
+            <pc:sldMk cId="0" sldId="266"/>
+            <ac:spMk id="6" creationId="{00000000-0000-0000-0000-000000000000}"/>
+          </ac:spMkLst>
+        </pc:spChg>
+        <pc:spChg chg="mod">
+          <ac:chgData name="Fernando Mercado" userId="53667e8fc0cb4dd0" providerId="LiveId" clId="{CBA7A93E-04BF-4674-99B8-1E4A92688858}" dt="2026-10-27T19:23:10.289" v="1" actId="26606"/>
+          <ac:spMkLst>
+            <pc:docMk/>
+            <pc:sldMk cId="0" sldId="266"/>
+            <ac:spMk id="7" creationId="{00000000-0000-0000-0000-000000000000}"/>
+          </ac:spMkLst>
+        </pc:spChg>
+        <pc:spChg chg="mod">
+          <ac:chgData name="Fernando Mercado" userId="53667e8fc0cb4dd0" providerId="LiveId" clId="{CBA7A93E-04BF-4674-99B8-1E4A92688858}" dt="2026-10-27T19:23:10.289" v="1" actId="26606"/>
+          <ac:spMkLst>
+            <pc:docMk/>
+            <pc:sldMk cId="0" sldId="266"/>
+            <ac:spMk id="8" creationId="{00000000-0000-0000-0000-000000000000}"/>
+          </ac:spMkLst>
+        </pc:spChg>
+        <pc:spChg chg="mod">
+          <ac:chgData name="Fernando Mercado" userId="53667e8fc0cb4dd0" providerId="LiveId" clId="{CBA7A93E-04BF-4674-99B8-1E4A92688858}" dt="2026-10-27T19:23:10.289" v="1" actId="26606"/>
+          <ac:spMkLst>
+            <pc:docMk/>
+            <pc:sldMk cId="0" sldId="266"/>
+            <ac:spMk id="11" creationId="{00000000-0000-0000-0000-000000000000}"/>
+          </ac:spMkLst>
+        </pc:spChg>
+        <pc:spChg chg="mod">
+          <ac:chgData name="Fernando Mercado" userId="53667e8fc0cb4dd0" providerId="LiveId" clId="{CBA7A93E-04BF-4674-99B8-1E4A92688858}" dt="2026-10-27T19:23:10.289" v="1" actId="26606"/>
+          <ac:spMkLst>
+            <pc:docMk/>
+            <pc:sldMk cId="0" sldId="266"/>
+            <ac:spMk id="12" creationId="{00000000-0000-0000-0000-000000000000}"/>
+          </ac:spMkLst>
+        </pc:spChg>
+        <pc:spChg chg="mod">
+          <ac:chgData name="Fernando Mercado" userId="53667e8fc0cb4dd0" providerId="LiveId" clId="{CBA7A93E-04BF-4674-99B8-1E4A92688858}" dt="2026-10-27T19:23:10.289" v="1" actId="26606"/>
+          <ac:spMkLst>
+            <pc:docMk/>
+            <pc:sldMk cId="0" sldId="266"/>
+            <ac:spMk id="13" creationId="{00000000-0000-0000-0000-000000000000}"/>
+          </ac:spMkLst>
+        </pc:spChg>
+        <pc:spChg chg="mod">
+          <ac:chgData name="Fernando Mercado" userId="53667e8fc0cb4dd0" providerId="LiveId" clId="{CBA7A93E-04BF-4674-99B8-1E4A92688858}" dt="2026-10-27T19:23:10.289" v="1" actId="26606"/>
+          <ac:spMkLst>
+            <pc:docMk/>
+            <pc:sldMk cId="0" sldId="266"/>
+            <ac:spMk id="17" creationId="{00000000-0000-0000-0000-000000000000}"/>
+          </ac:spMkLst>
+        </pc:spChg>
+        <pc:spChg chg="mod">
+          <ac:chgData name="Fernando Mercado" userId="53667e8fc0cb4dd0" providerId="LiveId" clId="{CBA7A93E-04BF-4674-99B8-1E4A92688858}" dt="2026-10-27T19:23:10.289" v="1" actId="26606"/>
+          <ac:spMkLst>
+            <pc:docMk/>
+            <pc:sldMk cId="0" sldId="266"/>
+            <ac:spMk id="18" creationId="{00000000-0000-0000-0000-000000000000}"/>
+          </ac:spMkLst>
+        </pc:spChg>
+        <pc:spChg chg="mod">
+          <ac:chgData name="Fernando Mercado" userId="53667e8fc0cb4dd0" providerId="LiveId" clId="{CBA7A93E-04BF-4674-99B8-1E4A92688858}" dt="2026-10-27T19:23:10.289" v="1" actId="26606"/>
+          <ac:spMkLst>
+            <pc:docMk/>
+            <pc:sldMk cId="0" sldId="266"/>
+            <ac:spMk id="20" creationId="{00000000-0000-0000-0000-000000000000}"/>
+          </ac:spMkLst>
+        </pc:spChg>
+      </pc:sldChg>
+      <pc:sldChg chg="modSp mod modNotes">
+        <pc:chgData name="Fernando Mercado" userId="53667e8fc0cb4dd0" providerId="LiveId" clId="{CBA7A93E-04BF-4674-99B8-1E4A92688858}" dt="2026-10-27T19:24:46.179" v="3" actId="26606"/>
+        <pc:sldMkLst>
+          <pc:docMk/>
+          <pc:sldMk cId="0" sldId="267"/>
+        </pc:sldMkLst>
+        <pc:spChg chg="mod">
+          <ac:chgData name="Fernando Mercado" userId="53667e8fc0cb4dd0" providerId="LiveId" clId="{CBA7A93E-04BF-4674-99B8-1E4A92688858}" dt="2026-10-27T19:23:10.289" v="1" actId="26606"/>
+          <ac:spMkLst>
+            <pc:docMk/>
+            <pc:sldMk cId="0" sldId="267"/>
+            <ac:spMk id="3" creationId="{00000000-0000-0000-0000-000000000000}"/>
+          </ac:spMkLst>
+        </pc:spChg>
+        <pc:spChg chg="mod">
+          <ac:chgData name="Fernando Mercado" userId="53667e8fc0cb4dd0" providerId="LiveId" clId="{CBA7A93E-04BF-4674-99B8-1E4A92688858}" dt="2026-10-27T19:23:10.289" v="1" actId="26606"/>
+          <ac:spMkLst>
+            <pc:docMk/>
+            <pc:sldMk cId="0" sldId="267"/>
+            <ac:spMk id="4" creationId="{00000000-0000-0000-0000-000000000000}"/>
+          </ac:spMkLst>
+        </pc:spChg>
+        <pc:spChg chg="mod">
+          <ac:chgData name="Fernando Mercado" userId="53667e8fc0cb4dd0" providerId="LiveId" clId="{CBA7A93E-04BF-4674-99B8-1E4A92688858}" dt="2026-10-27T19:23:10.289" v="1" actId="26606"/>
+          <ac:spMkLst>
+            <pc:docMk/>
+            <pc:sldMk cId="0" sldId="267"/>
+            <ac:spMk id="7" creationId="{00000000-0000-0000-0000-000000000000}"/>
+          </ac:spMkLst>
+        </pc:spChg>
+        <pc:spChg chg="mod">
+          <ac:chgData name="Fernando Mercado" userId="53667e8fc0cb4dd0" providerId="LiveId" clId="{CBA7A93E-04BF-4674-99B8-1E4A92688858}" dt="2026-10-27T19:23:10.289" v="1" actId="26606"/>
+          <ac:spMkLst>
+            <pc:docMk/>
+            <pc:sldMk cId="0" sldId="267"/>
+            <ac:spMk id="8" creationId="{00000000-0000-0000-0000-000000000000}"/>
+          </ac:spMkLst>
+        </pc:spChg>
+        <pc:spChg chg="mod">
+          <ac:chgData name="Fernando Mercado" userId="53667e8fc0cb4dd0" providerId="LiveId" clId="{CBA7A93E-04BF-4674-99B8-1E4A92688858}" dt="2026-10-27T19:23:10.289" v="1" actId="26606"/>
+          <ac:spMkLst>
+            <pc:docMk/>
+            <pc:sldMk cId="0" sldId="267"/>
+            <ac:spMk id="11" creationId="{00000000-0000-0000-0000-000000000000}"/>
+          </ac:spMkLst>
+        </pc:spChg>
+        <pc:spChg chg="mod">
+          <ac:chgData name="Fernando Mercado" userId="53667e8fc0cb4dd0" providerId="LiveId" clId="{CBA7A93E-04BF-4674-99B8-1E4A92688858}" dt="2026-10-27T19:23:10.289" v="1" actId="26606"/>
+          <ac:spMkLst>
+            <pc:docMk/>
+            <pc:sldMk cId="0" sldId="267"/>
+            <ac:spMk id="12" creationId="{00000000-0000-0000-0000-000000000000}"/>
+          </ac:spMkLst>
+        </pc:spChg>
+        <pc:spChg chg="mod">
+          <ac:chgData name="Fernando Mercado" userId="53667e8fc0cb4dd0" providerId="LiveId" clId="{CBA7A93E-04BF-4674-99B8-1E4A92688858}" dt="2026-10-27T19:23:10.289" v="1" actId="26606"/>
+          <ac:spMkLst>
+            <pc:docMk/>
+            <pc:sldMk cId="0" sldId="267"/>
+            <ac:spMk id="15" creationId="{00000000-0000-0000-0000-000000000000}"/>
+          </ac:spMkLst>
+        </pc:spChg>
+        <pc:spChg chg="mod">
+          <ac:chgData name="Fernando Mercado" userId="53667e8fc0cb4dd0" providerId="LiveId" clId="{CBA7A93E-04BF-4674-99B8-1E4A92688858}" dt="2026-10-27T19:23:10.289" v="1" actId="26606"/>
+          <ac:spMkLst>
+            <pc:docMk/>
+            <pc:sldMk cId="0" sldId="267"/>
+            <ac:spMk id="16" creationId="{00000000-0000-0000-0000-000000000000}"/>
+          </ac:spMkLst>
+        </pc:spChg>
+        <pc:spChg chg="mod">
+          <ac:chgData name="Fernando Mercado" userId="53667e8fc0cb4dd0" providerId="LiveId" clId="{CBA7A93E-04BF-4674-99B8-1E4A92688858}" dt="2026-10-27T19:23:10.289" v="1" actId="26606"/>
+          <ac:spMkLst>
+            <pc:docMk/>
+            <pc:sldMk cId="0" sldId="267"/>
+            <ac:spMk id="17" creationId="{00000000-0000-0000-0000-000000000000}"/>
+          </ac:spMkLst>
+        </pc:spChg>
+      </pc:sldChg>
+      <pc:sldChg chg="modSp mod modNotes">
+        <pc:chgData name="Fernando Mercado" userId="53667e8fc0cb4dd0" providerId="LiveId" clId="{CBA7A93E-04BF-4674-99B8-1E4A92688858}" dt="2026-10-27T19:24:46.179" v="3" actId="26606"/>
+        <pc:sldMkLst>
+          <pc:docMk/>
+          <pc:sldMk cId="0" sldId="268"/>
+        </pc:sldMkLst>
+        <pc:spChg chg="mod">
+          <ac:chgData name="Fernando Mercado" userId="53667e8fc0cb4dd0" providerId="LiveId" clId="{CBA7A93E-04BF-4674-99B8-1E4A92688858}" dt="2026-10-27T19:23:10.289" v="1" actId="26606"/>
+          <ac:spMkLst>
+            <pc:docMk/>
+            <pc:sldMk cId="0" sldId="268"/>
+            <ac:spMk id="3" creationId="{00000000-0000-0000-0000-000000000000}"/>
+          </ac:spMkLst>
+        </pc:spChg>
+        <pc:spChg chg="mod">
+          <ac:chgData name="Fernando Mercado" userId="53667e8fc0cb4dd0" providerId="LiveId" clId="{CBA7A93E-04BF-4674-99B8-1E4A92688858}" dt="2026-10-27T19:23:10.289" v="1" actId="26606"/>
+          <ac:spMkLst>
+            <pc:docMk/>
+            <pc:sldMk cId="0" sldId="268"/>
+            <ac:spMk id="7" creationId="{00000000-0000-0000-0000-000000000000}"/>
+          </ac:spMkLst>
+        </pc:spChg>
+        <pc:spChg chg="mod">
+          <ac:chgData name="Fernando Mercado" userId="53667e8fc0cb4dd0" providerId="LiveId" clId="{CBA7A93E-04BF-4674-99B8-1E4A92688858}" dt="2026-10-27T19:23:10.289" v="1" actId="26606"/>
+          <ac:spMkLst>
+            <pc:docMk/>
+            <pc:sldMk cId="0" sldId="268"/>
+            <ac:spMk id="11" creationId="{00000000-0000-0000-0000-000000000000}"/>
+          </ac:spMkLst>
+        </pc:spChg>
+        <pc:spChg chg="mod">
+          <ac:chgData name="Fernando Mercado" userId="53667e8fc0cb4dd0" providerId="LiveId" clId="{CBA7A93E-04BF-4674-99B8-1E4A92688858}" dt="2026-10-27T19:23:10.289" v="1" actId="26606"/>
+          <ac:spMkLst>
+            <pc:docMk/>
+            <pc:sldMk cId="0" sldId="268"/>
+            <ac:spMk id="15" creationId="{00000000-0000-0000-0000-000000000000}"/>
+          </ac:spMkLst>
+        </pc:spChg>
+        <pc:spChg chg="mod">
+          <ac:chgData name="Fernando Mercado" userId="53667e8fc0cb4dd0" providerId="LiveId" clId="{CBA7A93E-04BF-4674-99B8-1E4A92688858}" dt="2026-10-27T19:23:10.289" v="1" actId="26606"/>
+          <ac:spMkLst>
+            <pc:docMk/>
+            <pc:sldMk cId="0" sldId="268"/>
+            <ac:spMk id="19" creationId="{00000000-0000-0000-0000-000000000000}"/>
+          </ac:spMkLst>
+        </pc:spChg>
+        <pc:spChg chg="mod">
+          <ac:chgData name="Fernando Mercado" userId="53667e8fc0cb4dd0" providerId="LiveId" clId="{CBA7A93E-04BF-4674-99B8-1E4A92688858}" dt="2026-10-27T19:23:10.289" v="1" actId="26606"/>
+          <ac:spMkLst>
+            <pc:docMk/>
+            <pc:sldMk cId="0" sldId="268"/>
+            <ac:spMk id="23" creationId="{00000000-0000-0000-0000-000000000000}"/>
+          </ac:spMkLst>
+        </pc:spChg>
+      </pc:sldChg>
+      <pc:sldChg chg="modSp mod modNotes">
+        <pc:chgData name="Fernando Mercado" userId="53667e8fc0cb4dd0" providerId="LiveId" clId="{CBA7A93E-04BF-4674-99B8-1E4A92688858}" dt="2026-10-27T19:24:46.179" v="3" actId="26606"/>
+        <pc:sldMkLst>
+          <pc:docMk/>
+          <pc:sldMk cId="0" sldId="269"/>
+        </pc:sldMkLst>
+        <pc:spChg chg="mod">
+          <ac:chgData name="Fernando Mercado" userId="53667e8fc0cb4dd0" providerId="LiveId" clId="{CBA7A93E-04BF-4674-99B8-1E4A92688858}" dt="2026-10-27T19:23:10.289" v="1" actId="26606"/>
+          <ac:spMkLst>
+            <pc:docMk/>
+            <pc:sldMk cId="0" sldId="269"/>
+            <ac:spMk id="6" creationId="{00000000-0000-0000-0000-000000000000}"/>
+          </ac:spMkLst>
+        </pc:spChg>
+        <pc:spChg chg="mod">
+          <ac:chgData name="Fernando Mercado" userId="53667e8fc0cb4dd0" providerId="LiveId" clId="{CBA7A93E-04BF-4674-99B8-1E4A92688858}" dt="2026-10-27T19:23:10.289" v="1" actId="26606"/>
+          <ac:spMkLst>
+            <pc:docMk/>
+            <pc:sldMk cId="0" sldId="269"/>
+            <ac:spMk id="10" creationId="{00000000-0000-0000-0000-000000000000}"/>
+          </ac:spMkLst>
+        </pc:spChg>
+        <pc:spChg chg="mod">
+          <ac:chgData name="Fernando Mercado" userId="53667e8fc0cb4dd0" providerId="LiveId" clId="{CBA7A93E-04BF-4674-99B8-1E4A92688858}" dt="2026-10-27T19:23:10.289" v="1" actId="26606"/>
+          <ac:spMkLst>
+            <pc:docMk/>
+            <pc:sldMk cId="0" sldId="269"/>
+            <ac:spMk id="12" creationId="{00000000-0000-0000-0000-000000000000}"/>
+          </ac:spMkLst>
+        </pc:spChg>
+      </pc:sldChg>
+    </pc:docChg>
+  </pc:docChgLst>
+</pc:chgInfo>
 </file>
 
 <file path=ppt/charts/chart1.xml><?xml version="1.0" encoding="utf-8"?>
@@ -216,20 +1005,20 @@
                 <c:formatCode>General</c:formatCode>
                 <c:ptCount val="3"/>
                 <c:pt idx="0">
-                  <c:v>0.92630000000000001</c:v>
+                  <c:v>93.5</c:v>
                 </c:pt>
                 <c:pt idx="1">
-                  <c:v>0.8639</c:v>
+                  <c:v>89.6</c:v>
                 </c:pt>
                 <c:pt idx="2">
-                  <c:v>0.83330000000000004</c:v>
+                  <c:v>85.38</c:v>
                 </c:pt>
               </c:numCache>
             </c:numRef>
           </c:val>
           <c:extLst>
             <c:ext xmlns:c16="http://schemas.microsoft.com/office/drawing/2014/chart" uri="{C3380CC4-5D6E-409C-BE32-E72D297353CC}">
-              <c16:uniqueId val="{00000000-BEC8-4133-97FA-DF299CD1F57E}"/>
+              <c16:uniqueId val="{00000000-A774-402A-B65C-1992436B02EC}"/>
             </c:ext>
           </c:extLst>
         </c:ser>
@@ -315,20 +1104,20 @@
                 <c:formatCode>General</c:formatCode>
                 <c:ptCount val="3"/>
                 <c:pt idx="0">
-                  <c:v>0.92130000000000001</c:v>
+                  <c:v>92.25</c:v>
                 </c:pt>
                 <c:pt idx="1">
-                  <c:v>0.84970000000000001</c:v>
+                  <c:v>87.5</c:v>
                 </c:pt>
                 <c:pt idx="2">
-                  <c:v>0.82830000000000004</c:v>
+                  <c:v>82.55</c:v>
                 </c:pt>
               </c:numCache>
             </c:numRef>
           </c:val>
           <c:extLst>
             <c:ext xmlns:c16="http://schemas.microsoft.com/office/drawing/2014/chart" uri="{C3380CC4-5D6E-409C-BE32-E72D297353CC}">
-              <c16:uniqueId val="{00000001-BEC8-4133-97FA-DF299CD1F57E}"/>
+              <c16:uniqueId val="{00000001-A774-402A-B65C-1992436B02EC}"/>
             </c:ext>
           </c:extLst>
         </c:ser>
@@ -390,8 +1179,8 @@
         <c:axId val="2094734552"/>
         <c:scaling>
           <c:orientation val="minMax"/>
-          <c:max val="1"/>
-          <c:min val="0.6"/>
+          <c:max val="100"/>
+          <c:min val="80"/>
         </c:scaling>
         <c:delete val="0"/>
         <c:axPos val="l"/>
@@ -406,7 +1195,7 @@
             </a:ln>
           </c:spPr>
         </c:majorGridlines>
-        <c:numFmt formatCode="General" sourceLinked="0"/>
+        <c:numFmt formatCode="0&quot;%&quot;" sourceLinked="0"/>
         <c:majorTickMark val="out"/>
         <c:minorTickMark val="none"/>
         <c:tickLblPos val="nextTo"/>
@@ -437,7 +1226,7 @@
         <c:crossAx val="2094734554"/>
         <c:crosses val="autoZero"/>
         <c:crossBetween val="between"/>
-        <c:majorUnit val="0.1"/>
+        <c:majorUnit val="5"/>
       </c:valAx>
       <c:spPr>
         <a:noFill/>
@@ -508,234 +1297,10 @@
           <a:chExt cx="0" cy="0"/>
         </a:xfrm>
       </p:grpSpPr>
-      <p:sp>
-        <p:nvSpPr>
-          <p:cNvPr id="2" name="Header Placeholder 1"/>
-          <p:cNvSpPr>
-            <a:spLocks noGrp="1"/>
-          </p:cNvSpPr>
-          <p:nvPr>
-            <p:ph type="hdr" sz="quarter"/>
-          </p:nvPr>
-        </p:nvSpPr>
-        <p:spPr>
-          <a:xfrm>
-            <a:off x="0" y="0"/>
-            <a:ext cx="2971800" cy="458788"/>
-          </a:xfrm>
-          <a:prstGeom prst="rect">
-            <a:avLst/>
-          </a:prstGeom>
-        </p:spPr>
-        <p:txBody>
-          <a:bodyPr vert="horz" lIns="91440" tIns="45720" rIns="91440" bIns="45720" rtlCol="0"/>
-          <a:lstStyle>
-            <a:lvl1pPr algn="l">
-              <a:defRPr sz="1200"/>
-            </a:lvl1pPr>
-          </a:lstStyle>
-          <a:p>
-            <a:endParaRPr lang="en-US"/>
-          </a:p>
-        </p:txBody>
-      </p:sp>
-      <p:sp>
-        <p:nvSpPr>
-          <p:cNvPr id="3" name="Date Placeholder 2"/>
-          <p:cNvSpPr>
-            <a:spLocks noGrp="1"/>
-          </p:cNvSpPr>
-          <p:nvPr>
-            <p:ph type="dt" idx="1"/>
-          </p:nvPr>
-        </p:nvSpPr>
-        <p:spPr>
-          <a:xfrm>
-            <a:off x="3884613" y="0"/>
-            <a:ext cx="2971800" cy="458788"/>
-          </a:xfrm>
-          <a:prstGeom prst="rect">
-            <a:avLst/>
-          </a:prstGeom>
-        </p:spPr>
-        <p:txBody>
-          <a:bodyPr vert="horz" lIns="91440" tIns="45720" rIns="91440" bIns="45720" rtlCol="0"/>
-          <a:lstStyle>
-            <a:lvl1pPr algn="r">
-              <a:defRPr sz="1200"/>
-            </a:lvl1pPr>
-          </a:lstStyle>
-          <a:p>
-            <a:fld id="{5282F153-3F37-0F45-9E97-73ACFA13230C}" type="datetimeFigureOut">
-              <a:rPr lang="en-US"/>
-              <a:t>7/19/2026</a:t>
-            </a:fld>
-            <a:endParaRPr lang="en-US"/>
-          </a:p>
-        </p:txBody>
-      </p:sp>
-      <p:sp>
-        <p:nvSpPr>
-          <p:cNvPr id="4" name="Slide Image Placeholder 3"/>
-          <p:cNvSpPr>
-            <a:spLocks noGrp="1" noRot="1" noChangeAspect="1"/>
-          </p:cNvSpPr>
-          <p:nvPr>
-            <p:ph type="sldImg" idx="2"/>
-          </p:nvPr>
-        </p:nvSpPr>
-        <p:spPr>
-          <a:xfrm>
-            <a:off x="685800" y="1143000"/>
-            <a:ext cx="5486400" cy="3086100"/>
-          </a:xfrm>
-          <a:prstGeom prst="rect">
-            <a:avLst/>
-          </a:prstGeom>
-          <a:noFill/>
-          <a:ln w="12700">
-            <a:solidFill>
-              <a:prstClr val="black"/>
-            </a:solidFill>
-          </a:ln>
-        </p:spPr>
-        <p:txBody>
-          <a:bodyPr vert="horz" lIns="91440" tIns="45720" rIns="91440" bIns="45720" rtlCol="0" anchor="ctr"/>
-          <a:lstStyle/>
-          <a:p>
-            <a:endParaRPr lang="en-US"/>
-          </a:p>
-        </p:txBody>
-      </p:sp>
-      <p:sp>
-        <p:nvSpPr>
-          <p:cNvPr id="5" name="Notes Placeholder 4"/>
-          <p:cNvSpPr>
-            <a:spLocks noGrp="1"/>
-          </p:cNvSpPr>
-          <p:nvPr>
-            <p:ph type="body" sz="quarter" idx="3"/>
-          </p:nvPr>
-        </p:nvSpPr>
-        <p:spPr>
-          <a:xfrm>
-            <a:off x="685800" y="4400550"/>
-            <a:ext cx="5486400" cy="3600450"/>
-          </a:xfrm>
-          <a:prstGeom prst="rect">
-            <a:avLst/>
-          </a:prstGeom>
-        </p:spPr>
-        <p:txBody>
-          <a:bodyPr vert="horz" lIns="91440" tIns="45720" rIns="91440" bIns="45720" rtlCol="0"/>
-          <a:lstStyle/>
-          <a:p>
-            <a:pPr lvl="0"/>
-            <a:r>
-              <a:rPr lang="en-US"/>
-              <a:t>Click to edit Master text styles</a:t>
-            </a:r>
-          </a:p>
-          <a:p>
-            <a:pPr lvl="1"/>
-            <a:r>
-              <a:rPr lang="en-US"/>
-              <a:t>Second level</a:t>
-            </a:r>
-          </a:p>
-          <a:p>
-            <a:pPr lvl="2"/>
-            <a:r>
-              <a:rPr lang="en-US"/>
-              <a:t>Third level</a:t>
-            </a:r>
-          </a:p>
-          <a:p>
-            <a:pPr lvl="3"/>
-            <a:r>
-              <a:rPr lang="en-US"/>
-              <a:t>Fourth level</a:t>
-            </a:r>
-          </a:p>
-          <a:p>
-            <a:pPr lvl="4"/>
-            <a:r>
-              <a:rPr lang="en-US"/>
-              <a:t>Fifth level</a:t>
-            </a:r>
-          </a:p>
-        </p:txBody>
-      </p:sp>
-      <p:sp>
-        <p:nvSpPr>
-          <p:cNvPr id="6" name="Footer Placeholder 5"/>
-          <p:cNvSpPr>
-            <a:spLocks noGrp="1"/>
-          </p:cNvSpPr>
-          <p:nvPr>
-            <p:ph type="ftr" sz="quarter" idx="4"/>
-          </p:nvPr>
-        </p:nvSpPr>
-        <p:spPr>
-          <a:xfrm>
-            <a:off x="0" y="8685213"/>
-            <a:ext cx="2971800" cy="458787"/>
-          </a:xfrm>
-          <a:prstGeom prst="rect">
-            <a:avLst/>
-          </a:prstGeom>
-        </p:spPr>
-        <p:txBody>
-          <a:bodyPr vert="horz" lIns="91440" tIns="45720" rIns="91440" bIns="45720" rtlCol="0" anchor="b"/>
-          <a:lstStyle>
-            <a:lvl1pPr algn="l">
-              <a:defRPr sz="1200"/>
-            </a:lvl1pPr>
-          </a:lstStyle>
-          <a:p>
-            <a:endParaRPr lang="en-US"/>
-          </a:p>
-        </p:txBody>
-      </p:sp>
-      <p:sp>
-        <p:nvSpPr>
-          <p:cNvPr id="7" name="Slide Number Placeholder 6"/>
-          <p:cNvSpPr>
-            <a:spLocks noGrp="1"/>
-          </p:cNvSpPr>
-          <p:nvPr>
-            <p:ph type="sldNum" sz="quarter" idx="5"/>
-          </p:nvPr>
-        </p:nvSpPr>
-        <p:spPr>
-          <a:xfrm>
-            <a:off x="3884613" y="8685213"/>
-            <a:ext cx="2971800" cy="458787"/>
-          </a:xfrm>
-          <a:prstGeom prst="rect">
-            <a:avLst/>
-          </a:prstGeom>
-        </p:spPr>
-        <p:txBody>
-          <a:bodyPr vert="horz" lIns="91440" tIns="45720" rIns="91440" bIns="45720" rtlCol="0" anchor="b"/>
-          <a:lstStyle>
-            <a:lvl1pPr algn="r">
-              <a:defRPr sz="1200"/>
-            </a:lvl1pPr>
-          </a:lstStyle>
-          <a:p>
-            <a:fld id="{CE5E9CC1-C706-0F49-92D6-E571CC5EEA8F}" type="slidenum">
-              <a:rPr lang="en-US"/>
-              <a:t>‹Nº›</a:t>
-            </a:fld>
-            <a:endParaRPr lang="en-US"/>
-          </a:p>
-        </p:txBody>
-      </p:sp>
     </p:spTree>
     <p:extLst>
       <p:ext uri="{BB962C8B-B14F-4D97-AF65-F5344CB8AC3E}">
-        <p14:creationId xmlns:p14="http://schemas.microsoft.com/office/powerpoint/2010/main" val="1024086991"/>
+        <p14:creationId xmlns:p14="http://schemas.microsoft.com/office/powerpoint/2010/main" val="2620523308"/>
       </p:ext>
     </p:extLst>
   </p:cSld>
@@ -3011,6 +3576,17 @@
               <a:buNone/>
             </a:pPr>
             <a:r>
+              <a:rPr lang="en-US" sz="1050">
+                <a:solidFill>
+                  <a:srgbClr val="AFC6DA"/>
+                </a:solidFill>
+                <a:latin typeface="Calibri" pitchFamily="34" charset="0"/>
+                <a:ea typeface="Calibri" pitchFamily="34" charset="-122"/>
+                <a:cs typeface="Calibri" pitchFamily="34" charset="-120"/>
+              </a:rPr>
+              <a:t>Octubre</a:t>
+            </a:r>
+            <a:r>
               <a:rPr lang="en-US" sz="1050" dirty="0">
                 <a:solidFill>
                   <a:srgbClr val="AFC6DA"/>
@@ -3019,7 +3595,7 @@
                 <a:ea typeface="Calibri" pitchFamily="34" charset="-122"/>
                 <a:cs typeface="Calibri" pitchFamily="34" charset="-120"/>
               </a:rPr>
-              <a:t>Presentación ejecutiva · Julio 2026</a:t>
+              <a:t> 2026</a:t>
             </a:r>
             <a:endParaRPr lang="en-US" sz="1050" dirty="0"/>
           </a:p>
@@ -3126,7 +3702,18 @@
                 <a:ea typeface="Trebuchet MS" pitchFamily="34" charset="-122"/>
                 <a:cs typeface="Trebuchet MS" pitchFamily="34" charset="-120"/>
               </a:rPr>
-              <a:t>Cinco perfiles con niveles de riesgo distintos</a:t>
+              <a:t>Cinco </a:t>
+            </a:r>
+            <a:r>
+              <a:rPr lang="en-US" sz="2900" b="1">
+                <a:solidFill>
+                  <a:srgbClr val="1B2A3A"/>
+                </a:solidFill>
+                <a:latin typeface="Trebuchet MS" pitchFamily="34" charset="0"/>
+                <a:ea typeface="Trebuchet MS" pitchFamily="34" charset="-122"/>
+                <a:cs typeface="Trebuchet MS" pitchFamily="34" charset="-120"/>
+              </a:rPr>
+              <a:t>clústeres ofrecen una lectura más detallada</a:t>
             </a:r>
             <a:endParaRPr lang="en-US" sz="2900" dirty="0"/>
           </a:p>
@@ -3157,6 +3744,17 @@
               <a:buNone/>
             </a:pPr>
             <a:r>
+              <a:rPr lang="en-US" sz="1400" i="1">
+                <a:solidFill>
+                  <a:srgbClr val="5E7186"/>
+                </a:solidFill>
+                <a:latin typeface="Calibri" pitchFamily="34" charset="0"/>
+                <a:ea typeface="Calibri" pitchFamily="34" charset="-122"/>
+                <a:cs typeface="Calibri" pitchFamily="34" charset="-120"/>
+              </a:rPr>
+              <a:t>Las soluciones </a:t>
+            </a:r>
+            <a:r>
               <a:rPr lang="en-US" sz="1400" i="1" dirty="0">
                 <a:solidFill>
                   <a:srgbClr val="5E7186"/>
@@ -3165,7 +3763,73 @@
                 <a:ea typeface="Calibri" pitchFamily="34" charset="-122"/>
                 <a:cs typeface="Calibri" pitchFamily="34" charset="-120"/>
               </a:rPr>
-              <a:t>Los cinco clústeres se diferencian por frecuencia de visitas, antigüedad, duración del contrato y riesgo de abandono.</a:t>
+              <a:t>de </a:t>
+            </a:r>
+            <a:r>
+              <a:rPr lang="en-US" sz="1400" i="1">
+                <a:solidFill>
+                  <a:srgbClr val="5E7186"/>
+                </a:solidFill>
+                <a:latin typeface="Calibri" pitchFamily="34" charset="0"/>
+                <a:ea typeface="Calibri" pitchFamily="34" charset="-122"/>
+                <a:cs typeface="Calibri" pitchFamily="34" charset="-120"/>
+              </a:rPr>
+              <a:t>3 </a:t>
+            </a:r>
+            <a:r>
+              <a:rPr lang="en-US" sz="1400" i="1" dirty="0">
+                <a:solidFill>
+                  <a:srgbClr val="5E7186"/>
+                </a:solidFill>
+                <a:latin typeface="Calibri" pitchFamily="34" charset="0"/>
+                <a:ea typeface="Calibri" pitchFamily="34" charset="-122"/>
+                <a:cs typeface="Calibri" pitchFamily="34" charset="-120"/>
+              </a:rPr>
+              <a:t>y </a:t>
+            </a:r>
+            <a:r>
+              <a:rPr lang="en-US" sz="1400" i="1">
+                <a:solidFill>
+                  <a:srgbClr val="5E7186"/>
+                </a:solidFill>
+                <a:latin typeface="Calibri" pitchFamily="34" charset="0"/>
+                <a:ea typeface="Calibri" pitchFamily="34" charset="-122"/>
+                <a:cs typeface="Calibri" pitchFamily="34" charset="-120"/>
+              </a:rPr>
+              <a:t>5 grupos distinguen perfiles con tasas históricas </a:t>
+            </a:r>
+            <a:r>
+              <a:rPr lang="en-US" sz="1400" i="1" dirty="0">
+                <a:solidFill>
+                  <a:srgbClr val="5E7186"/>
+                </a:solidFill>
+                <a:latin typeface="Calibri" pitchFamily="34" charset="0"/>
+                <a:ea typeface="Calibri" pitchFamily="34" charset="-122"/>
+                <a:cs typeface="Calibri" pitchFamily="34" charset="-120"/>
+              </a:rPr>
+              <a:t>de </a:t>
+            </a:r>
+            <a:r>
+              <a:rPr lang="en-US" sz="1400" i="1">
+                <a:solidFill>
+                  <a:srgbClr val="5E7186"/>
+                </a:solidFill>
+                <a:latin typeface="Calibri" pitchFamily="34" charset="0"/>
+                <a:ea typeface="Calibri" pitchFamily="34" charset="-122"/>
+                <a:cs typeface="Calibri" pitchFamily="34" charset="-120"/>
+              </a:rPr>
+              <a:t>cancelación muy diferentes</a:t>
+            </a:r>
+            <a:r>
+              <a:rPr lang="en-US" sz="1400" i="1" dirty="0">
+                <a:solidFill>
+                  <a:srgbClr val="5E7186"/>
+                </a:solidFill>
+                <a:latin typeface="Calibri" pitchFamily="34" charset="0"/>
+                <a:ea typeface="Calibri" pitchFamily="34" charset="-122"/>
+                <a:cs typeface="Calibri" pitchFamily="34" charset="-120"/>
+              </a:rPr>
+              <a:t>.</a:t>
             </a:r>
             <a:endParaRPr lang="en-US" sz="1400" dirty="0"/>
           </a:p>
@@ -3274,7 +3938,7 @@
               <a:buNone/>
             </a:pPr>
             <a:r>
-              <a:rPr lang="en-US" sz="1100" b="1" kern="0" spc="150" dirty="0">
+              <a:rPr lang="en-US" sz="1100" b="1" kern="0" spc="150">
                 <a:solidFill>
                   <a:srgbClr val="E06A4E"/>
                 </a:solidFill>
@@ -3282,46 +3946,68 @@
                 <a:ea typeface="Trebuchet MS" pitchFamily="34" charset="-122"/>
                 <a:cs typeface="Trebuchet MS" pitchFamily="34" charset="-120"/>
               </a:rPr>
-              <a:t>MAYOR TASA DE CHURN</a:t>
-            </a:r>
-            <a:endParaRPr lang="en-US" sz="1100" dirty="0"/>
-          </a:p>
-        </p:txBody>
-      </p:sp>
-      <p:sp>
-        <p:nvSpPr>
-          <p:cNvPr id="8" name="Text 6"/>
-          <p:cNvSpPr/>
-          <p:nvPr/>
-        </p:nvSpPr>
-        <p:spPr>
-          <a:xfrm>
-            <a:off x="841248" y="2587752"/>
-            <a:ext cx="3364992" cy="502920"/>
-          </a:xfrm>
-          <a:prstGeom prst="rect">
-            <a:avLst/>
-          </a:prstGeom>
-          <a:noFill/>
-          <a:ln/>
-        </p:spPr>
-        <p:txBody>
-          <a:bodyPr wrap="square" lIns="0" tIns="0" rIns="0" bIns="0" rtlCol="0" anchor="ctr"/>
-          <a:lstStyle/>
-          <a:p>
-            <a:pPr marL="0" indent="0">
-              <a:buNone/>
-            </a:pPr>
-            <a:r>
-              <a:rPr lang="en-US" sz="1550" b="1" dirty="0">
-                <a:solidFill>
-                  <a:srgbClr val="1B2A3A"/>
+              <a:t>K = 5 · </a:t>
+            </a:r>
+            <a:r>
+              <a:rPr lang="en-US" sz="1100" b="1" kern="0" spc="150" dirty="0">
+                <a:solidFill>
+                  <a:srgbClr val="E06A4E"/>
                 </a:solidFill>
                 <a:latin typeface="Trebuchet MS" pitchFamily="34" charset="0"/>
                 <a:ea typeface="Trebuchet MS" pitchFamily="34" charset="-122"/>
                 <a:cs typeface="Trebuchet MS" pitchFamily="34" charset="-120"/>
               </a:rPr>
-              <a:t>Contratos cortos + baja asistencia</a:t>
+              <a:t>MAYOR </a:t>
+            </a:r>
+            <a:r>
+              <a:rPr lang="en-US" sz="1100" b="1" kern="0" spc="150">
+                <a:solidFill>
+                  <a:srgbClr val="E06A4E"/>
+                </a:solidFill>
+                <a:latin typeface="Trebuchet MS" pitchFamily="34" charset="0"/>
+                <a:ea typeface="Trebuchet MS" pitchFamily="34" charset="-122"/>
+                <a:cs typeface="Trebuchet MS" pitchFamily="34" charset="-120"/>
+              </a:rPr>
+              <a:t>DETALLE</a:t>
+            </a:r>
+            <a:endParaRPr lang="en-US" sz="1100" dirty="0"/>
+          </a:p>
+        </p:txBody>
+      </p:sp>
+      <p:sp>
+        <p:nvSpPr>
+          <p:cNvPr id="8" name="Text 6"/>
+          <p:cNvSpPr/>
+          <p:nvPr/>
+        </p:nvSpPr>
+        <p:spPr>
+          <a:xfrm>
+            <a:off x="841248" y="2587752"/>
+            <a:ext cx="3364992" cy="502920"/>
+          </a:xfrm>
+          <a:prstGeom prst="rect">
+            <a:avLst/>
+          </a:prstGeom>
+          <a:noFill/>
+          <a:ln/>
+        </p:spPr>
+        <p:txBody>
+          <a:bodyPr wrap="square" lIns="0" tIns="0" rIns="0" bIns="0" rtlCol="0" anchor="ctr"/>
+          <a:lstStyle/>
+          <a:p>
+            <a:pPr marL="0" indent="0">
+              <a:buNone/>
+            </a:pPr>
+            <a:r>
+              <a:rPr lang="en-US" sz="1800" b="1">
+                <a:solidFill>
+                  <a:srgbClr val="1B2A3A"/>
+                </a:solidFill>
+                <a:latin typeface="Trebuchet MS" pitchFamily="34" charset="0"/>
+                <a:ea typeface="Trebuchet MS" pitchFamily="34" charset="-122"/>
+                <a:cs typeface="Trebuchet MS" pitchFamily="34" charset="-120"/>
+              </a:rPr>
+              <a:t>51.32% · 45.04% · 26.94% · 5.50% · 2.23%</a:t>
             </a:r>
             <a:endParaRPr lang="en-US" sz="1550" dirty="0"/>
           </a:p>
@@ -3355,6 +4041,17 @@
               <a:buNone/>
             </a:pPr>
             <a:r>
+              <a:rPr lang="en-US" sz="1250">
+                <a:solidFill>
+                  <a:srgbClr val="5E7186"/>
+                </a:solidFill>
+                <a:latin typeface="Calibri" pitchFamily="34" charset="0"/>
+                <a:ea typeface="Calibri" pitchFamily="34" charset="-122"/>
+                <a:cs typeface="Calibri" pitchFamily="34" charset="-120"/>
+              </a:rPr>
+              <a:t>Dos segmentos </a:t>
+            </a:r>
+            <a:r>
               <a:rPr lang="en-US" sz="1250" dirty="0">
                 <a:solidFill>
                   <a:srgbClr val="5E7186"/>
@@ -3363,7 +4060,51 @@
                 <a:ea typeface="Calibri" pitchFamily="34" charset="-122"/>
                 <a:cs typeface="Calibri" pitchFamily="34" charset="-120"/>
               </a:rPr>
-              <a:t>Concentran la mayor probabilidad de cancelar la membresía: son la prioridad de retención.</a:t>
+              <a:t>de </a:t>
+            </a:r>
+            <a:r>
+              <a:rPr lang="en-US" sz="1250">
+                <a:solidFill>
+                  <a:srgbClr val="5E7186"/>
+                </a:solidFill>
+                <a:latin typeface="Calibri" pitchFamily="34" charset="0"/>
+                <a:ea typeface="Calibri" pitchFamily="34" charset="-122"/>
+                <a:cs typeface="Calibri" pitchFamily="34" charset="-120"/>
+              </a:rPr>
+              <a:t>tasa alta, uno intermedio y dos </a:t>
+            </a:r>
+            <a:r>
+              <a:rPr lang="en-US" sz="1250" dirty="0">
+                <a:solidFill>
+                  <a:srgbClr val="5E7186"/>
+                </a:solidFill>
+                <a:latin typeface="Calibri" pitchFamily="34" charset="0"/>
+                <a:ea typeface="Calibri" pitchFamily="34" charset="-122"/>
+                <a:cs typeface="Calibri" pitchFamily="34" charset="-120"/>
+              </a:rPr>
+              <a:t>de </a:t>
+            </a:r>
+            <a:r>
+              <a:rPr lang="en-US" sz="1250">
+                <a:solidFill>
+                  <a:srgbClr val="5E7186"/>
+                </a:solidFill>
+                <a:latin typeface="Calibri" pitchFamily="34" charset="0"/>
+                <a:ea typeface="Calibri" pitchFamily="34" charset="-122"/>
+                <a:cs typeface="Calibri" pitchFamily="34" charset="-120"/>
+              </a:rPr>
+              <a:t>tasa baja permiten explorar acciones más específicas</a:t>
+            </a:r>
+            <a:r>
+              <a:rPr lang="en-US" sz="1250" dirty="0">
+                <a:solidFill>
+                  <a:srgbClr val="5E7186"/>
+                </a:solidFill>
+                <a:latin typeface="Calibri" pitchFamily="34" charset="0"/>
+                <a:ea typeface="Calibri" pitchFamily="34" charset="-122"/>
+                <a:cs typeface="Calibri" pitchFamily="34" charset="-120"/>
+              </a:rPr>
+              <a:t>.</a:t>
             </a:r>
             <a:endParaRPr lang="en-US" sz="1250" dirty="0"/>
           </a:p>
@@ -3472,7 +4213,7 @@
               <a:buNone/>
             </a:pPr>
             <a:r>
-              <a:rPr lang="en-US" sz="1100" b="1" kern="0" spc="150" dirty="0">
+              <a:rPr lang="en-US" sz="1100" b="1" kern="0" spc="150">
                 <a:solidFill>
                   <a:srgbClr val="2FA37A"/>
                 </a:solidFill>
@@ -3480,7 +4221,7 @@
                 <a:ea typeface="Trebuchet MS" pitchFamily="34" charset="-122"/>
                 <a:cs typeface="Trebuchet MS" pitchFamily="34" charset="-120"/>
               </a:rPr>
-              <a:t>MENOR TASA DE CHURN</a:t>
+              <a:t>K = 3 · LECTURA SIMPLE</a:t>
             </a:r>
             <a:endParaRPr lang="en-US" sz="1100" dirty="0"/>
           </a:p>
@@ -3511,7 +4252,7 @@
               <a:buNone/>
             </a:pPr>
             <a:r>
-              <a:rPr lang="en-US" sz="1550" b="1" dirty="0">
+              <a:rPr lang="en-US" sz="1800" b="1">
                 <a:solidFill>
                   <a:srgbClr val="1B2A3A"/>
                 </a:solidFill>
@@ -3519,7 +4260,7 @@
                 <a:ea typeface="Trebuchet MS" pitchFamily="34" charset="-122"/>
                 <a:cs typeface="Trebuchet MS" pitchFamily="34" charset="-120"/>
               </a:rPr>
-              <a:t>Contratos largos + alta participación</a:t>
+              <a:t>55.88% · 8.61% · 3.02%</a:t>
             </a:r>
             <a:endParaRPr lang="en-US" sz="1550" dirty="0"/>
           </a:p>
@@ -3553,6 +4294,17 @@
               <a:buNone/>
             </a:pPr>
             <a:r>
+              <a:rPr lang="en-US" sz="1250">
+                <a:solidFill>
+                  <a:srgbClr val="5E7186"/>
+                </a:solidFill>
+                <a:latin typeface="Calibri" pitchFamily="34" charset="0"/>
+                <a:ea typeface="Calibri" pitchFamily="34" charset="-122"/>
+                <a:cs typeface="Calibri" pitchFamily="34" charset="-120"/>
+              </a:rPr>
+              <a:t>La alternativa resume el riesgo en tres perfiles, </a:t>
+            </a:r>
+            <a:r>
               <a:rPr lang="en-US" sz="1250" dirty="0">
                 <a:solidFill>
                   <a:srgbClr val="5E7186"/>
@@ -3561,7 +4313,29 @@
                 <a:ea typeface="Calibri" pitchFamily="34" charset="-122"/>
                 <a:cs typeface="Calibri" pitchFamily="34" charset="-120"/>
               </a:rPr>
-              <a:t>Asisten con constancia y usan más servicios; presentan la permanencia más alta.</a:t>
+              <a:t>con </a:t>
+            </a:r>
+            <a:r>
+              <a:rPr lang="en-US" sz="1250">
+                <a:solidFill>
+                  <a:srgbClr val="5E7186"/>
+                </a:solidFill>
+                <a:latin typeface="Calibri" pitchFamily="34" charset="0"/>
+                <a:ea typeface="Calibri" pitchFamily="34" charset="-122"/>
+                <a:cs typeface="Calibri" pitchFamily="34" charset="-120"/>
+              </a:rPr>
+              <a:t>menor granularidad para diseñar intervenciones</a:t>
+            </a:r>
+            <a:r>
+              <a:rPr lang="en-US" sz="1250" dirty="0">
+                <a:solidFill>
+                  <a:srgbClr val="5E7186"/>
+                </a:solidFill>
+                <a:latin typeface="Calibri" pitchFamily="34" charset="0"/>
+                <a:ea typeface="Calibri" pitchFamily="34" charset="-122"/>
+                <a:cs typeface="Calibri" pitchFamily="34" charset="-120"/>
+              </a:rPr>
+              <a:t>.</a:t>
             </a:r>
             <a:endParaRPr lang="en-US" sz="1250" dirty="0"/>
           </a:p>
@@ -3625,6 +4399,17 @@
               <a:buNone/>
             </a:pPr>
             <a:r>
+              <a:rPr lang="en-US" sz="1200" i="1">
+                <a:solidFill>
+                  <a:srgbClr val="17547F"/>
+                </a:solidFill>
+                <a:latin typeface="Calibri" pitchFamily="34" charset="0"/>
+                <a:ea typeface="Calibri" pitchFamily="34" charset="-122"/>
+                <a:cs typeface="Calibri" pitchFamily="34" charset="-120"/>
+              </a:rPr>
+              <a:t>Cautela.  Son tasas observadas </a:t>
+            </a:r>
+            <a:r>
               <a:rPr lang="en-US" sz="1200" i="1" dirty="0">
                 <a:solidFill>
                   <a:srgbClr val="17547F"/>
@@ -3633,7 +4418,51 @@
                 <a:ea typeface="Calibri" pitchFamily="34" charset="-122"/>
                 <a:cs typeface="Calibri" pitchFamily="34" charset="-120"/>
               </a:rPr>
-              <a:t>El riesgo de abandono no se reparte por igual: cada segmento exige una estrategia de retención distinta.</a:t>
+              <a:t>por segmento</a:t>
+            </a:r>
+            <a:r>
+              <a:rPr lang="en-US" sz="1200" i="1">
+                <a:solidFill>
+                  <a:srgbClr val="17547F"/>
+                </a:solidFill>
+                <a:latin typeface="Calibri" pitchFamily="34" charset="0"/>
+                <a:ea typeface="Calibri" pitchFamily="34" charset="-122"/>
+                <a:cs typeface="Calibri" pitchFamily="34" charset="-120"/>
+              </a:rPr>
+              <a:t>, no probabilidades individuales ni evidencia causal</a:t>
+            </a:r>
+            <a:r>
+              <a:rPr lang="en-US" sz="1200" i="1" dirty="0">
+                <a:solidFill>
+                  <a:srgbClr val="17547F"/>
+                </a:solidFill>
+                <a:latin typeface="Calibri" pitchFamily="34" charset="0"/>
+                <a:ea typeface="Calibri" pitchFamily="34" charset="-122"/>
+                <a:cs typeface="Calibri" pitchFamily="34" charset="-120"/>
+              </a:rPr>
+              <a:t> de </a:t>
+            </a:r>
+            <a:r>
+              <a:rPr lang="en-US" sz="1200" i="1">
+                <a:solidFill>
+                  <a:srgbClr val="17547F"/>
+                </a:solidFill>
+                <a:latin typeface="Calibri" pitchFamily="34" charset="0"/>
+                <a:ea typeface="Calibri" pitchFamily="34" charset="-122"/>
+                <a:cs typeface="Calibri" pitchFamily="34" charset="-120"/>
+              </a:rPr>
+              <a:t>efectividad</a:t>
+            </a:r>
+            <a:r>
+              <a:rPr lang="en-US" sz="1200" i="1" dirty="0">
+                <a:solidFill>
+                  <a:srgbClr val="17547F"/>
+                </a:solidFill>
+                <a:latin typeface="Calibri" pitchFamily="34" charset="0"/>
+                <a:ea typeface="Calibri" pitchFamily="34" charset="-122"/>
+                <a:cs typeface="Calibri" pitchFamily="34" charset="-120"/>
+              </a:rPr>
+              <a:t>.</a:t>
             </a:r>
             <a:endParaRPr lang="en-US" sz="1200" dirty="0"/>
           </a:p>
@@ -3810,7 +4639,7 @@
               <a:buNone/>
             </a:pPr>
             <a:r>
-              <a:rPr lang="en-US" sz="2900" b="1" dirty="0">
+              <a:rPr lang="en-US" sz="2900" b="1">
                 <a:solidFill>
                   <a:srgbClr val="1B2A3A"/>
                 </a:solidFill>
@@ -3818,7 +4647,7 @@
                 <a:ea typeface="Trebuchet MS" pitchFamily="34" charset="-122"/>
                 <a:cs typeface="Trebuchet MS" pitchFamily="34" charset="-120"/>
               </a:rPr>
-              <a:t>Lo que muestran los números</a:t>
+              <a:t>Regresión Logística lidera las tres métricas</a:t>
             </a:r>
             <a:endParaRPr lang="en-US" sz="2900" dirty="0"/>
           </a:p>
@@ -3927,7 +4756,7 @@
               <a:buNone/>
             </a:pPr>
             <a:r>
-              <a:rPr lang="en-US" sz="4000" b="1" dirty="0">
+              <a:rPr lang="en-US" sz="4000" b="1">
                 <a:solidFill>
                   <a:srgbClr val="1F6FB2"/>
                 </a:solidFill>
@@ -3935,46 +4764,68 @@
                 <a:ea typeface="Trebuchet MS" pitchFamily="34" charset="-122"/>
                 <a:cs typeface="Trebuchet MS" pitchFamily="34" charset="-120"/>
               </a:rPr>
-              <a:t>≈ 91%</a:t>
-            </a:r>
-            <a:endParaRPr lang="en-US" sz="4000" dirty="0"/>
-          </a:p>
-        </p:txBody>
-      </p:sp>
-      <p:sp>
-        <p:nvSpPr>
-          <p:cNvPr id="7" name="Text 5"/>
-          <p:cNvSpPr/>
-          <p:nvPr/>
-        </p:nvSpPr>
-        <p:spPr>
-          <a:xfrm>
-            <a:off x="749808" y="2578608"/>
-            <a:ext cx="2221992" cy="365760"/>
-          </a:xfrm>
-          <a:prstGeom prst="rect">
-            <a:avLst/>
-          </a:prstGeom>
-          <a:noFill/>
-          <a:ln/>
-        </p:spPr>
-        <p:txBody>
-          <a:bodyPr wrap="square" lIns="0" tIns="0" rIns="0" bIns="0" rtlCol="0" anchor="ctr"/>
-          <a:lstStyle/>
-          <a:p>
-            <a:pPr marL="0" indent="0" algn="ctr">
-              <a:buNone/>
-            </a:pPr>
-            <a:r>
-              <a:rPr lang="en-US" sz="1400" b="1" dirty="0">
-                <a:solidFill>
-                  <a:srgbClr val="1B2A3A"/>
+              <a:t>93.50</a:t>
+            </a:r>
+            <a:r>
+              <a:rPr lang="en-US" sz="4000" b="1" dirty="0">
+                <a:solidFill>
+                  <a:srgbClr val="1F6FB2"/>
                 </a:solidFill>
                 <a:latin typeface="Trebuchet MS" pitchFamily="34" charset="0"/>
                 <a:ea typeface="Trebuchet MS" pitchFamily="34" charset="-122"/>
                 <a:cs typeface="Trebuchet MS" pitchFamily="34" charset="-120"/>
               </a:rPr>
-              <a:t>Accuracy de los modelos</a:t>
+              <a:t>%</a:t>
+            </a:r>
+            <a:endParaRPr lang="en-US" sz="4000" dirty="0"/>
+          </a:p>
+        </p:txBody>
+      </p:sp>
+      <p:sp>
+        <p:nvSpPr>
+          <p:cNvPr id="7" name="Text 5"/>
+          <p:cNvSpPr/>
+          <p:nvPr/>
+        </p:nvSpPr>
+        <p:spPr>
+          <a:xfrm>
+            <a:off x="749808" y="2578608"/>
+            <a:ext cx="2221992" cy="365760"/>
+          </a:xfrm>
+          <a:prstGeom prst="rect">
+            <a:avLst/>
+          </a:prstGeom>
+          <a:noFill/>
+          <a:ln/>
+        </p:spPr>
+        <p:txBody>
+          <a:bodyPr wrap="square" lIns="0" tIns="0" rIns="0" bIns="0" rtlCol="0" anchor="ctr"/>
+          <a:lstStyle/>
+          <a:p>
+            <a:pPr marL="0" indent="0" algn="ctr">
+              <a:buNone/>
+            </a:pPr>
+            <a:r>
+              <a:rPr lang="en-US" sz="1400" b="1" dirty="0">
+                <a:solidFill>
+                  <a:srgbClr val="1B2A3A"/>
+                </a:solidFill>
+                <a:latin typeface="Trebuchet MS" pitchFamily="34" charset="0"/>
+                <a:ea typeface="Trebuchet MS" pitchFamily="34" charset="-122"/>
+                <a:cs typeface="Trebuchet MS" pitchFamily="34" charset="-120"/>
+              </a:rPr>
+              <a:t>Accuracy </a:t>
+            </a:r>
+            <a:r>
+              <a:rPr lang="en-US" sz="1400" b="1">
+                <a:solidFill>
+                  <a:srgbClr val="1B2A3A"/>
+                </a:solidFill>
+                <a:latin typeface="Trebuchet MS" pitchFamily="34" charset="0"/>
+                <a:ea typeface="Trebuchet MS" pitchFamily="34" charset="-122"/>
+                <a:cs typeface="Trebuchet MS" pitchFamily="34" charset="-120"/>
+              </a:rPr>
+              <a:t>· Reg. Logística</a:t>
             </a:r>
             <a:endParaRPr lang="en-US" sz="1400" dirty="0"/>
           </a:p>
@@ -4008,7 +4859,7 @@
               <a:buNone/>
             </a:pPr>
             <a:r>
-              <a:rPr lang="en-US" sz="1150" dirty="0">
+              <a:rPr lang="en-US" sz="1150">
                 <a:solidFill>
                   <a:srgbClr val="5E7186"/>
                 </a:solidFill>
@@ -4016,7 +4867,7 @@
                 <a:ea typeface="Calibri" pitchFamily="34" charset="-122"/>
                 <a:cs typeface="Calibri" pitchFamily="34" charset="-120"/>
               </a:rPr>
-              <a:t>Alta capacidad para anticipar el churn.</a:t>
+              <a:t>Random Forest: 92.25%</a:t>
             </a:r>
             <a:endParaRPr lang="en-US" sz="1150" dirty="0"/>
           </a:p>
@@ -4125,7 +4976,7 @@
               <a:buNone/>
             </a:pPr>
             <a:r>
-              <a:rPr lang="en-US" sz="4000" b="1" dirty="0">
+              <a:rPr lang="en-US" sz="4000" b="1">
                 <a:solidFill>
                   <a:srgbClr val="1FA8C0"/>
                 </a:solidFill>
@@ -4133,7 +4984,7 @@
                 <a:ea typeface="Trebuchet MS" pitchFamily="34" charset="-122"/>
                 <a:cs typeface="Trebuchet MS" pitchFamily="34" charset="-120"/>
               </a:rPr>
-              <a:t>2</a:t>
+              <a:t>89.60%</a:t>
             </a:r>
             <a:endParaRPr lang="en-US" sz="4000" dirty="0"/>
           </a:p>
@@ -4164,7 +5015,7 @@
               <a:buNone/>
             </a:pPr>
             <a:r>
-              <a:rPr lang="en-US" sz="1400" b="1" dirty="0">
+              <a:rPr lang="en-US" sz="1400" b="1">
                 <a:solidFill>
                   <a:srgbClr val="1B2A3A"/>
                 </a:solidFill>
@@ -4172,7 +5023,7 @@
                 <a:ea typeface="Trebuchet MS" pitchFamily="34" charset="-122"/>
                 <a:cs typeface="Trebuchet MS" pitchFamily="34" charset="-120"/>
               </a:rPr>
-              <a:t>Modelos equivalentes</a:t>
+              <a:t>Precision · Reg. Logística</a:t>
             </a:r>
             <a:endParaRPr lang="en-US" sz="1400" dirty="0"/>
           </a:p>
@@ -4214,7 +5065,18 @@
                 <a:ea typeface="Calibri" pitchFamily="34" charset="-122"/>
                 <a:cs typeface="Calibri" pitchFamily="34" charset="-120"/>
               </a:rPr>
-              <a:t>Reg. Logística y Random Forest, muy parejos.</a:t>
+              <a:t>Random Forest</a:t>
+            </a:r>
+            <a:r>
+              <a:rPr lang="en-US" sz="1150">
+                <a:solidFill>
+                  <a:srgbClr val="5E7186"/>
+                </a:solidFill>
+                <a:latin typeface="Calibri" pitchFamily="34" charset="0"/>
+                <a:ea typeface="Calibri" pitchFamily="34" charset="-122"/>
+                <a:cs typeface="Calibri" pitchFamily="34" charset="-120"/>
+              </a:rPr>
+              <a:t>: 87.50%</a:t>
             </a:r>
             <a:endParaRPr lang="en-US" sz="1150" dirty="0"/>
           </a:p>
@@ -4323,7 +5185,7 @@
               <a:buNone/>
             </a:pPr>
             <a:r>
-              <a:rPr lang="en-US" sz="4000" b="1" dirty="0">
+              <a:rPr lang="en-US" sz="4000" b="1">
                 <a:solidFill>
                   <a:srgbClr val="2FA37A"/>
                 </a:solidFill>
@@ -4331,7 +5193,7 @@
                 <a:ea typeface="Trebuchet MS" pitchFamily="34" charset="-122"/>
                 <a:cs typeface="Trebuchet MS" pitchFamily="34" charset="-120"/>
               </a:rPr>
-              <a:t>5</a:t>
+              <a:t>85.38%</a:t>
             </a:r>
             <a:endParaRPr lang="en-US" sz="4000" dirty="0"/>
           </a:p>
@@ -4362,7 +5224,7 @@
               <a:buNone/>
             </a:pPr>
             <a:r>
-              <a:rPr lang="en-US" sz="1400" b="1" dirty="0">
+              <a:rPr lang="en-US" sz="1400" b="1">
                 <a:solidFill>
                   <a:srgbClr val="1B2A3A"/>
                 </a:solidFill>
@@ -4370,7 +5232,7 @@
                 <a:ea typeface="Trebuchet MS" pitchFamily="34" charset="-122"/>
                 <a:cs typeface="Trebuchet MS" pitchFamily="34" charset="-120"/>
               </a:rPr>
-              <a:t>Segmentos de clientes</a:t>
+              <a:t>Recall · Reg. Logística</a:t>
             </a:r>
             <a:endParaRPr lang="en-US" sz="1400" dirty="0"/>
           </a:p>
@@ -4404,7 +5266,7 @@
               <a:buNone/>
             </a:pPr>
             <a:r>
-              <a:rPr lang="en-US" sz="1150" dirty="0">
+              <a:rPr lang="en-US" sz="1150">
                 <a:solidFill>
                   <a:srgbClr val="5E7186"/>
                 </a:solidFill>
@@ -4412,7 +5274,7 @@
                 <a:ea typeface="Calibri" pitchFamily="34" charset="-122"/>
                 <a:cs typeface="Calibri" pitchFamily="34" charset="-120"/>
               </a:rPr>
-              <a:t>Con distintos niveles de riesgo de abandono.</a:t>
+              <a:t>Random Forest: 82.55%</a:t>
             </a:r>
             <a:endParaRPr lang="en-US" sz="1150" dirty="0"/>
           </a:p>
@@ -4479,6 +5341,17 @@
               <a:buNone/>
             </a:pPr>
             <a:r>
+              <a:rPr lang="en-US" sz="1350" b="1">
+                <a:solidFill>
+                  <a:srgbClr val="7FE0EC"/>
+                </a:solidFill>
+                <a:latin typeface="Calibri" pitchFamily="34" charset="0"/>
+                <a:ea typeface="Calibri" pitchFamily="34" charset="-122"/>
+                <a:cs typeface="Calibri" pitchFamily="34" charset="-120"/>
+              </a:rPr>
+              <a:t>Resultado clave</a:t>
+            </a:r>
+            <a:r>
               <a:rPr lang="en-US" sz="1350" b="1" dirty="0">
                 <a:solidFill>
                   <a:srgbClr val="7FE0EC"/>
@@ -4487,18 +5360,18 @@
                 <a:ea typeface="Calibri" pitchFamily="34" charset="-122"/>
                 <a:cs typeface="Calibri" pitchFamily="34" charset="-120"/>
               </a:rPr>
-              <a:t>Factores decisivos.  </a:t>
-            </a:r>
-            <a:r>
-              <a:rPr lang="en-US" sz="1350" dirty="0">
-                <a:solidFill>
-                  <a:srgbClr val="FFFFFF"/>
-                </a:solidFill>
-                <a:latin typeface="Calibri" pitchFamily="34" charset="0"/>
-                <a:ea typeface="Calibri" pitchFamily="34" charset="-122"/>
-                <a:cs typeface="Calibri" pitchFamily="34" charset="-120"/>
-              </a:rPr>
-              <a:t>La duración del contrato y la frecuencia de visitas son los principales factores asociados a la retención de clientes.</a:t>
+              <a:t>.  </a:t>
+            </a:r>
+            <a:r>
+              <a:rPr lang="en-US" sz="1350" b="1">
+                <a:solidFill>
+                  <a:srgbClr val="7FE0EC"/>
+                </a:solidFill>
+                <a:latin typeface="Calibri" pitchFamily="34" charset="0"/>
+                <a:ea typeface="Calibri" pitchFamily="34" charset="-122"/>
+                <a:cs typeface="Calibri" pitchFamily="34" charset="-120"/>
+              </a:rPr>
+              <a:t>La Regresión Logística es la mejor alternativa comparada; la segmentación de 5 clústeres complementa la priorización con perfiles de riesgo más específicos.</a:t>
             </a:r>
             <a:endParaRPr lang="en-US" sz="1350" dirty="0"/>
           </a:p>
@@ -4675,7 +5548,7 @@
               <a:buNone/>
             </a:pPr>
             <a:r>
-              <a:rPr lang="en-US" sz="2900" b="1" dirty="0">
+              <a:rPr lang="en-US" sz="2900" b="1">
                 <a:solidFill>
                   <a:srgbClr val="1B2A3A"/>
                 </a:solidFill>
@@ -4683,7 +5556,7 @@
                 <a:ea typeface="Trebuchet MS" pitchFamily="34" charset="-122"/>
                 <a:cs typeface="Trebuchet MS" pitchFamily="34" charset="-120"/>
               </a:rPr>
-              <a:t>La cancelación no ocurre al azar</a:t>
+              <a:t>Predicción y segmentación se complementan</a:t>
             </a:r>
             <a:endParaRPr lang="en-US" sz="2900" dirty="0"/>
           </a:p>
@@ -4717,6 +5590,17 @@
               <a:buNone/>
             </a:pPr>
             <a:r>
+              <a:rPr lang="en-US" sz="1450">
+                <a:solidFill>
+                  <a:srgbClr val="1B2A3A"/>
+                </a:solidFill>
+                <a:latin typeface="Calibri" pitchFamily="34" charset="0"/>
+                <a:ea typeface="Calibri" pitchFamily="34" charset="-122"/>
+                <a:cs typeface="Calibri" pitchFamily="34" charset="-120"/>
+              </a:rPr>
+              <a:t>El análisis identifica </a:t>
+            </a:r>
+            <a:r>
               <a:rPr lang="en-US" sz="1450" dirty="0">
                 <a:solidFill>
                   <a:srgbClr val="1B2A3A"/>
@@ -4725,7 +5609,117 @@
                 <a:ea typeface="Calibri" pitchFamily="34" charset="-122"/>
                 <a:cs typeface="Calibri" pitchFamily="34" charset="-120"/>
               </a:rPr>
-              <a:t>Existen patrones claros que permiten identificar con anticipación a los clientes con mayor riesgo de abandonar el gimnasio.</a:t>
+              <a:t>patrones </a:t>
+            </a:r>
+            <a:r>
+              <a:rPr lang="en-US" sz="1450">
+                <a:solidFill>
+                  <a:srgbClr val="1B2A3A"/>
+                </a:solidFill>
+                <a:latin typeface="Calibri" pitchFamily="34" charset="0"/>
+                <a:ea typeface="Calibri" pitchFamily="34" charset="-122"/>
+                <a:cs typeface="Calibri" pitchFamily="34" charset="-120"/>
+              </a:rPr>
+              <a:t>asociados </a:t>
+            </a:r>
+            <a:r>
+              <a:rPr lang="en-US" sz="1450" dirty="0">
+                <a:solidFill>
+                  <a:srgbClr val="1B2A3A"/>
+                </a:solidFill>
+                <a:latin typeface="Calibri" pitchFamily="34" charset="0"/>
+                <a:ea typeface="Calibri" pitchFamily="34" charset="-122"/>
+                <a:cs typeface="Calibri" pitchFamily="34" charset="-120"/>
+              </a:rPr>
+              <a:t>con </a:t>
+            </a:r>
+            <a:r>
+              <a:rPr lang="en-US" sz="1450">
+                <a:solidFill>
+                  <a:srgbClr val="1B2A3A"/>
+                </a:solidFill>
+                <a:latin typeface="Calibri" pitchFamily="34" charset="0"/>
+                <a:ea typeface="Calibri" pitchFamily="34" charset="-122"/>
+                <a:cs typeface="Calibri" pitchFamily="34" charset="-120"/>
+              </a:rPr>
+              <a:t>el churn y reconoce </a:t>
+            </a:r>
+            <a:r>
+              <a:rPr lang="en-US" sz="1450" dirty="0">
+                <a:solidFill>
+                  <a:srgbClr val="1B2A3A"/>
+                </a:solidFill>
+                <a:latin typeface="Calibri" pitchFamily="34" charset="0"/>
+                <a:ea typeface="Calibri" pitchFamily="34" charset="-122"/>
+                <a:cs typeface="Calibri" pitchFamily="34" charset="-120"/>
+              </a:rPr>
+              <a:t>a </a:t>
+            </a:r>
+            <a:r>
+              <a:rPr lang="en-US" sz="1450">
+                <a:solidFill>
+                  <a:srgbClr val="1B2A3A"/>
+                </a:solidFill>
+                <a:latin typeface="Calibri" pitchFamily="34" charset="0"/>
+                <a:ea typeface="Calibri" pitchFamily="34" charset="-122"/>
+                <a:cs typeface="Calibri" pitchFamily="34" charset="-120"/>
+              </a:rPr>
+              <a:t>una proporción importante </a:t>
+            </a:r>
+            <a:r>
+              <a:rPr lang="en-US" sz="1450" dirty="0">
+                <a:solidFill>
+                  <a:srgbClr val="1B2A3A"/>
+                </a:solidFill>
+                <a:latin typeface="Calibri" pitchFamily="34" charset="0"/>
+                <a:ea typeface="Calibri" pitchFamily="34" charset="-122"/>
+                <a:cs typeface="Calibri" pitchFamily="34" charset="-120"/>
+              </a:rPr>
+              <a:t>de </a:t>
+            </a:r>
+            <a:r>
+              <a:rPr lang="en-US" sz="1450">
+                <a:solidFill>
+                  <a:srgbClr val="1B2A3A"/>
+                </a:solidFill>
+                <a:latin typeface="Calibri" pitchFamily="34" charset="0"/>
+                <a:ea typeface="Calibri" pitchFamily="34" charset="-122"/>
+                <a:cs typeface="Calibri" pitchFamily="34" charset="-120"/>
+              </a:rPr>
+              <a:t>quienes realmente cancelaron en </a:t>
+            </a:r>
+            <a:r>
+              <a:rPr lang="en-US" sz="1450" dirty="0">
+                <a:solidFill>
+                  <a:srgbClr val="1B2A3A"/>
+                </a:solidFill>
+                <a:latin typeface="Calibri" pitchFamily="34" charset="0"/>
+                <a:ea typeface="Calibri" pitchFamily="34" charset="-122"/>
+                <a:cs typeface="Calibri" pitchFamily="34" charset="-120"/>
+              </a:rPr>
+              <a:t>el </a:t>
+            </a:r>
+            <a:r>
+              <a:rPr lang="en-US" sz="1450">
+                <a:solidFill>
+                  <a:srgbClr val="1B2A3A"/>
+                </a:solidFill>
+                <a:latin typeface="Calibri" pitchFamily="34" charset="0"/>
+                <a:ea typeface="Calibri" pitchFamily="34" charset="-122"/>
+                <a:cs typeface="Calibri" pitchFamily="34" charset="-120"/>
+              </a:rPr>
+              <a:t>conjunto de prueba</a:t>
+            </a:r>
+            <a:r>
+              <a:rPr lang="en-US" sz="1450" dirty="0">
+                <a:solidFill>
+                  <a:srgbClr val="1B2A3A"/>
+                </a:solidFill>
+                <a:latin typeface="Calibri" pitchFamily="34" charset="0"/>
+                <a:ea typeface="Calibri" pitchFamily="34" charset="-122"/>
+                <a:cs typeface="Calibri" pitchFamily="34" charset="-120"/>
+              </a:rPr>
+              <a:t>.</a:t>
             </a:r>
             <a:endParaRPr lang="en-US" sz="1450" dirty="0"/>
           </a:p>
@@ -4834,7 +5828,7 @@
               <a:buNone/>
             </a:pPr>
             <a:r>
-              <a:rPr lang="en-US" sz="1500" b="1" dirty="0">
+              <a:rPr lang="en-US" sz="1500" b="1">
                 <a:solidFill>
                   <a:srgbClr val="E06A4E"/>
                 </a:solidFill>
@@ -4842,7 +5836,7 @@
                 <a:ea typeface="Trebuchet MS" pitchFamily="34" charset="-122"/>
                 <a:cs typeface="Trebuchet MS" pitchFamily="34" charset="-120"/>
               </a:rPr>
-              <a:t>Mayor riesgo</a:t>
+              <a:t>Modelo principal</a:t>
             </a:r>
             <a:endParaRPr lang="en-US" sz="1500" dirty="0"/>
           </a:p>
@@ -4876,6 +5870,17 @@
               <a:buNone/>
             </a:pPr>
             <a:r>
+              <a:rPr lang="en-US" sz="1250">
+                <a:solidFill>
+                  <a:srgbClr val="1B2A3A"/>
+                </a:solidFill>
+                <a:latin typeface="Calibri" pitchFamily="34" charset="0"/>
+                <a:ea typeface="Calibri" pitchFamily="34" charset="-122"/>
+                <a:cs typeface="Calibri" pitchFamily="34" charset="-120"/>
+              </a:rPr>
+              <a:t>Regresión Logística obtiene el mejor desempeño de las dos alternativas</a:t>
+            </a:r>
+            <a:r>
               <a:rPr lang="en-US" sz="1250" dirty="0">
                 <a:solidFill>
                   <a:srgbClr val="1B2A3A"/>
@@ -4884,7 +5889,40 @@
                 <a:ea typeface="Calibri" pitchFamily="34" charset="-122"/>
                 <a:cs typeface="Calibri" pitchFamily="34" charset="-120"/>
               </a:rPr>
-              <a:t>Poca asistencia, baja antigüedad, planes cortos y uso limitado de servicios adicionales.</a:t>
+              <a:t>, </a:t>
+            </a:r>
+            <a:r>
+              <a:rPr lang="en-US" sz="1250">
+                <a:solidFill>
+                  <a:srgbClr val="1B2A3A"/>
+                </a:solidFill>
+                <a:latin typeface="Calibri" pitchFamily="34" charset="0"/>
+                <a:ea typeface="Calibri" pitchFamily="34" charset="-122"/>
+                <a:cs typeface="Calibri" pitchFamily="34" charset="-120"/>
+              </a:rPr>
+              <a:t>con recall </a:t>
+            </a:r>
+            <a:r>
+              <a:rPr lang="en-US" sz="1250" dirty="0">
+                <a:solidFill>
+                  <a:srgbClr val="1B2A3A"/>
+                </a:solidFill>
+                <a:latin typeface="Calibri" pitchFamily="34" charset="0"/>
+                <a:ea typeface="Calibri" pitchFamily="34" charset="-122"/>
+                <a:cs typeface="Calibri" pitchFamily="34" charset="-120"/>
+              </a:rPr>
+              <a:t>de </a:t>
+            </a:r>
+            <a:r>
+              <a:rPr lang="en-US" sz="1250">
+                <a:solidFill>
+                  <a:srgbClr val="1B2A3A"/>
+                </a:solidFill>
+                <a:latin typeface="Calibri" pitchFamily="34" charset="0"/>
+                <a:ea typeface="Calibri" pitchFamily="34" charset="-122"/>
+                <a:cs typeface="Calibri" pitchFamily="34" charset="-120"/>
+              </a:rPr>
+              <a:t>85.38%.</a:t>
             </a:r>
             <a:endParaRPr lang="en-US" sz="1250" dirty="0"/>
           </a:p>
@@ -4993,7 +6031,7 @@
               <a:buNone/>
             </a:pPr>
             <a:r>
-              <a:rPr lang="en-US" sz="1500" b="1" dirty="0">
+              <a:rPr lang="en-US" sz="1500" b="1">
                 <a:solidFill>
                   <a:srgbClr val="2FA37A"/>
                 </a:solidFill>
@@ -5001,7 +6039,7 @@
                 <a:ea typeface="Trebuchet MS" pitchFamily="34" charset="-122"/>
                 <a:cs typeface="Trebuchet MS" pitchFamily="34" charset="-120"/>
               </a:rPr>
-              <a:t>Mayor permanencia</a:t>
+              <a:t>Lectura por segmentos</a:t>
             </a:r>
             <a:endParaRPr lang="en-US" sz="1500" dirty="0"/>
           </a:p>
@@ -5035,6 +6073,17 @@
               <a:buNone/>
             </a:pPr>
             <a:r>
+              <a:rPr lang="en-US" sz="1250">
+                <a:solidFill>
+                  <a:srgbClr val="1B2A3A"/>
+                </a:solidFill>
+                <a:latin typeface="Calibri" pitchFamily="34" charset="0"/>
+                <a:ea typeface="Calibri" pitchFamily="34" charset="-122"/>
+                <a:cs typeface="Calibri" pitchFamily="34" charset="-120"/>
+              </a:rPr>
+              <a:t>Cinco clústeres permiten explorar perfiles </a:t>
+            </a:r>
+            <a:r>
               <a:rPr lang="en-US" sz="1250" dirty="0">
                 <a:solidFill>
                   <a:srgbClr val="1B2A3A"/>
@@ -5043,7 +6092,29 @@
                 <a:ea typeface="Calibri" pitchFamily="34" charset="-122"/>
                 <a:cs typeface="Calibri" pitchFamily="34" charset="-120"/>
               </a:rPr>
-              <a:t>Hábitos de asistencia constantes y mayor involucramiento con los servicios del gimnasio.</a:t>
+              <a:t>y </a:t>
+            </a:r>
+            <a:r>
+              <a:rPr lang="en-US" sz="1250">
+                <a:solidFill>
+                  <a:srgbClr val="1B2A3A"/>
+                </a:solidFill>
+                <a:latin typeface="Calibri" pitchFamily="34" charset="0"/>
+                <a:ea typeface="Calibri" pitchFamily="34" charset="-122"/>
+                <a:cs typeface="Calibri" pitchFamily="34" charset="-120"/>
+              </a:rPr>
+              <a:t>tasas históricas de cancelación más específicos</a:t>
+            </a:r>
+            <a:r>
+              <a:rPr lang="en-US" sz="1250" dirty="0">
+                <a:solidFill>
+                  <a:srgbClr val="1B2A3A"/>
+                </a:solidFill>
+                <a:latin typeface="Calibri" pitchFamily="34" charset="0"/>
+                <a:ea typeface="Calibri" pitchFamily="34" charset="-122"/>
+                <a:cs typeface="Calibri" pitchFamily="34" charset="-120"/>
+              </a:rPr>
+              <a:t>.</a:t>
             </a:r>
             <a:endParaRPr lang="en-US" sz="1250" dirty="0"/>
           </a:p>
@@ -5152,7 +6223,7 @@
               <a:buNone/>
             </a:pPr>
             <a:r>
-              <a:rPr lang="en-US" sz="1500" b="1" dirty="0">
+              <a:rPr lang="en-US" sz="1500" b="1">
                 <a:solidFill>
                   <a:srgbClr val="1F6FB2"/>
                 </a:solidFill>
@@ -5160,7 +6231,7 @@
                 <a:ea typeface="Trebuchet MS" pitchFamily="34" charset="-122"/>
                 <a:cs typeface="Trebuchet MS" pitchFamily="34" charset="-120"/>
               </a:rPr>
-              <a:t>Retención a la medida</a:t>
+              <a:t>Prueba en operación</a:t>
             </a:r>
             <a:endParaRPr lang="en-US" sz="1500" dirty="0"/>
           </a:p>
@@ -5194,6 +6265,17 @@
               <a:buNone/>
             </a:pPr>
             <a:r>
+              <a:rPr lang="en-US" sz="1250">
+                <a:solidFill>
+                  <a:srgbClr val="1B2A3A"/>
+                </a:solidFill>
+                <a:latin typeface="Calibri" pitchFamily="34" charset="0"/>
+                <a:ea typeface="Calibri" pitchFamily="34" charset="-122"/>
+                <a:cs typeface="Calibri" pitchFamily="34" charset="-120"/>
+              </a:rPr>
+              <a:t>Las intervenciones deben validarse para comprobar si reducen churn y generan beneficio económico</a:t>
+            </a:r>
+            <a:r>
               <a:rPr lang="en-US" sz="1250" dirty="0">
                 <a:solidFill>
                   <a:srgbClr val="1B2A3A"/>
@@ -5202,7 +6284,7 @@
                 <a:ea typeface="Calibri" pitchFamily="34" charset="-122"/>
                 <a:cs typeface="Calibri" pitchFamily="34" charset="-120"/>
               </a:rPr>
-              <a:t>La segmentación revela grupos distintos: una estrategia general no es la más eficiente.</a:t>
+              <a:t>.</a:t>
             </a:r>
             <a:endParaRPr lang="en-US" sz="1250" dirty="0"/>
           </a:p>
@@ -5241,7 +6323,95 @@
                 <a:ea typeface="Calibri" pitchFamily="34" charset="-122"/>
                 <a:cs typeface="Calibri" pitchFamily="34" charset="-120"/>
               </a:rPr>
-              <a:t>Una base objetiva para priorizar clientes en riesgo, intervenir antes de que abandonen y aumentar el valor de cada cliente.</a:t>
+              <a:t>Una base </a:t>
+            </a:r>
+            <a:r>
+              <a:rPr lang="en-US" sz="1250" i="1">
+                <a:solidFill>
+                  <a:srgbClr val="5E7186"/>
+                </a:solidFill>
+                <a:latin typeface="Calibri" pitchFamily="34" charset="0"/>
+                <a:ea typeface="Calibri" pitchFamily="34" charset="-122"/>
+                <a:cs typeface="Calibri" pitchFamily="34" charset="-120"/>
+              </a:rPr>
+              <a:t>analítica </a:t>
+            </a:r>
+            <a:r>
+              <a:rPr lang="en-US" sz="1250" i="1" dirty="0">
+                <a:solidFill>
+                  <a:srgbClr val="5E7186"/>
+                </a:solidFill>
+                <a:latin typeface="Calibri" pitchFamily="34" charset="0"/>
+                <a:ea typeface="Calibri" pitchFamily="34" charset="-122"/>
+                <a:cs typeface="Calibri" pitchFamily="34" charset="-120"/>
+              </a:rPr>
+              <a:t>para priorizar </a:t>
+            </a:r>
+            <a:r>
+              <a:rPr lang="en-US" sz="1250" i="1">
+                <a:solidFill>
+                  <a:srgbClr val="5E7186"/>
+                </a:solidFill>
+                <a:latin typeface="Calibri" pitchFamily="34" charset="0"/>
+                <a:ea typeface="Calibri" pitchFamily="34" charset="-122"/>
+                <a:cs typeface="Calibri" pitchFamily="34" charset="-120"/>
+              </a:rPr>
+              <a:t>la atención preventiva</a:t>
+            </a:r>
+            <a:r>
+              <a:rPr lang="en-US" sz="1250" i="1" dirty="0">
+                <a:solidFill>
+                  <a:srgbClr val="5E7186"/>
+                </a:solidFill>
+                <a:latin typeface="Calibri" pitchFamily="34" charset="0"/>
+                <a:ea typeface="Calibri" pitchFamily="34" charset="-122"/>
+                <a:cs typeface="Calibri" pitchFamily="34" charset="-120"/>
+              </a:rPr>
+              <a:t>, </a:t>
+            </a:r>
+            <a:r>
+              <a:rPr lang="en-US" sz="1250" i="1">
+                <a:solidFill>
+                  <a:srgbClr val="5E7186"/>
+                </a:solidFill>
+                <a:latin typeface="Calibri" pitchFamily="34" charset="0"/>
+                <a:ea typeface="Calibri" pitchFamily="34" charset="-122"/>
+                <a:cs typeface="Calibri" pitchFamily="34" charset="-120"/>
+              </a:rPr>
+              <a:t>adaptar acciones por perfil </a:t>
+            </a:r>
+            <a:r>
+              <a:rPr lang="en-US" sz="1250" i="1" dirty="0">
+                <a:solidFill>
+                  <a:srgbClr val="5E7186"/>
+                </a:solidFill>
+                <a:latin typeface="Calibri" pitchFamily="34" charset="0"/>
+                <a:ea typeface="Calibri" pitchFamily="34" charset="-122"/>
+                <a:cs typeface="Calibri" pitchFamily="34" charset="-120"/>
+              </a:rPr>
+              <a:t>y </a:t>
+            </a:r>
+            <a:r>
+              <a:rPr lang="en-US" sz="1250" i="1">
+                <a:solidFill>
+                  <a:srgbClr val="5E7186"/>
+                </a:solidFill>
+                <a:latin typeface="Calibri" pitchFamily="34" charset="0"/>
+                <a:ea typeface="Calibri" pitchFamily="34" charset="-122"/>
+                <a:cs typeface="Calibri" pitchFamily="34" charset="-120"/>
+              </a:rPr>
+              <a:t>medir su impacto real</a:t>
+            </a:r>
+            <a:r>
+              <a:rPr lang="en-US" sz="1250" i="1" dirty="0">
+                <a:solidFill>
+                  <a:srgbClr val="5E7186"/>
+                </a:solidFill>
+                <a:latin typeface="Calibri" pitchFamily="34" charset="0"/>
+                <a:ea typeface="Calibri" pitchFamily="34" charset="-122"/>
+                <a:cs typeface="Calibri" pitchFamily="34" charset="-120"/>
+              </a:rPr>
+              <a:t>.</a:t>
             </a:r>
             <a:endParaRPr lang="en-US" sz="1250" dirty="0"/>
           </a:p>
@@ -5426,7 +6596,51 @@
                 <a:ea typeface="Trebuchet MS" pitchFamily="34" charset="-122"/>
                 <a:cs typeface="Trebuchet MS" pitchFamily="34" charset="-120"/>
               </a:rPr>
-              <a:t>Cinco palancas para mejorar la retención</a:t>
+              <a:t>Cinco </a:t>
+            </a:r>
+            <a:r>
+              <a:rPr lang="en-US" sz="2900" b="1">
+                <a:solidFill>
+                  <a:srgbClr val="1B2A3A"/>
+                </a:solidFill>
+                <a:latin typeface="Trebuchet MS" pitchFamily="34" charset="0"/>
+                <a:ea typeface="Trebuchet MS" pitchFamily="34" charset="-122"/>
+                <a:cs typeface="Trebuchet MS" pitchFamily="34" charset="-120"/>
+              </a:rPr>
+              <a:t>acciones </a:t>
+            </a:r>
+            <a:r>
+              <a:rPr lang="en-US" sz="2900" b="1" dirty="0">
+                <a:solidFill>
+                  <a:srgbClr val="1B2A3A"/>
+                </a:solidFill>
+                <a:latin typeface="Trebuchet MS" pitchFamily="34" charset="0"/>
+                <a:ea typeface="Trebuchet MS" pitchFamily="34" charset="-122"/>
+                <a:cs typeface="Trebuchet MS" pitchFamily="34" charset="-120"/>
+              </a:rPr>
+              <a:t>para </a:t>
+            </a:r>
+            <a:r>
+              <a:rPr lang="en-US" sz="2900" b="1">
+                <a:solidFill>
+                  <a:srgbClr val="1B2A3A"/>
+                </a:solidFill>
+                <a:latin typeface="Trebuchet MS" pitchFamily="34" charset="0"/>
+                <a:ea typeface="Trebuchet MS" pitchFamily="34" charset="-122"/>
+                <a:cs typeface="Trebuchet MS" pitchFamily="34" charset="-120"/>
+              </a:rPr>
+              <a:t>convertir el análisis en</a:t>
+            </a:r>
+            <a:r>
+              <a:rPr lang="en-US" sz="2900" b="1" dirty="0">
+                <a:solidFill>
+                  <a:srgbClr val="1B2A3A"/>
+                </a:solidFill>
+                <a:latin typeface="Trebuchet MS" pitchFamily="34" charset="0"/>
+                <a:ea typeface="Trebuchet MS" pitchFamily="34" charset="-122"/>
+                <a:cs typeface="Trebuchet MS" pitchFamily="34" charset="-120"/>
+              </a:rPr>
+              <a:t> retención</a:t>
             </a:r>
             <a:endParaRPr lang="en-US" sz="2900" dirty="0"/>
           </a:p>
@@ -5567,6 +6781,17 @@
               <a:buNone/>
             </a:pPr>
             <a:r>
+              <a:rPr lang="en-US" sz="1350">
+                <a:solidFill>
+                  <a:srgbClr val="1B2A3A"/>
+                </a:solidFill>
+                <a:latin typeface="Calibri" pitchFamily="34" charset="0"/>
+                <a:ea typeface="Calibri" pitchFamily="34" charset="-122"/>
+                <a:cs typeface="Calibri" pitchFamily="34" charset="-120"/>
+              </a:rPr>
+              <a:t>Fortalecer</a:t>
+            </a:r>
+            <a:r>
               <a:rPr lang="en-US" sz="1350" dirty="0">
                 <a:solidFill>
                   <a:srgbClr val="1B2A3A"/>
@@ -5575,7 +6800,7 @@
                 <a:ea typeface="Calibri" pitchFamily="34" charset="-122"/>
                 <a:cs typeface="Calibri" pitchFamily="34" charset="-120"/>
               </a:rPr>
-              <a:t>Reforzar la incorporación de nuevos clientes durante las primeras semanas.</a:t>
+              <a:t> la incorporación de nuevos clientes durante las primeras semanas.</a:t>
             </a:r>
             <a:endParaRPr lang="en-US" sz="1350" dirty="0"/>
           </a:p>
@@ -5724,7 +6949,29 @@
                 <a:ea typeface="Calibri" pitchFamily="34" charset="-122"/>
                 <a:cs typeface="Calibri" pitchFamily="34" charset="-120"/>
               </a:rPr>
-              <a:t>Monitorear la frecuencia de asistencia para detectar señales tempranas de abandono.</a:t>
+              <a:t>Monitorear la frecuencia de asistencia </a:t>
+            </a:r>
+            <a:r>
+              <a:rPr lang="en-US" sz="1350">
+                <a:solidFill>
+                  <a:srgbClr val="1B2A3A"/>
+                </a:solidFill>
+                <a:latin typeface="Calibri" pitchFamily="34" charset="0"/>
+                <a:ea typeface="Calibri" pitchFamily="34" charset="-122"/>
+                <a:cs typeface="Calibri" pitchFamily="34" charset="-120"/>
+              </a:rPr>
+              <a:t>como posible señal temprana</a:t>
+            </a:r>
+            <a:r>
+              <a:rPr lang="en-US" sz="1350" dirty="0">
+                <a:solidFill>
+                  <a:srgbClr val="1B2A3A"/>
+                </a:solidFill>
+                <a:latin typeface="Calibri" pitchFamily="34" charset="0"/>
+                <a:ea typeface="Calibri" pitchFamily="34" charset="-122"/>
+                <a:cs typeface="Calibri" pitchFamily="34" charset="-120"/>
+              </a:rPr>
+              <a:t> de abandono.</a:t>
             </a:r>
             <a:endParaRPr lang="en-US" sz="1350" dirty="0"/>
           </a:p>
@@ -5865,6 +7112,17 @@
               <a:buNone/>
             </a:pPr>
             <a:r>
+              <a:rPr lang="en-US" sz="1350">
+                <a:solidFill>
+                  <a:srgbClr val="1B2A3A"/>
+                </a:solidFill>
+                <a:latin typeface="Calibri" pitchFamily="34" charset="0"/>
+                <a:ea typeface="Calibri" pitchFamily="34" charset="-122"/>
+                <a:cs typeface="Calibri" pitchFamily="34" charset="-120"/>
+              </a:rPr>
+              <a:t>Evaluar incentivos para contratar</a:t>
+            </a:r>
+            <a:r>
               <a:rPr lang="en-US" sz="1350" dirty="0">
                 <a:solidFill>
                   <a:srgbClr val="1B2A3A"/>
@@ -5873,7 +7131,7 @@
                 <a:ea typeface="Calibri" pitchFamily="34" charset="-122"/>
                 <a:cs typeface="Calibri" pitchFamily="34" charset="-120"/>
               </a:rPr>
-              <a:t>Incentivar la contratación de planes de mayor duración.</a:t>
+              <a:t> planes de mayor duración.</a:t>
             </a:r>
             <a:endParaRPr lang="en-US" sz="1350" dirty="0"/>
           </a:p>
@@ -6022,7 +7280,51 @@
                 <a:ea typeface="Calibri" pitchFamily="34" charset="-122"/>
                 <a:cs typeface="Calibri" pitchFamily="34" charset="-120"/>
               </a:rPr>
-              <a:t>Promover el uso de servicios adicionales para aumentar el compromiso.</a:t>
+              <a:t>Promover </a:t>
+            </a:r>
+            <a:r>
+              <a:rPr lang="en-US" sz="1350">
+                <a:solidFill>
+                  <a:srgbClr val="1B2A3A"/>
+                </a:solidFill>
+                <a:latin typeface="Calibri" pitchFamily="34" charset="0"/>
+                <a:ea typeface="Calibri" pitchFamily="34" charset="-122"/>
+                <a:cs typeface="Calibri" pitchFamily="34" charset="-120"/>
+              </a:rPr>
+              <a:t>actividades grupales y </a:t>
+            </a:r>
+            <a:r>
+              <a:rPr lang="en-US" sz="1350" dirty="0">
+                <a:solidFill>
+                  <a:srgbClr val="1B2A3A"/>
+                </a:solidFill>
+                <a:latin typeface="Calibri" pitchFamily="34" charset="0"/>
+                <a:ea typeface="Calibri" pitchFamily="34" charset="-122"/>
+                <a:cs typeface="Calibri" pitchFamily="34" charset="-120"/>
+              </a:rPr>
+              <a:t>servicios adicionales para aumentar el </a:t>
+            </a:r>
+            <a:r>
+              <a:rPr lang="en-US" sz="1350">
+                <a:solidFill>
+                  <a:srgbClr val="1B2A3A"/>
+                </a:solidFill>
+                <a:latin typeface="Calibri" pitchFamily="34" charset="0"/>
+                <a:ea typeface="Calibri" pitchFamily="34" charset="-122"/>
+                <a:cs typeface="Calibri" pitchFamily="34" charset="-120"/>
+              </a:rPr>
+              <a:t>involucramiento</a:t>
+            </a:r>
+            <a:r>
+              <a:rPr lang="en-US" sz="1350" dirty="0">
+                <a:solidFill>
+                  <a:srgbClr val="1B2A3A"/>
+                </a:solidFill>
+                <a:latin typeface="Calibri" pitchFamily="34" charset="0"/>
+                <a:ea typeface="Calibri" pitchFamily="34" charset="-122"/>
+                <a:cs typeface="Calibri" pitchFamily="34" charset="-120"/>
+              </a:rPr>
+              <a:t>.</a:t>
             </a:r>
             <a:endParaRPr lang="en-US" sz="1350" dirty="0"/>
           </a:p>
@@ -6163,6 +7465,17 @@
               <a:buNone/>
             </a:pPr>
             <a:r>
+              <a:rPr lang="en-US" sz="1350">
+                <a:solidFill>
+                  <a:srgbClr val="1B2A3A"/>
+                </a:solidFill>
+                <a:latin typeface="Calibri" pitchFamily="34" charset="0"/>
+                <a:ea typeface="Calibri" pitchFamily="34" charset="-122"/>
+                <a:cs typeface="Calibri" pitchFamily="34" charset="-120"/>
+              </a:rPr>
+              <a:t>Diferenciar la </a:t>
+            </a:r>
+            <a:r>
               <a:rPr lang="en-US" sz="1350" dirty="0">
                 <a:solidFill>
                   <a:srgbClr val="1B2A3A"/>
@@ -6171,7 +7484,51 @@
                 <a:ea typeface="Calibri" pitchFamily="34" charset="-122"/>
                 <a:cs typeface="Calibri" pitchFamily="34" charset="-120"/>
               </a:rPr>
-              <a:t>Diseñar estrategias de retención específicas para cada segmento.</a:t>
+              <a:t>retención </a:t>
+            </a:r>
+            <a:r>
+              <a:rPr lang="en-US" sz="1350">
+                <a:solidFill>
+                  <a:srgbClr val="1B2A3A"/>
+                </a:solidFill>
+                <a:latin typeface="Calibri" pitchFamily="34" charset="0"/>
+                <a:ea typeface="Calibri" pitchFamily="34" charset="-122"/>
+                <a:cs typeface="Calibri" pitchFamily="34" charset="-120"/>
+              </a:rPr>
+              <a:t>por </a:t>
+            </a:r>
+            <a:r>
+              <a:rPr lang="en-US" sz="1350" dirty="0">
+                <a:solidFill>
+                  <a:srgbClr val="1B2A3A"/>
+                </a:solidFill>
+                <a:latin typeface="Calibri" pitchFamily="34" charset="0"/>
+                <a:ea typeface="Calibri" pitchFamily="34" charset="-122"/>
+                <a:cs typeface="Calibri" pitchFamily="34" charset="-120"/>
+              </a:rPr>
+              <a:t>segmento</a:t>
+            </a:r>
+            <a:r>
+              <a:rPr lang="en-US" sz="1350">
+                <a:solidFill>
+                  <a:srgbClr val="1B2A3A"/>
+                </a:solidFill>
+                <a:latin typeface="Calibri" pitchFamily="34" charset="0"/>
+                <a:ea typeface="Calibri" pitchFamily="34" charset="-122"/>
+                <a:cs typeface="Calibri" pitchFamily="34" charset="-120"/>
+              </a:rPr>
+              <a:t> y medir resultados con seguimiento o pruebas controladas</a:t>
+            </a:r>
+            <a:r>
+              <a:rPr lang="en-US" sz="1350" dirty="0">
+                <a:solidFill>
+                  <a:srgbClr val="1B2A3A"/>
+                </a:solidFill>
+                <a:latin typeface="Calibri" pitchFamily="34" charset="0"/>
+                <a:ea typeface="Calibri" pitchFamily="34" charset="-122"/>
+                <a:cs typeface="Calibri" pitchFamily="34" charset="-120"/>
+              </a:rPr>
+              <a:t>.</a:t>
             </a:r>
             <a:endParaRPr lang="en-US" sz="1350" dirty="0"/>
           </a:p>
@@ -6456,7 +7813,95 @@
                 <a:ea typeface="Calibri" pitchFamily="34" charset="-122"/>
                 <a:cs typeface="Calibri" pitchFamily="34" charset="-120"/>
               </a:rPr>
-              <a:t>Priorizar clientes en riesgo, intervenir a tiempo y diseñar estrategias enfocadas en la permanencia y el valor de cada cliente.</a:t>
+              <a:t>Priorizar clientes en riesgo, </a:t>
+            </a:r>
+            <a:r>
+              <a:rPr lang="en-US" sz="1500">
+                <a:solidFill>
+                  <a:srgbClr val="E4EEF6"/>
+                </a:solidFill>
+                <a:latin typeface="Calibri" pitchFamily="34" charset="0"/>
+                <a:ea typeface="Calibri" pitchFamily="34" charset="-122"/>
+                <a:cs typeface="Calibri" pitchFamily="34" charset="-120"/>
+              </a:rPr>
+              <a:t>adaptar acciones </a:t>
+            </a:r>
+            <a:r>
+              <a:rPr lang="en-US" sz="1500" dirty="0">
+                <a:solidFill>
+                  <a:srgbClr val="E4EEF6"/>
+                </a:solidFill>
+                <a:latin typeface="Calibri" pitchFamily="34" charset="0"/>
+                <a:ea typeface="Calibri" pitchFamily="34" charset="-122"/>
+                <a:cs typeface="Calibri" pitchFamily="34" charset="-120"/>
+              </a:rPr>
+              <a:t>a </a:t>
+            </a:r>
+            <a:r>
+              <a:rPr lang="en-US" sz="1500">
+                <a:solidFill>
+                  <a:srgbClr val="E4EEF6"/>
+                </a:solidFill>
+                <a:latin typeface="Calibri" pitchFamily="34" charset="0"/>
+                <a:ea typeface="Calibri" pitchFamily="34" charset="-122"/>
+                <a:cs typeface="Calibri" pitchFamily="34" charset="-120"/>
+              </a:rPr>
+              <a:t>sus perfiles </a:t>
+            </a:r>
+            <a:r>
+              <a:rPr lang="en-US" sz="1500" dirty="0">
+                <a:solidFill>
+                  <a:srgbClr val="E4EEF6"/>
+                </a:solidFill>
+                <a:latin typeface="Calibri" pitchFamily="34" charset="0"/>
+                <a:ea typeface="Calibri" pitchFamily="34" charset="-122"/>
+                <a:cs typeface="Calibri" pitchFamily="34" charset="-120"/>
+              </a:rPr>
+              <a:t>y </a:t>
+            </a:r>
+            <a:r>
+              <a:rPr lang="en-US" sz="1500">
+                <a:solidFill>
+                  <a:srgbClr val="E4EEF6"/>
+                </a:solidFill>
+                <a:latin typeface="Calibri" pitchFamily="34" charset="0"/>
+                <a:ea typeface="Calibri" pitchFamily="34" charset="-122"/>
+                <a:cs typeface="Calibri" pitchFamily="34" charset="-120"/>
+              </a:rPr>
+              <a:t>probar </a:t>
+            </a:r>
+            <a:r>
+              <a:rPr lang="en-US" sz="1500" dirty="0">
+                <a:solidFill>
+                  <a:srgbClr val="E4EEF6"/>
+                </a:solidFill>
+                <a:latin typeface="Calibri" pitchFamily="34" charset="0"/>
+                <a:ea typeface="Calibri" pitchFamily="34" charset="-122"/>
+                <a:cs typeface="Calibri" pitchFamily="34" charset="-120"/>
+              </a:rPr>
+              <a:t>cada </a:t>
+            </a:r>
+            <a:r>
+              <a:rPr lang="en-US" sz="1500">
+                <a:solidFill>
+                  <a:srgbClr val="E4EEF6"/>
+                </a:solidFill>
+                <a:latin typeface="Calibri" pitchFamily="34" charset="0"/>
+                <a:ea typeface="Calibri" pitchFamily="34" charset="-122"/>
+                <a:cs typeface="Calibri" pitchFamily="34" charset="-120"/>
+              </a:rPr>
+              <a:t>intervención antes de escalarla</a:t>
+            </a:r>
+            <a:r>
+              <a:rPr lang="en-US" sz="1500" dirty="0">
+                <a:solidFill>
+                  <a:srgbClr val="E4EEF6"/>
+                </a:solidFill>
+                <a:latin typeface="Calibri" pitchFamily="34" charset="0"/>
+                <a:ea typeface="Calibri" pitchFamily="34" charset="-122"/>
+                <a:cs typeface="Calibri" pitchFamily="34" charset="-120"/>
+              </a:rPr>
+              <a:t>.</a:t>
             </a:r>
             <a:endParaRPr lang="en-US" sz="1500" dirty="0"/>
           </a:p>
@@ -6614,7 +8059,18 @@
                 <a:ea typeface="Calibri" pitchFamily="34" charset="-122"/>
                 <a:cs typeface="Calibri" pitchFamily="34" charset="-120"/>
               </a:rPr>
-              <a:t>Código auxiliar</a:t>
+              <a:t>Código </a:t>
+            </a:r>
+            <a:r>
+              <a:rPr lang="en-US" sz="1250" b="1">
+                <a:solidFill>
+                  <a:srgbClr val="FFFFFF"/>
+                </a:solidFill>
+                <a:latin typeface="Calibri" pitchFamily="34" charset="0"/>
+                <a:ea typeface="Calibri" pitchFamily="34" charset="-122"/>
+                <a:cs typeface="Calibri" pitchFamily="34" charset="-120"/>
+              </a:rPr>
+              <a:t>y dependencias</a:t>
             </a:r>
             <a:endParaRPr lang="en-US" sz="1250" dirty="0"/>
           </a:p>
@@ -6685,7 +8141,7 @@
               <a:buNone/>
             </a:pPr>
             <a:r>
-              <a:rPr lang="en-US" sz="1250" b="1" dirty="0">
+              <a:rPr lang="en-US" sz="1250" b="1">
                 <a:solidFill>
                   <a:srgbClr val="FFFFFF"/>
                 </a:solidFill>
@@ -6693,7 +8149,7 @@
                 <a:ea typeface="Calibri" pitchFamily="34" charset="-122"/>
                 <a:cs typeface="Calibri" pitchFamily="34" charset="-120"/>
               </a:rPr>
-              <a:t>Presentación ejecutiva</a:t>
+              <a:t>Gráficas y documentación</a:t>
             </a:r>
             <a:endParaRPr lang="en-US" sz="1250" dirty="0"/>
           </a:p>
@@ -6842,7 +8298,139 @@
                 <a:ea typeface="Calibri" pitchFamily="34" charset="-122"/>
                 <a:cs typeface="Calibri" pitchFamily="34" charset="-120"/>
               </a:rPr>
-              <a:t>Model Fitness es una cadena de gimnasios que busca reducir su tasa de cancelación de membresías analizando el comportamiento de sus clientes para anticipar el abandono y actuar antes de que ocurra.</a:t>
+              <a:t>Model Fitness busca reducir </a:t>
+            </a:r>
+            <a:r>
+              <a:rPr lang="en-US" sz="1450">
+                <a:solidFill>
+                  <a:srgbClr val="1B2A3A"/>
+                </a:solidFill>
+                <a:latin typeface="Calibri" pitchFamily="34" charset="0"/>
+                <a:ea typeface="Calibri" pitchFamily="34" charset="-122"/>
+                <a:cs typeface="Calibri" pitchFamily="34" charset="-120"/>
+              </a:rPr>
+              <a:t>la </a:t>
+            </a:r>
+            <a:r>
+              <a:rPr lang="en-US" sz="1450" dirty="0">
+                <a:solidFill>
+                  <a:srgbClr val="1B2A3A"/>
+                </a:solidFill>
+                <a:latin typeface="Calibri" pitchFamily="34" charset="0"/>
+                <a:ea typeface="Calibri" pitchFamily="34" charset="-122"/>
+                <a:cs typeface="Calibri" pitchFamily="34" charset="-120"/>
+              </a:rPr>
+              <a:t>cancelación de membresías </a:t>
+            </a:r>
+            <a:r>
+              <a:rPr lang="en-US" sz="1450">
+                <a:solidFill>
+                  <a:srgbClr val="1B2A3A"/>
+                </a:solidFill>
+                <a:latin typeface="Calibri" pitchFamily="34" charset="0"/>
+                <a:ea typeface="Calibri" pitchFamily="34" charset="-122"/>
+                <a:cs typeface="Calibri" pitchFamily="34" charset="-120"/>
+              </a:rPr>
+              <a:t>mediante </a:t>
+            </a:r>
+            <a:r>
+              <a:rPr lang="en-US" sz="1450" dirty="0">
+                <a:solidFill>
+                  <a:srgbClr val="1B2A3A"/>
+                </a:solidFill>
+                <a:latin typeface="Calibri" pitchFamily="34" charset="0"/>
+                <a:ea typeface="Calibri" pitchFamily="34" charset="-122"/>
+                <a:cs typeface="Calibri" pitchFamily="34" charset="-120"/>
+              </a:rPr>
+              <a:t>el </a:t>
+            </a:r>
+            <a:r>
+              <a:rPr lang="en-US" sz="1450">
+                <a:solidFill>
+                  <a:srgbClr val="1B2A3A"/>
+                </a:solidFill>
+                <a:latin typeface="Calibri" pitchFamily="34" charset="0"/>
+                <a:ea typeface="Calibri" pitchFamily="34" charset="-122"/>
+                <a:cs typeface="Calibri" pitchFamily="34" charset="-120"/>
+              </a:rPr>
+              <a:t>análisis del </a:t>
+            </a:r>
+            <a:r>
+              <a:rPr lang="en-US" sz="1450" dirty="0">
+                <a:solidFill>
+                  <a:srgbClr val="1B2A3A"/>
+                </a:solidFill>
+                <a:latin typeface="Calibri" pitchFamily="34" charset="0"/>
+                <a:ea typeface="Calibri" pitchFamily="34" charset="-122"/>
+                <a:cs typeface="Calibri" pitchFamily="34" charset="-120"/>
+              </a:rPr>
+              <a:t>comportamiento de sus clientes</a:t>
+            </a:r>
+            <a:r>
+              <a:rPr lang="en-US" sz="1450">
+                <a:solidFill>
+                  <a:srgbClr val="1B2A3A"/>
+                </a:solidFill>
+                <a:latin typeface="Calibri" pitchFamily="34" charset="0"/>
+                <a:ea typeface="Calibri" pitchFamily="34" charset="-122"/>
+                <a:cs typeface="Calibri" pitchFamily="34" charset="-120"/>
+              </a:rPr>
+              <a:t>, la predicción temprana del churn y la segmentación de perfiles</a:t>
+            </a:r>
+            <a:r>
+              <a:rPr lang="en-US" sz="1450" dirty="0">
+                <a:solidFill>
+                  <a:srgbClr val="1B2A3A"/>
+                </a:solidFill>
+                <a:latin typeface="Calibri" pitchFamily="34" charset="0"/>
+                <a:ea typeface="Calibri" pitchFamily="34" charset="-122"/>
+                <a:cs typeface="Calibri" pitchFamily="34" charset="-120"/>
+              </a:rPr>
+              <a:t> para </a:t>
+            </a:r>
+            <a:r>
+              <a:rPr lang="en-US" sz="1450">
+                <a:solidFill>
+                  <a:srgbClr val="1B2A3A"/>
+                </a:solidFill>
+                <a:latin typeface="Calibri" pitchFamily="34" charset="0"/>
+                <a:ea typeface="Calibri" pitchFamily="34" charset="-122"/>
+                <a:cs typeface="Calibri" pitchFamily="34" charset="-120"/>
+              </a:rPr>
+              <a:t>orientar acciones </a:t>
+            </a:r>
+            <a:r>
+              <a:rPr lang="en-US" sz="1450" dirty="0">
+                <a:solidFill>
+                  <a:srgbClr val="1B2A3A"/>
+                </a:solidFill>
+                <a:latin typeface="Calibri" pitchFamily="34" charset="0"/>
+                <a:ea typeface="Calibri" pitchFamily="34" charset="-122"/>
+                <a:cs typeface="Calibri" pitchFamily="34" charset="-120"/>
+              </a:rPr>
+              <a:t>de </a:t>
+            </a:r>
+            <a:r>
+              <a:rPr lang="en-US" sz="1450">
+                <a:solidFill>
+                  <a:srgbClr val="1B2A3A"/>
+                </a:solidFill>
+                <a:latin typeface="Calibri" pitchFamily="34" charset="0"/>
+                <a:ea typeface="Calibri" pitchFamily="34" charset="-122"/>
+                <a:cs typeface="Calibri" pitchFamily="34" charset="-120"/>
+              </a:rPr>
+              <a:t>retención</a:t>
+            </a:r>
+            <a:r>
+              <a:rPr lang="en-US" sz="1450" dirty="0">
+                <a:solidFill>
+                  <a:srgbClr val="1B2A3A"/>
+                </a:solidFill>
+                <a:latin typeface="Calibri" pitchFamily="34" charset="0"/>
+                <a:ea typeface="Calibri" pitchFamily="34" charset="-122"/>
+                <a:cs typeface="Calibri" pitchFamily="34" charset="-120"/>
+              </a:rPr>
+              <a:t>.</a:t>
             </a:r>
             <a:endParaRPr lang="en-US" sz="1450" dirty="0"/>
           </a:p>
@@ -7001,7 +8589,51 @@
                 <a:ea typeface="Calibri" pitchFamily="34" charset="-122"/>
                 <a:cs typeface="Calibri" pitchFamily="34" charset="-120"/>
               </a:rPr>
-              <a:t>Reducir la tasa de cancelación de membresías en la cadena de gimnasios.</a:t>
+              <a:t>Reducir la cancelación </a:t>
+            </a:r>
+            <a:r>
+              <a:rPr lang="en-US" sz="1250">
+                <a:solidFill>
+                  <a:srgbClr val="5E7186"/>
+                </a:solidFill>
+                <a:latin typeface="Calibri" pitchFamily="34" charset="0"/>
+                <a:ea typeface="Calibri" pitchFamily="34" charset="-122"/>
+                <a:cs typeface="Calibri" pitchFamily="34" charset="-120"/>
+              </a:rPr>
+              <a:t>con intervenciones preventivas basadas </a:t>
+            </a:r>
+            <a:r>
+              <a:rPr lang="en-US" sz="1250" dirty="0">
+                <a:solidFill>
+                  <a:srgbClr val="5E7186"/>
+                </a:solidFill>
+                <a:latin typeface="Calibri" pitchFamily="34" charset="0"/>
+                <a:ea typeface="Calibri" pitchFamily="34" charset="-122"/>
+                <a:cs typeface="Calibri" pitchFamily="34" charset="-120"/>
+              </a:rPr>
+              <a:t>en </a:t>
+            </a:r>
+            <a:r>
+              <a:rPr lang="en-US" sz="1250">
+                <a:solidFill>
+                  <a:srgbClr val="5E7186"/>
+                </a:solidFill>
+                <a:latin typeface="Calibri" pitchFamily="34" charset="0"/>
+                <a:ea typeface="Calibri" pitchFamily="34" charset="-122"/>
+                <a:cs typeface="Calibri" pitchFamily="34" charset="-120"/>
+              </a:rPr>
+              <a:t>datos</a:t>
+            </a:r>
+            <a:r>
+              <a:rPr lang="en-US" sz="1250" dirty="0">
+                <a:solidFill>
+                  <a:srgbClr val="5E7186"/>
+                </a:solidFill>
+                <a:latin typeface="Calibri" pitchFamily="34" charset="0"/>
+                <a:ea typeface="Calibri" pitchFamily="34" charset="-122"/>
+                <a:cs typeface="Calibri" pitchFamily="34" charset="-120"/>
+              </a:rPr>
+              <a:t>.</a:t>
             </a:r>
             <a:endParaRPr lang="en-US" sz="1250" dirty="0"/>
           </a:p>
@@ -7152,6 +8784,17 @@
               <a:buNone/>
             </a:pPr>
             <a:r>
+              <a:rPr lang="en-US" sz="1250">
+                <a:solidFill>
+                  <a:srgbClr val="5E7186"/>
+                </a:solidFill>
+                <a:latin typeface="Calibri" pitchFamily="34" charset="0"/>
+                <a:ea typeface="Calibri" pitchFamily="34" charset="-122"/>
+                <a:cs typeface="Calibri" pitchFamily="34" charset="-120"/>
+              </a:rPr>
+              <a:t>Predecir </a:t>
+            </a:r>
+            <a:r>
               <a:rPr lang="en-US" sz="1250" dirty="0">
                 <a:solidFill>
                   <a:srgbClr val="5E7186"/>
@@ -7160,7 +8803,51 @@
                 <a:ea typeface="Calibri" pitchFamily="34" charset="-122"/>
                 <a:cs typeface="Calibri" pitchFamily="34" charset="-120"/>
               </a:rPr>
-              <a:t>Analizar el comportamiento de los clientes para detectar señales de abandono.</a:t>
+              <a:t>el </a:t>
+            </a:r>
+            <a:r>
+              <a:rPr lang="en-US" sz="1250">
+                <a:solidFill>
+                  <a:srgbClr val="5E7186"/>
+                </a:solidFill>
+                <a:latin typeface="Calibri" pitchFamily="34" charset="0"/>
+                <a:ea typeface="Calibri" pitchFamily="34" charset="-122"/>
+                <a:cs typeface="Calibri" pitchFamily="34" charset="-120"/>
+              </a:rPr>
+              <a:t>churn y describir segmentos con necesidades </a:t>
+            </a:r>
+            <a:r>
+              <a:rPr lang="en-US" sz="1250" dirty="0">
+                <a:solidFill>
+                  <a:srgbClr val="5E7186"/>
+                </a:solidFill>
+                <a:latin typeface="Calibri" pitchFamily="34" charset="0"/>
+                <a:ea typeface="Calibri" pitchFamily="34" charset="-122"/>
+                <a:cs typeface="Calibri" pitchFamily="34" charset="-120"/>
+              </a:rPr>
+              <a:t>de </a:t>
+            </a:r>
+            <a:r>
+              <a:rPr lang="en-US" sz="1250">
+                <a:solidFill>
+                  <a:srgbClr val="5E7186"/>
+                </a:solidFill>
+                <a:latin typeface="Calibri" pitchFamily="34" charset="0"/>
+                <a:ea typeface="Calibri" pitchFamily="34" charset="-122"/>
+                <a:cs typeface="Calibri" pitchFamily="34" charset="-120"/>
+              </a:rPr>
+              <a:t>retención distintas</a:t>
+            </a:r>
+            <a:r>
+              <a:rPr lang="en-US" sz="1250" dirty="0">
+                <a:solidFill>
+                  <a:srgbClr val="5E7186"/>
+                </a:solidFill>
+                <a:latin typeface="Calibri" pitchFamily="34" charset="0"/>
+                <a:ea typeface="Calibri" pitchFamily="34" charset="-122"/>
+                <a:cs typeface="Calibri" pitchFamily="34" charset="-120"/>
+              </a:rPr>
+              <a:t>.</a:t>
             </a:r>
             <a:endParaRPr lang="en-US" sz="1250" dirty="0"/>
           </a:p>
@@ -7319,7 +9006,73 @@
                 <a:ea typeface="Calibri" pitchFamily="34" charset="-122"/>
                 <a:cs typeface="Calibri" pitchFamily="34" charset="-120"/>
               </a:rPr>
-              <a:t>ML Supervisado (Reg. Logística y Random Forest) y No Supervisado (K-Means).</a:t>
+              <a:t>ML </a:t>
+            </a:r>
+            <a:r>
+              <a:rPr lang="en-US" sz="1250">
+                <a:solidFill>
+                  <a:srgbClr val="5E7186"/>
+                </a:solidFill>
+                <a:latin typeface="Calibri" pitchFamily="34" charset="0"/>
+                <a:ea typeface="Calibri" pitchFamily="34" charset="-122"/>
+                <a:cs typeface="Calibri" pitchFamily="34" charset="-120"/>
+              </a:rPr>
+              <a:t>supervisado </a:t>
+            </a:r>
+            <a:r>
+              <a:rPr lang="en-US" sz="1250" dirty="0">
+                <a:solidFill>
+                  <a:srgbClr val="5E7186"/>
+                </a:solidFill>
+                <a:latin typeface="Calibri" pitchFamily="34" charset="0"/>
+                <a:ea typeface="Calibri" pitchFamily="34" charset="-122"/>
+                <a:cs typeface="Calibri" pitchFamily="34" charset="-120"/>
+              </a:rPr>
+              <a:t>(</a:t>
+            </a:r>
+            <a:r>
+              <a:rPr lang="en-US" sz="1250">
+                <a:solidFill>
+                  <a:srgbClr val="5E7186"/>
+                </a:solidFill>
+                <a:latin typeface="Calibri" pitchFamily="34" charset="0"/>
+                <a:ea typeface="Calibri" pitchFamily="34" charset="-122"/>
+                <a:cs typeface="Calibri" pitchFamily="34" charset="-120"/>
+              </a:rPr>
+              <a:t>Regresión </a:t>
+            </a:r>
+            <a:r>
+              <a:rPr lang="en-US" sz="1250" dirty="0">
+                <a:solidFill>
+                  <a:srgbClr val="5E7186"/>
+                </a:solidFill>
+                <a:latin typeface="Calibri" pitchFamily="34" charset="0"/>
+                <a:ea typeface="Calibri" pitchFamily="34" charset="-122"/>
+                <a:cs typeface="Calibri" pitchFamily="34" charset="-120"/>
+              </a:rPr>
+              <a:t>Logística y Random Forest) y </a:t>
+            </a:r>
+            <a:r>
+              <a:rPr lang="en-US" sz="1250">
+                <a:solidFill>
+                  <a:srgbClr val="5E7186"/>
+                </a:solidFill>
+                <a:latin typeface="Calibri" pitchFamily="34" charset="0"/>
+                <a:ea typeface="Calibri" pitchFamily="34" charset="-122"/>
+                <a:cs typeface="Calibri" pitchFamily="34" charset="-120"/>
+              </a:rPr>
+              <a:t>no supervisado</a:t>
+            </a:r>
+            <a:r>
+              <a:rPr lang="en-US" sz="1250" dirty="0">
+                <a:solidFill>
+                  <a:srgbClr val="5E7186"/>
+                </a:solidFill>
+                <a:latin typeface="Calibri" pitchFamily="34" charset="0"/>
+                <a:ea typeface="Calibri" pitchFamily="34" charset="-122"/>
+                <a:cs typeface="Calibri" pitchFamily="34" charset="-120"/>
+              </a:rPr>
+              <a:t> (K-Means).</a:t>
             </a:r>
             <a:endParaRPr lang="en-US" sz="1250" dirty="0"/>
           </a:p>
@@ -7720,6 +9473,17 @@
               <a:buChar char="•"/>
             </a:pPr>
             <a:r>
+              <a:rPr lang="en-US" sz="1350">
+                <a:solidFill>
+                  <a:srgbClr val="1B2A3A"/>
+                </a:solidFill>
+                <a:latin typeface="Calibri" pitchFamily="34" charset="0"/>
+                <a:ea typeface="Calibri" pitchFamily="34" charset="-122"/>
+                <a:cs typeface="Calibri" pitchFamily="34" charset="-120"/>
+              </a:rPr>
+              <a:t>Predecir </a:t>
+            </a:r>
+            <a:r>
               <a:rPr lang="en-US" sz="1350" dirty="0">
                 <a:solidFill>
                   <a:srgbClr val="1B2A3A"/>
@@ -7728,7 +9492,29 @@
                 <a:ea typeface="Calibri" pitchFamily="34" charset="-122"/>
                 <a:cs typeface="Calibri" pitchFamily="34" charset="-120"/>
               </a:rPr>
-              <a:t>Construir modelos que predigan si un cliente cancelará.</a:t>
+              <a:t>si un cliente cancelará</a:t>
+            </a:r>
+            <a:r>
+              <a:rPr lang="en-US" sz="1350">
+                <a:solidFill>
+                  <a:srgbClr val="1B2A3A"/>
+                </a:solidFill>
+                <a:latin typeface="Calibri" pitchFamily="34" charset="0"/>
+                <a:ea typeface="Calibri" pitchFamily="34" charset="-122"/>
+                <a:cs typeface="Calibri" pitchFamily="34" charset="-120"/>
+              </a:rPr>
+              <a:t> su membresía</a:t>
+            </a:r>
+            <a:r>
+              <a:rPr lang="en-US" sz="1350" dirty="0">
+                <a:solidFill>
+                  <a:srgbClr val="1B2A3A"/>
+                </a:solidFill>
+                <a:latin typeface="Calibri" pitchFamily="34" charset="0"/>
+                <a:ea typeface="Calibri" pitchFamily="34" charset="-122"/>
+                <a:cs typeface="Calibri" pitchFamily="34" charset="-120"/>
+              </a:rPr>
+              <a:t>.</a:t>
             </a:r>
             <a:endParaRPr lang="en-US" sz="1350" dirty="0"/>
           </a:p>
@@ -7776,7 +9562,51 @@
                 <a:ea typeface="Calibri" pitchFamily="34" charset="-122"/>
                 <a:cs typeface="Calibri" pitchFamily="34" charset="-120"/>
               </a:rPr>
-              <a:t>Identificar las variables con mayor influencia.</a:t>
+              <a:t>Identificar </a:t>
+            </a:r>
+            <a:r>
+              <a:rPr lang="en-US" sz="1350">
+                <a:solidFill>
+                  <a:srgbClr val="1B2A3A"/>
+                </a:solidFill>
+                <a:latin typeface="Calibri" pitchFamily="34" charset="0"/>
+                <a:ea typeface="Calibri" pitchFamily="34" charset="-122"/>
+                <a:cs typeface="Calibri" pitchFamily="34" charset="-120"/>
+              </a:rPr>
+              <a:t>variables relevantes para </a:t>
+            </a:r>
+            <a:r>
+              <a:rPr lang="en-US" sz="1350" dirty="0">
+                <a:solidFill>
+                  <a:srgbClr val="1B2A3A"/>
+                </a:solidFill>
+                <a:latin typeface="Calibri" pitchFamily="34" charset="0"/>
+                <a:ea typeface="Calibri" pitchFamily="34" charset="-122"/>
+                <a:cs typeface="Calibri" pitchFamily="34" charset="-120"/>
+              </a:rPr>
+              <a:t>las </a:t>
+            </a:r>
+            <a:r>
+              <a:rPr lang="en-US" sz="1350">
+                <a:solidFill>
+                  <a:srgbClr val="1B2A3A"/>
+                </a:solidFill>
+                <a:latin typeface="Calibri" pitchFamily="34" charset="0"/>
+                <a:ea typeface="Calibri" pitchFamily="34" charset="-122"/>
+                <a:cs typeface="Calibri" pitchFamily="34" charset="-120"/>
+              </a:rPr>
+              <a:t>predicciones</a:t>
+            </a:r>
+            <a:r>
+              <a:rPr lang="en-US" sz="1350" dirty="0">
+                <a:solidFill>
+                  <a:srgbClr val="1B2A3A"/>
+                </a:solidFill>
+                <a:latin typeface="Calibri" pitchFamily="34" charset="0"/>
+                <a:ea typeface="Calibri" pitchFamily="34" charset="-122"/>
+                <a:cs typeface="Calibri" pitchFamily="34" charset="-120"/>
+              </a:rPr>
+              <a:t>.</a:t>
             </a:r>
             <a:endParaRPr lang="en-US" sz="1350" dirty="0"/>
           </a:p>
@@ -7994,6 +9824,17 @@
               <a:buChar char="•"/>
             </a:pPr>
             <a:r>
+              <a:rPr lang="en-US" sz="1350">
+                <a:solidFill>
+                  <a:srgbClr val="1B2A3A"/>
+                </a:solidFill>
+                <a:latin typeface="Calibri" pitchFamily="34" charset="0"/>
+                <a:ea typeface="Calibri" pitchFamily="34" charset="-122"/>
+                <a:cs typeface="Calibri" pitchFamily="34" charset="-120"/>
+              </a:rPr>
+              <a:t>Comparar soluciones </a:t>
+            </a:r>
+            <a:r>
               <a:rPr lang="en-US" sz="1350" dirty="0">
                 <a:solidFill>
                   <a:srgbClr val="1B2A3A"/>
@@ -8002,7 +9843,29 @@
                 <a:ea typeface="Calibri" pitchFamily="34" charset="-122"/>
                 <a:cs typeface="Calibri" pitchFamily="34" charset="-120"/>
               </a:rPr>
-              <a:t>Identificar perfiles de riesgo de abandono.</a:t>
+              <a:t>de </a:t>
+            </a:r>
+            <a:r>
+              <a:rPr lang="en-US" sz="1350">
+                <a:solidFill>
+                  <a:srgbClr val="1B2A3A"/>
+                </a:solidFill>
+                <a:latin typeface="Calibri" pitchFamily="34" charset="0"/>
+                <a:ea typeface="Calibri" pitchFamily="34" charset="-122"/>
+                <a:cs typeface="Calibri" pitchFamily="34" charset="-120"/>
+              </a:rPr>
+              <a:t>3 y 5 clústeres</a:t>
+            </a:r>
+            <a:r>
+              <a:rPr lang="en-US" sz="1350" dirty="0">
+                <a:solidFill>
+                  <a:srgbClr val="1B2A3A"/>
+                </a:solidFill>
+                <a:latin typeface="Calibri" pitchFamily="34" charset="0"/>
+                <a:ea typeface="Calibri" pitchFamily="34" charset="-122"/>
+                <a:cs typeface="Calibri" pitchFamily="34" charset="-120"/>
+              </a:rPr>
+              <a:t>.</a:t>
             </a:r>
             <a:endParaRPr lang="en-US" sz="1350" dirty="0"/>
           </a:p>
@@ -8018,6 +9881,17 @@
               <a:buChar char="•"/>
             </a:pPr>
             <a:r>
+              <a:rPr lang="en-US" sz="1350">
+                <a:solidFill>
+                  <a:srgbClr val="1B2A3A"/>
+                </a:solidFill>
+                <a:latin typeface="Calibri" pitchFamily="34" charset="0"/>
+                <a:ea typeface="Calibri" pitchFamily="34" charset="-122"/>
+                <a:cs typeface="Calibri" pitchFamily="34" charset="-120"/>
+              </a:rPr>
+              <a:t>Describir tasas históricas y orientar acciones de retención</a:t>
+            </a:r>
+            <a:r>
               <a:rPr lang="en-US" sz="1350" dirty="0">
                 <a:solidFill>
                   <a:srgbClr val="1B2A3A"/>
@@ -8026,7 +9900,7 @@
                 <a:ea typeface="Calibri" pitchFamily="34" charset="-122"/>
                 <a:cs typeface="Calibri" pitchFamily="34" charset="-120"/>
               </a:rPr>
-              <a:t>Generar recomendaciones para cada segmento.</a:t>
+              <a:t>.</a:t>
             </a:r>
             <a:endParaRPr lang="en-US" sz="1350" dirty="0"/>
           </a:p>
@@ -8250,7 +10124,73 @@
                 <a:ea typeface="Calibri" pitchFamily="34" charset="-122"/>
                 <a:cs typeface="Calibri" pitchFamily="34" charset="-120"/>
               </a:rPr>
-              <a:t>Objetivo: garantizar que la información fuera consistente y adecuada para el entrenamiento de los modelos.</a:t>
+              <a:t>Objetivo: </a:t>
+            </a:r>
+            <a:r>
+              <a:rPr lang="en-US" sz="1400" i="1">
+                <a:solidFill>
+                  <a:srgbClr val="5E7186"/>
+                </a:solidFill>
+                <a:latin typeface="Calibri" pitchFamily="34" charset="0"/>
+                <a:ea typeface="Calibri" pitchFamily="34" charset="-122"/>
+                <a:cs typeface="Calibri" pitchFamily="34" charset="-120"/>
+              </a:rPr>
+              <a:t>asegurar consistencia </a:t>
+            </a:r>
+            <a:r>
+              <a:rPr lang="en-US" sz="1400" i="1" dirty="0">
+                <a:solidFill>
+                  <a:srgbClr val="5E7186"/>
+                </a:solidFill>
+                <a:latin typeface="Calibri" pitchFamily="34" charset="0"/>
+                <a:ea typeface="Calibri" pitchFamily="34" charset="-122"/>
+                <a:cs typeface="Calibri" pitchFamily="34" charset="-120"/>
+              </a:rPr>
+              <a:t>para el </a:t>
+            </a:r>
+            <a:r>
+              <a:rPr lang="en-US" sz="1400" i="1">
+                <a:solidFill>
+                  <a:srgbClr val="5E7186"/>
+                </a:solidFill>
+                <a:latin typeface="Calibri" pitchFamily="34" charset="0"/>
+                <a:ea typeface="Calibri" pitchFamily="34" charset="-122"/>
+                <a:cs typeface="Calibri" pitchFamily="34" charset="-120"/>
+              </a:rPr>
+              <a:t>análisis exploratorio, el </a:t>
+            </a:r>
+            <a:r>
+              <a:rPr lang="en-US" sz="1400" i="1" dirty="0">
+                <a:solidFill>
+                  <a:srgbClr val="5E7186"/>
+                </a:solidFill>
+                <a:latin typeface="Calibri" pitchFamily="34" charset="0"/>
+                <a:ea typeface="Calibri" pitchFamily="34" charset="-122"/>
+                <a:cs typeface="Calibri" pitchFamily="34" charset="-120"/>
+              </a:rPr>
+              <a:t>entrenamiento </a:t>
+            </a:r>
+            <a:r>
+              <a:rPr lang="en-US" sz="1400" i="1">
+                <a:solidFill>
+                  <a:srgbClr val="5E7186"/>
+                </a:solidFill>
+                <a:latin typeface="Calibri" pitchFamily="34" charset="0"/>
+                <a:ea typeface="Calibri" pitchFamily="34" charset="-122"/>
+                <a:cs typeface="Calibri" pitchFamily="34" charset="-120"/>
+              </a:rPr>
+              <a:t>y la segmentación</a:t>
+            </a:r>
+            <a:r>
+              <a:rPr lang="en-US" sz="1400" i="1" dirty="0">
+                <a:solidFill>
+                  <a:srgbClr val="5E7186"/>
+                </a:solidFill>
+                <a:latin typeface="Calibri" pitchFamily="34" charset="0"/>
+                <a:ea typeface="Calibri" pitchFamily="34" charset="-122"/>
+                <a:cs typeface="Calibri" pitchFamily="34" charset="-120"/>
+              </a:rPr>
+              <a:t>.</a:t>
             </a:r>
             <a:endParaRPr lang="en-US" sz="1400" dirty="0"/>
           </a:p>
@@ -8407,6 +10347,17 @@
               <a:buNone/>
             </a:pPr>
             <a:r>
+              <a:rPr lang="en-US" sz="1100">
+                <a:solidFill>
+                  <a:srgbClr val="5E7186"/>
+                </a:solidFill>
+                <a:latin typeface="Calibri" pitchFamily="34" charset="0"/>
+                <a:ea typeface="Calibri" pitchFamily="34" charset="-122"/>
+                <a:cs typeface="Calibri" pitchFamily="34" charset="-120"/>
+              </a:rPr>
+              <a:t>No se encontraron</a:t>
+            </a:r>
+            <a:r>
               <a:rPr lang="en-US" sz="1100" dirty="0">
                 <a:solidFill>
                   <a:srgbClr val="5E7186"/>
@@ -8415,7 +10366,7 @@
                 <a:ea typeface="Calibri" pitchFamily="34" charset="-122"/>
                 <a:cs typeface="Calibri" pitchFamily="34" charset="-120"/>
               </a:rPr>
-              <a:t>Verificación de datos faltantes.</a:t>
+              <a:t> datos faltantes.</a:t>
             </a:r>
             <a:endParaRPr lang="en-US" sz="1100" dirty="0"/>
           </a:p>
@@ -8572,6 +10523,17 @@
               <a:buNone/>
             </a:pPr>
             <a:r>
+              <a:rPr lang="en-US" sz="1100">
+                <a:solidFill>
+                  <a:srgbClr val="5E7186"/>
+                </a:solidFill>
+                <a:latin typeface="Calibri" pitchFamily="34" charset="0"/>
+                <a:ea typeface="Calibri" pitchFamily="34" charset="-122"/>
+                <a:cs typeface="Calibri" pitchFamily="34" charset="-120"/>
+              </a:rPr>
+              <a:t>No hubo filas duplicadas completas</a:t>
+            </a:r>
+            <a:r>
               <a:rPr lang="en-US" sz="1100" dirty="0">
                 <a:solidFill>
                   <a:srgbClr val="5E7186"/>
@@ -8580,7 +10542,7 @@
                 <a:ea typeface="Calibri" pitchFamily="34" charset="-122"/>
                 <a:cs typeface="Calibri" pitchFamily="34" charset="-120"/>
               </a:rPr>
-              <a:t>Revisión de registros repetidos.</a:t>
+              <a:t>.</a:t>
             </a:r>
             <a:endParaRPr lang="en-US" sz="1100" dirty="0"/>
           </a:p>
@@ -8703,7 +10665,18 @@
                 <a:ea typeface="Trebuchet MS" pitchFamily="34" charset="-122"/>
                 <a:cs typeface="Trebuchet MS" pitchFamily="34" charset="-120"/>
               </a:rPr>
-              <a:t>Tipos de datos</a:t>
+              <a:t>Tipos </a:t>
+            </a:r>
+            <a:r>
+              <a:rPr lang="en-US" sz="1350" b="1">
+                <a:solidFill>
+                  <a:srgbClr val="1B2A3A"/>
+                </a:solidFill>
+                <a:latin typeface="Trebuchet MS" pitchFamily="34" charset="0"/>
+                <a:ea typeface="Trebuchet MS" pitchFamily="34" charset="-122"/>
+                <a:cs typeface="Trebuchet MS" pitchFamily="34" charset="-120"/>
+              </a:rPr>
+              <a:t>y nombres</a:t>
             </a:r>
             <a:endParaRPr lang="en-US" sz="1350" dirty="0"/>
           </a:p>
@@ -8737,6 +10710,17 @@
               <a:buNone/>
             </a:pPr>
             <a:r>
+              <a:rPr lang="en-US" sz="1100">
+                <a:solidFill>
+                  <a:srgbClr val="5E7186"/>
+                </a:solidFill>
+                <a:latin typeface="Calibri" pitchFamily="34" charset="0"/>
+                <a:ea typeface="Calibri" pitchFamily="34" charset="-122"/>
+                <a:cs typeface="Calibri" pitchFamily="34" charset="-120"/>
+              </a:rPr>
+              <a:t>Se revisaron tipos y se normalizaron columnas</a:t>
+            </a:r>
+            <a:r>
               <a:rPr lang="en-US" sz="1100" dirty="0">
                 <a:solidFill>
                   <a:srgbClr val="5E7186"/>
@@ -8745,7 +10729,7 @@
                 <a:ea typeface="Calibri" pitchFamily="34" charset="-122"/>
                 <a:cs typeface="Calibri" pitchFamily="34" charset="-120"/>
               </a:rPr>
-              <a:t>Validación del formato de cada variable.</a:t>
+              <a:t>.</a:t>
             </a:r>
             <a:endParaRPr lang="en-US" sz="1100" dirty="0"/>
           </a:p>
@@ -8910,7 +10894,29 @@
                 <a:ea typeface="Calibri" pitchFamily="34" charset="-122"/>
                 <a:cs typeface="Calibri" pitchFamily="34" charset="-120"/>
               </a:rPr>
-              <a:t>Escalado de variables para K-Means.</a:t>
+              <a:t>Escalado para </a:t>
+            </a:r>
+            <a:r>
+              <a:rPr lang="en-US" sz="1100">
+                <a:solidFill>
+                  <a:srgbClr val="5E7186"/>
+                </a:solidFill>
+                <a:latin typeface="Calibri" pitchFamily="34" charset="0"/>
+                <a:ea typeface="Calibri" pitchFamily="34" charset="-122"/>
+                <a:cs typeface="Calibri" pitchFamily="34" charset="-120"/>
+              </a:rPr>
+              <a:t>los modelos que lo requieren</a:t>
+            </a:r>
+            <a:r>
+              <a:rPr lang="en-US" sz="1100" dirty="0">
+                <a:solidFill>
+                  <a:srgbClr val="5E7186"/>
+                </a:solidFill>
+                <a:latin typeface="Calibri" pitchFamily="34" charset="0"/>
+                <a:ea typeface="Calibri" pitchFamily="34" charset="-122"/>
+                <a:cs typeface="Calibri" pitchFamily="34" charset="-120"/>
+              </a:rPr>
+              <a:t>.</a:t>
             </a:r>
             <a:endParaRPr lang="en-US" sz="1100" dirty="0"/>
           </a:p>
@@ -8993,15 +10999,15 @@
               <a:t>Conclusión.  </a:t>
             </a:r>
             <a:r>
-              <a:rPr lang="en-US" sz="1250" dirty="0">
-                <a:solidFill>
-                  <a:srgbClr val="1B2A3A"/>
-                </a:solidFill>
-                <a:latin typeface="Calibri" pitchFamily="34" charset="0"/>
-                <a:ea typeface="Calibri" pitchFamily="34" charset="-122"/>
-                <a:cs typeface="Calibri" pitchFamily="34" charset="-120"/>
-              </a:rPr>
-              <a:t>El conjunto de datos presentó buena calidad; solo fue necesario preparar las variables para el modelado y la segmentación.</a:t>
+              <a:rPr lang="en-US" sz="1250" b="1">
+                <a:solidFill>
+                  <a:srgbClr val="2FA37A"/>
+                </a:solidFill>
+                <a:latin typeface="Calibri" pitchFamily="34" charset="0"/>
+                <a:ea typeface="Calibri" pitchFamily="34" charset="-122"/>
+                <a:cs typeface="Calibri" pitchFamily="34" charset="-120"/>
+              </a:rPr>
+              <a:t>El conjunto contiene 4,000 registros y 14 columnas. Se conservaron los valores originales; el redondeo se utilizó solo para visualizar.</a:t>
             </a:r>
             <a:endParaRPr lang="en-US" sz="1250" dirty="0"/>
           </a:p>
@@ -9217,6 +11223,17 @@
               <a:buNone/>
             </a:pPr>
             <a:r>
+              <a:rPr lang="en-US" sz="1400" i="1">
+                <a:solidFill>
+                  <a:srgbClr val="5E7186"/>
+                </a:solidFill>
+                <a:latin typeface="Calibri" pitchFamily="34" charset="0"/>
+                <a:ea typeface="Calibri" pitchFamily="34" charset="-122"/>
+                <a:cs typeface="Calibri" pitchFamily="34" charset="-120"/>
+              </a:rPr>
+              <a:t>Los clientes que </a:t>
+            </a:r>
+            <a:r>
               <a:rPr lang="en-US" sz="1400" i="1" dirty="0">
                 <a:solidFill>
                   <a:srgbClr val="5E7186"/>
@@ -9225,7 +11242,73 @@
                 <a:ea typeface="Calibri" pitchFamily="34" charset="-122"/>
                 <a:cs typeface="Calibri" pitchFamily="34" charset="-120"/>
               </a:rPr>
-              <a:t>Al comparar a quienes permanecieron con quienes cancelaron, aparecen cuatro diferencias claras.</a:t>
+              <a:t>permanecieron </a:t>
+            </a:r>
+            <a:r>
+              <a:rPr lang="en-US" sz="1400" i="1">
+                <a:solidFill>
+                  <a:srgbClr val="5E7186"/>
+                </a:solidFill>
+                <a:latin typeface="Calibri" pitchFamily="34" charset="0"/>
+                <a:ea typeface="Calibri" pitchFamily="34" charset="-122"/>
+                <a:cs typeface="Calibri" pitchFamily="34" charset="-120"/>
+              </a:rPr>
+              <a:t>y </a:t>
+            </a:r>
+            <a:r>
+              <a:rPr lang="en-US" sz="1400" i="1" dirty="0">
+                <a:solidFill>
+                  <a:srgbClr val="5E7186"/>
+                </a:solidFill>
+                <a:latin typeface="Calibri" pitchFamily="34" charset="0"/>
+                <a:ea typeface="Calibri" pitchFamily="34" charset="-122"/>
+                <a:cs typeface="Calibri" pitchFamily="34" charset="-120"/>
+              </a:rPr>
+              <a:t>quienes cancelaron</a:t>
+            </a:r>
+            <a:r>
+              <a:rPr lang="en-US" sz="1400" i="1">
+                <a:solidFill>
+                  <a:srgbClr val="5E7186"/>
+                </a:solidFill>
+                <a:latin typeface="Calibri" pitchFamily="34" charset="0"/>
+                <a:ea typeface="Calibri" pitchFamily="34" charset="-122"/>
+                <a:cs typeface="Calibri" pitchFamily="34" charset="-120"/>
+              </a:rPr>
+              <a:t> muestran diferencias consistentes en </a:t>
+            </a:r>
+            <a:r>
+              <a:rPr lang="en-US" sz="1400" i="1" dirty="0">
+                <a:solidFill>
+                  <a:srgbClr val="5E7186"/>
+                </a:solidFill>
+                <a:latin typeface="Calibri" pitchFamily="34" charset="0"/>
+                <a:ea typeface="Calibri" pitchFamily="34" charset="-122"/>
+                <a:cs typeface="Calibri" pitchFamily="34" charset="-120"/>
+              </a:rPr>
+              <a:t>cuatro </a:t>
+            </a:r>
+            <a:r>
+              <a:rPr lang="en-US" sz="1400" i="1">
+                <a:solidFill>
+                  <a:srgbClr val="5E7186"/>
+                </a:solidFill>
+                <a:latin typeface="Calibri" pitchFamily="34" charset="0"/>
+                <a:ea typeface="Calibri" pitchFamily="34" charset="-122"/>
+                <a:cs typeface="Calibri" pitchFamily="34" charset="-120"/>
+              </a:rPr>
+              <a:t>dimensiones</a:t>
+            </a:r>
+            <a:r>
+              <a:rPr lang="en-US" sz="1400" i="1" dirty="0">
+                <a:solidFill>
+                  <a:srgbClr val="5E7186"/>
+                </a:solidFill>
+                <a:latin typeface="Calibri" pitchFamily="34" charset="0"/>
+                <a:ea typeface="Calibri" pitchFamily="34" charset="-122"/>
+                <a:cs typeface="Calibri" pitchFamily="34" charset="-120"/>
+              </a:rPr>
+              <a:t>.</a:t>
             </a:r>
             <a:endParaRPr lang="en-US" sz="1400" dirty="0"/>
           </a:p>
@@ -9376,6 +11459,17 @@
               <a:buNone/>
             </a:pPr>
             <a:r>
+              <a:rPr lang="en-US" sz="1150">
+                <a:solidFill>
+                  <a:srgbClr val="5E7186"/>
+                </a:solidFill>
+                <a:latin typeface="Calibri" pitchFamily="34" charset="0"/>
+                <a:ea typeface="Calibri" pitchFamily="34" charset="-122"/>
+                <a:cs typeface="Calibri" pitchFamily="34" charset="-120"/>
+              </a:rPr>
+              <a:t>La menor permanencia se asocia con </a:t>
+            </a:r>
+            <a:r>
               <a:rPr lang="en-US" sz="1150" dirty="0">
                 <a:solidFill>
                   <a:srgbClr val="5E7186"/>
@@ -9384,7 +11478,29 @@
                 <a:ea typeface="Calibri" pitchFamily="34" charset="-122"/>
                 <a:cs typeface="Calibri" pitchFamily="34" charset="-120"/>
               </a:rPr>
-              <a:t>Clientes más nuevos cancelan más.</a:t>
+              <a:t>más </a:t>
+            </a:r>
+            <a:r>
+              <a:rPr lang="en-US" sz="1150">
+                <a:solidFill>
+                  <a:srgbClr val="5E7186"/>
+                </a:solidFill>
+                <a:latin typeface="Calibri" pitchFamily="34" charset="0"/>
+                <a:ea typeface="Calibri" pitchFamily="34" charset="-122"/>
+                <a:cs typeface="Calibri" pitchFamily="34" charset="-120"/>
+              </a:rPr>
+              <a:t>cancelaciones</a:t>
+            </a:r>
+            <a:r>
+              <a:rPr lang="en-US" sz="1150" dirty="0">
+                <a:solidFill>
+                  <a:srgbClr val="5E7186"/>
+                </a:solidFill>
+                <a:latin typeface="Calibri" pitchFamily="34" charset="0"/>
+                <a:ea typeface="Calibri" pitchFamily="34" charset="-122"/>
+                <a:cs typeface="Calibri" pitchFamily="34" charset="-120"/>
+              </a:rPr>
+              <a:t>.</a:t>
             </a:r>
             <a:endParaRPr lang="en-US" sz="1150" dirty="0"/>
           </a:p>
@@ -9535,6 +11651,17 @@
               <a:buNone/>
             </a:pPr>
             <a:r>
+              <a:rPr lang="en-US" sz="1150">
+                <a:solidFill>
+                  <a:srgbClr val="5E7186"/>
+                </a:solidFill>
+                <a:latin typeface="Calibri" pitchFamily="34" charset="0"/>
+                <a:ea typeface="Calibri" pitchFamily="34" charset="-122"/>
+                <a:cs typeface="Calibri" pitchFamily="34" charset="-120"/>
+              </a:rPr>
+              <a:t>La asistencia reciente e histórica es menor</a:t>
+            </a:r>
+            <a:r>
               <a:rPr lang="en-US" sz="1150" dirty="0">
                 <a:solidFill>
                   <a:srgbClr val="5E7186"/>
@@ -9543,7 +11670,7 @@
                 <a:ea typeface="Calibri" pitchFamily="34" charset="-122"/>
                 <a:cs typeface="Calibri" pitchFamily="34" charset="-120"/>
               </a:rPr>
-              <a:t>Visitan el gimnasio con menos regularidad.</a:t>
+              <a:t>.</a:t>
             </a:r>
             <a:endParaRPr lang="en-US" sz="1150" dirty="0"/>
           </a:p>
@@ -9694,6 +11821,17 @@
               <a:buNone/>
             </a:pPr>
             <a:r>
+              <a:rPr lang="en-US" sz="1150">
+                <a:solidFill>
+                  <a:srgbClr val="5E7186"/>
+                </a:solidFill>
+                <a:latin typeface="Calibri" pitchFamily="34" charset="0"/>
+                <a:ea typeface="Calibri" pitchFamily="34" charset="-122"/>
+                <a:cs typeface="Calibri" pitchFamily="34" charset="-120"/>
+              </a:rPr>
+              <a:t>Los </a:t>
+            </a:r>
+            <a:r>
               <a:rPr lang="en-US" sz="1150" dirty="0">
                 <a:solidFill>
                   <a:srgbClr val="5E7186"/>
@@ -9702,7 +11840,51 @@
                 <a:ea typeface="Calibri" pitchFamily="34" charset="-122"/>
                 <a:cs typeface="Calibri" pitchFamily="34" charset="-120"/>
               </a:rPr>
-              <a:t>Optan por planes de corta duración.</a:t>
+              <a:t>planes de </a:t>
+            </a:r>
+            <a:r>
+              <a:rPr lang="en-US" sz="1150">
+                <a:solidFill>
+                  <a:srgbClr val="5E7186"/>
+                </a:solidFill>
+                <a:latin typeface="Calibri" pitchFamily="34" charset="0"/>
+                <a:ea typeface="Calibri" pitchFamily="34" charset="-122"/>
+                <a:cs typeface="Calibri" pitchFamily="34" charset="-120"/>
+              </a:rPr>
+              <a:t>menor </a:t>
+            </a:r>
+            <a:r>
+              <a:rPr lang="en-US" sz="1150" dirty="0">
+                <a:solidFill>
+                  <a:srgbClr val="5E7186"/>
+                </a:solidFill>
+                <a:latin typeface="Calibri" pitchFamily="34" charset="0"/>
+                <a:ea typeface="Calibri" pitchFamily="34" charset="-122"/>
+                <a:cs typeface="Calibri" pitchFamily="34" charset="-120"/>
+              </a:rPr>
+              <a:t>duración</a:t>
+            </a:r>
+            <a:r>
+              <a:rPr lang="en-US" sz="1150">
+                <a:solidFill>
+                  <a:srgbClr val="5E7186"/>
+                </a:solidFill>
+                <a:latin typeface="Calibri" pitchFamily="34" charset="0"/>
+                <a:ea typeface="Calibri" pitchFamily="34" charset="-122"/>
+                <a:cs typeface="Calibri" pitchFamily="34" charset="-120"/>
+              </a:rPr>
+              <a:t> aparecen con más frecuencia</a:t>
+            </a:r>
+            <a:r>
+              <a:rPr lang="en-US" sz="1150" dirty="0">
+                <a:solidFill>
+                  <a:srgbClr val="5E7186"/>
+                </a:solidFill>
+                <a:latin typeface="Calibri" pitchFamily="34" charset="0"/>
+                <a:ea typeface="Calibri" pitchFamily="34" charset="-122"/>
+                <a:cs typeface="Calibri" pitchFamily="34" charset="-120"/>
+              </a:rPr>
+              <a:t>.</a:t>
             </a:r>
             <a:endParaRPr lang="en-US" sz="1150" dirty="0"/>
           </a:p>
@@ -9853,6 +12035,17 @@
               <a:buNone/>
             </a:pPr>
             <a:r>
+              <a:rPr lang="en-US" sz="1150">
+                <a:solidFill>
+                  <a:srgbClr val="5E7186"/>
+                </a:solidFill>
+                <a:latin typeface="Calibri" pitchFamily="34" charset="0"/>
+                <a:ea typeface="Calibri" pitchFamily="34" charset="-122"/>
+                <a:cs typeface="Calibri" pitchFamily="34" charset="-120"/>
+              </a:rPr>
+              <a:t>La </a:t>
+            </a:r>
+            <a:r>
               <a:rPr lang="en-US" sz="1150" dirty="0">
                 <a:solidFill>
                   <a:srgbClr val="5E7186"/>
@@ -9861,7 +12054,29 @@
                 <a:ea typeface="Calibri" pitchFamily="34" charset="-122"/>
                 <a:cs typeface="Calibri" pitchFamily="34" charset="-120"/>
               </a:rPr>
-              <a:t>Baja participación en clases colectivas.</a:t>
+              <a:t>participación en </a:t>
+            </a:r>
+            <a:r>
+              <a:rPr lang="en-US" sz="1150">
+                <a:solidFill>
+                  <a:srgbClr val="5E7186"/>
+                </a:solidFill>
+                <a:latin typeface="Calibri" pitchFamily="34" charset="0"/>
+                <a:ea typeface="Calibri" pitchFamily="34" charset="-122"/>
+                <a:cs typeface="Calibri" pitchFamily="34" charset="-120"/>
+              </a:rPr>
+              <a:t>actividades grupales es menor</a:t>
+            </a:r>
+            <a:r>
+              <a:rPr lang="en-US" sz="1150" dirty="0">
+                <a:solidFill>
+                  <a:srgbClr val="5E7186"/>
+                </a:solidFill>
+                <a:latin typeface="Calibri" pitchFamily="34" charset="0"/>
+                <a:ea typeface="Calibri" pitchFamily="34" charset="-122"/>
+                <a:cs typeface="Calibri" pitchFamily="34" charset="-120"/>
+              </a:rPr>
+              <a:t>.</a:t>
             </a:r>
             <a:endParaRPr lang="en-US" sz="1150" dirty="0"/>
           </a:p>
@@ -9939,15 +12154,15 @@
               <a:t>Conclusión.  </a:t>
             </a:r>
             <a:r>
-              <a:rPr lang="en-US" sz="1250" dirty="0">
-                <a:solidFill>
-                  <a:srgbClr val="FFFFFF"/>
-                </a:solidFill>
-                <a:latin typeface="Calibri" pitchFamily="34" charset="0"/>
-                <a:ea typeface="Calibri" pitchFamily="34" charset="-122"/>
-                <a:cs typeface="Calibri" pitchFamily="34" charset="-120"/>
-              </a:rPr>
-              <a:t>Estas diferencias permiten detectar de forma temprana a los clientes con mayor probabilidad de abandonar.</a:t>
+              <a:rPr lang="en-US" sz="1250" b="1">
+                <a:solidFill>
+                  <a:srgbClr val="7FE0EC"/>
+                </a:solidFill>
+                <a:latin typeface="Calibri" pitchFamily="34" charset="0"/>
+                <a:ea typeface="Calibri" pitchFamily="34" charset="-122"/>
+                <a:cs typeface="Calibri" pitchFamily="34" charset="-120"/>
+              </a:rPr>
+              <a:t>Estas diferencias son señales asociadas al churn y orientan el monitoreo temprano; no demuestran causalidad.</a:t>
             </a:r>
             <a:endParaRPr lang="en-US" sz="1250" dirty="0"/>
           </a:p>
@@ -10124,7 +12339,7 @@
               <a:buNone/>
             </a:pPr>
             <a:r>
-              <a:rPr lang="en-US" sz="2900" b="1" dirty="0">
+              <a:rPr lang="en-US" sz="2900" b="1">
                 <a:solidFill>
                   <a:srgbClr val="1B2A3A"/>
                 </a:solidFill>
@@ -10132,7 +12347,29 @@
                 <a:ea typeface="Trebuchet MS" pitchFamily="34" charset="-122"/>
                 <a:cs typeface="Trebuchet MS" pitchFamily="34" charset="-120"/>
               </a:rPr>
-              <a:t>Variables más relacionadas con la retención</a:t>
+              <a:t>Relaciones relevantes en </a:t>
+            </a:r>
+            <a:r>
+              <a:rPr lang="en-US" sz="2900" b="1" dirty="0">
+                <a:solidFill>
+                  <a:srgbClr val="1B2A3A"/>
+                </a:solidFill>
+                <a:latin typeface="Trebuchet MS" pitchFamily="34" charset="0"/>
+                <a:ea typeface="Trebuchet MS" pitchFamily="34" charset="-122"/>
+                <a:cs typeface="Trebuchet MS" pitchFamily="34" charset="-120"/>
+              </a:rPr>
+              <a:t>la </a:t>
+            </a:r>
+            <a:r>
+              <a:rPr lang="en-US" sz="2900" b="1">
+                <a:solidFill>
+                  <a:srgbClr val="1B2A3A"/>
+                </a:solidFill>
+                <a:latin typeface="Trebuchet MS" pitchFamily="34" charset="0"/>
+                <a:ea typeface="Trebuchet MS" pitchFamily="34" charset="-122"/>
+                <a:cs typeface="Trebuchet MS" pitchFamily="34" charset="-120"/>
+              </a:rPr>
+              <a:t>matriz de correlación</a:t>
             </a:r>
             <a:endParaRPr lang="en-US" sz="2900" dirty="0"/>
           </a:p>
@@ -10234,7 +12471,7 @@
               <a:buNone/>
             </a:pPr>
             <a:r>
-              <a:rPr lang="en-US" sz="1200" b="1" dirty="0">
+              <a:rPr lang="en-US" sz="1200" b="1">
                 <a:solidFill>
                   <a:srgbClr val="FFFFFF"/>
                 </a:solidFill>
@@ -10242,7 +12479,7 @@
                 <a:ea typeface="Trebuchet MS" pitchFamily="34" charset="-122"/>
                 <a:cs typeface="Trebuchet MS" pitchFamily="34" charset="-120"/>
               </a:rPr>
-              <a:t>1</a:t>
+              <a:t>A</a:t>
             </a:r>
             <a:endParaRPr lang="en-US" sz="1200" dirty="0"/>
           </a:p>
@@ -10283,6 +12520,17 @@
               </a:rPr>
               <a:t>Duración del contrato</a:t>
             </a:r>
+            <a:r>
+              <a:rPr lang="en-US" sz="1350" b="1">
+                <a:solidFill>
+                  <a:srgbClr val="1B2A3A"/>
+                </a:solidFill>
+                <a:latin typeface="Calibri" pitchFamily="34" charset="0"/>
+                <a:ea typeface="Calibri" pitchFamily="34" charset="-122"/>
+                <a:cs typeface="Calibri" pitchFamily="34" charset="-120"/>
+              </a:rPr>
+              <a:t> ↔ meses restantes</a:t>
+            </a:r>
             <a:endParaRPr lang="en-US" sz="1350" dirty="0"/>
           </a:p>
         </p:txBody>
@@ -10312,7 +12560,7 @@
               <a:buNone/>
             </a:pPr>
             <a:r>
-              <a:rPr lang="en-US" sz="1000" b="1" kern="0" spc="100" dirty="0">
+              <a:rPr lang="en-US" sz="1000" b="1" kern="0" spc="100">
                 <a:solidFill>
                   <a:srgbClr val="1F6FB2"/>
                 </a:solidFill>
@@ -10320,7 +12568,7 @@
                 <a:ea typeface="Trebuchet MS" pitchFamily="34" charset="-122"/>
                 <a:cs typeface="Trebuchet MS" pitchFamily="34" charset="-120"/>
               </a:rPr>
-              <a:t>FUERTE</a:t>
+              <a:t>ASOCIACIÓN</a:t>
             </a:r>
             <a:endParaRPr lang="en-US" sz="1000" dirty="0"/>
           </a:p>
@@ -10422,7 +12670,7 @@
               <a:buNone/>
             </a:pPr>
             <a:r>
-              <a:rPr lang="en-US" sz="1200" b="1" dirty="0">
+              <a:rPr lang="en-US" sz="1200" b="1">
                 <a:solidFill>
                   <a:srgbClr val="FFFFFF"/>
                 </a:solidFill>
@@ -10430,7 +12678,7 @@
                 <a:ea typeface="Trebuchet MS" pitchFamily="34" charset="-122"/>
                 <a:cs typeface="Trebuchet MS" pitchFamily="34" charset="-120"/>
               </a:rPr>
-              <a:t>2</a:t>
+              <a:t>B</a:t>
             </a:r>
             <a:endParaRPr lang="en-US" sz="1200" dirty="0"/>
           </a:p>
@@ -10461,7 +12709,7 @@
               <a:buNone/>
             </a:pPr>
             <a:r>
-              <a:rPr lang="en-US" sz="1350" b="1" dirty="0">
+              <a:rPr lang="en-US" sz="1350" b="1">
                 <a:solidFill>
                   <a:srgbClr val="1B2A3A"/>
                 </a:solidFill>
@@ -10469,7 +12717,7 @@
                 <a:ea typeface="Calibri" pitchFamily="34" charset="-122"/>
                 <a:cs typeface="Calibri" pitchFamily="34" charset="-120"/>
               </a:rPr>
-              <a:t>Frecuencia de visitas</a:t>
+              <a:t>Asistencia histórica ↔ mes actual</a:t>
             </a:r>
             <a:endParaRPr lang="en-US" sz="1350" dirty="0"/>
           </a:p>
@@ -10500,7 +12748,7 @@
               <a:buNone/>
             </a:pPr>
             <a:r>
-              <a:rPr lang="en-US" sz="1000" b="1" kern="0" spc="100" dirty="0">
+              <a:rPr lang="en-US" sz="1000" b="1" kern="0" spc="100">
                 <a:solidFill>
                   <a:srgbClr val="1F6FB2"/>
                 </a:solidFill>
@@ -10508,7 +12756,7 @@
                 <a:ea typeface="Trebuchet MS" pitchFamily="34" charset="-122"/>
                 <a:cs typeface="Trebuchet MS" pitchFamily="34" charset="-120"/>
               </a:rPr>
-              <a:t>FUERTE</a:t>
+              <a:t>ASOCIACIÓN</a:t>
             </a:r>
             <a:endParaRPr lang="en-US" sz="1000" dirty="0"/>
           </a:p>
@@ -10610,7 +12858,7 @@
               <a:buNone/>
             </a:pPr>
             <a:r>
-              <a:rPr lang="en-US" sz="1200" b="1" dirty="0">
+              <a:rPr lang="en-US" sz="1200" b="1">
                 <a:solidFill>
                   <a:srgbClr val="FFFFFF"/>
                 </a:solidFill>
@@ -10618,7 +12866,7 @@
                 <a:ea typeface="Trebuchet MS" pitchFamily="34" charset="-122"/>
                 <a:cs typeface="Trebuchet MS" pitchFamily="34" charset="-120"/>
               </a:rPr>
-              <a:t>3</a:t>
+              <a:t>C</a:t>
             </a:r>
             <a:endParaRPr lang="en-US" sz="1200" dirty="0"/>
           </a:p>
@@ -10649,6 +12897,17 @@
               <a:buNone/>
             </a:pPr>
             <a:r>
+              <a:rPr lang="en-US" sz="1350" b="1">
+                <a:solidFill>
+                  <a:srgbClr val="1B2A3A"/>
+                </a:solidFill>
+                <a:latin typeface="Calibri" pitchFamily="34" charset="0"/>
+                <a:ea typeface="Calibri" pitchFamily="34" charset="-122"/>
+                <a:cs typeface="Calibri" pitchFamily="34" charset="-120"/>
+              </a:rPr>
+              <a:t>Churn ↔ permanencia</a:t>
+            </a:r>
+            <a:r>
               <a:rPr lang="en-US" sz="1350" b="1" dirty="0">
                 <a:solidFill>
                   <a:srgbClr val="1B2A3A"/>
@@ -10657,7 +12916,7 @@
                 <a:ea typeface="Calibri" pitchFamily="34" charset="-122"/>
                 <a:cs typeface="Calibri" pitchFamily="34" charset="-120"/>
               </a:rPr>
-              <a:t>Antigüedad del cliente</a:t>
+              <a:t> del cliente</a:t>
             </a:r>
             <a:endParaRPr lang="en-US" sz="1350" dirty="0"/>
           </a:p>
@@ -10688,7 +12947,7 @@
               <a:buNone/>
             </a:pPr>
             <a:r>
-              <a:rPr lang="en-US" sz="1000" b="1" kern="0" spc="100" dirty="0">
+              <a:rPr lang="en-US" sz="1000" b="1" kern="0" spc="100">
                 <a:solidFill>
                   <a:srgbClr val="1F6FB2"/>
                 </a:solidFill>
@@ -10696,7 +12955,7 @@
                 <a:ea typeface="Trebuchet MS" pitchFamily="34" charset="-122"/>
                 <a:cs typeface="Trebuchet MS" pitchFamily="34" charset="-120"/>
               </a:rPr>
-              <a:t>FUERTE</a:t>
+              <a:t>RELEVANTE</a:t>
             </a:r>
             <a:endParaRPr lang="en-US" sz="1000" dirty="0"/>
           </a:p>
@@ -10798,7 +13057,7 @@
               <a:buNone/>
             </a:pPr>
             <a:r>
-              <a:rPr lang="en-US" sz="1200" b="1" dirty="0">
+              <a:rPr lang="en-US" sz="1200" b="1">
                 <a:solidFill>
                   <a:srgbClr val="FFFFFF"/>
                 </a:solidFill>
@@ -10806,7 +13065,7 @@
                 <a:ea typeface="Trebuchet MS" pitchFamily="34" charset="-122"/>
                 <a:cs typeface="Trebuchet MS" pitchFamily="34" charset="-120"/>
               </a:rPr>
-              <a:t>4</a:t>
+              <a:t>D</a:t>
             </a:r>
             <a:endParaRPr lang="en-US" sz="1200" dirty="0"/>
           </a:p>
@@ -10837,7 +13096,7 @@
               <a:buNone/>
             </a:pPr>
             <a:r>
-              <a:rPr lang="en-US" sz="1350" b="1" dirty="0">
+              <a:rPr lang="en-US" sz="1350" b="1">
                 <a:solidFill>
                   <a:srgbClr val="1B2A3A"/>
                 </a:solidFill>
@@ -10845,7 +13104,7 @@
                 <a:ea typeface="Calibri" pitchFamily="34" charset="-122"/>
                 <a:cs typeface="Calibri" pitchFamily="34" charset="-120"/>
               </a:rPr>
-              <a:t>Participación en clases grupales</a:t>
+              <a:t>Churn ↔ frecuencia de visitas</a:t>
             </a:r>
             <a:endParaRPr lang="en-US" sz="1350" dirty="0"/>
           </a:p>
@@ -10876,7 +13135,7 @@
               <a:buNone/>
             </a:pPr>
             <a:r>
-              <a:rPr lang="en-US" sz="1000" b="1" kern="0" spc="100" dirty="0">
+              <a:rPr lang="en-US" sz="1000" b="1" kern="0" spc="100">
                 <a:solidFill>
                   <a:srgbClr val="1FA8C0"/>
                 </a:solidFill>
@@ -10884,7 +13143,7 @@
                 <a:ea typeface="Trebuchet MS" pitchFamily="34" charset="-122"/>
                 <a:cs typeface="Trebuchet MS" pitchFamily="34" charset="-120"/>
               </a:rPr>
-              <a:t>IMPORTANTE</a:t>
+              <a:t>RELEVANTE</a:t>
             </a:r>
             <a:endParaRPr lang="en-US" sz="1000" dirty="0"/>
           </a:p>
@@ -10986,7 +13245,7 @@
               <a:buNone/>
             </a:pPr>
             <a:r>
-              <a:rPr lang="en-US" sz="1200" b="1" dirty="0">
+              <a:rPr lang="en-US" sz="1200" b="1">
                 <a:solidFill>
                   <a:srgbClr val="FFFFFF"/>
                 </a:solidFill>
@@ -10994,7 +13253,7 @@
                 <a:ea typeface="Trebuchet MS" pitchFamily="34" charset="-122"/>
                 <a:cs typeface="Trebuchet MS" pitchFamily="34" charset="-120"/>
               </a:rPr>
-              <a:t>5</a:t>
+              <a:t>E</a:t>
             </a:r>
             <a:endParaRPr lang="en-US" sz="1200" dirty="0"/>
           </a:p>
@@ -11025,7 +13284,7 @@
               <a:buNone/>
             </a:pPr>
             <a:r>
-              <a:rPr lang="en-US" sz="1350" b="1" dirty="0">
+              <a:rPr lang="en-US" sz="1350" b="1">
                 <a:solidFill>
                   <a:srgbClr val="1B2A3A"/>
                 </a:solidFill>
@@ -11033,7 +13292,7 @@
                 <a:ea typeface="Calibri" pitchFamily="34" charset="-122"/>
                 <a:cs typeface="Calibri" pitchFamily="34" charset="-120"/>
               </a:rPr>
-              <a:t>Gasto adicional en servicios</a:t>
+              <a:t>Correlación no implica causalidad</a:t>
             </a:r>
             <a:endParaRPr lang="en-US" sz="1350" dirty="0"/>
           </a:p>
@@ -11064,7 +13323,7 @@
               <a:buNone/>
             </a:pPr>
             <a:r>
-              <a:rPr lang="en-US" sz="1000" b="1" kern="0" spc="100" dirty="0">
+              <a:rPr lang="en-US" sz="1000" b="1" kern="0" spc="100">
                 <a:solidFill>
                   <a:srgbClr val="1FA8C0"/>
                 </a:solidFill>
@@ -11072,7 +13331,7 @@
                 <a:ea typeface="Trebuchet MS" pitchFamily="34" charset="-122"/>
                 <a:cs typeface="Trebuchet MS" pitchFamily="34" charset="-120"/>
               </a:rPr>
-              <a:t>IMPORTANTE</a:t>
+              <a:t>CAUTELA</a:t>
             </a:r>
             <a:endParaRPr lang="en-US" sz="1000" dirty="0"/>
           </a:p>
@@ -11190,6 +13449,17 @@
               <a:buNone/>
             </a:pPr>
             <a:r>
+              <a:rPr lang="en-US" sz="1250">
+                <a:solidFill>
+                  <a:srgbClr val="E4EEF6"/>
+                </a:solidFill>
+                <a:latin typeface="Calibri" pitchFamily="34" charset="0"/>
+                <a:ea typeface="Calibri" pitchFamily="34" charset="-122"/>
+                <a:cs typeface="Calibri" pitchFamily="34" charset="-120"/>
+              </a:rPr>
+              <a:t>Comprender asociaciones entre </a:t>
+            </a:r>
+            <a:r>
               <a:rPr lang="en-US" sz="1250" dirty="0">
                 <a:solidFill>
                   <a:srgbClr val="E4EEF6"/>
@@ -11198,7 +13468,29 @@
                 <a:ea typeface="Calibri" pitchFamily="34" charset="-122"/>
                 <a:cs typeface="Calibri" pitchFamily="34" charset="-120"/>
               </a:rPr>
-              <a:t>Identificar qué variables influyen más sobre la Cancelación de la membresía.</a:t>
+              <a:t>variables </a:t>
+            </a:r>
+            <a:r>
+              <a:rPr lang="en-US" sz="1250">
+                <a:solidFill>
+                  <a:srgbClr val="E4EEF6"/>
+                </a:solidFill>
+                <a:latin typeface="Calibri" pitchFamily="34" charset="0"/>
+                <a:ea typeface="Calibri" pitchFamily="34" charset="-122"/>
+                <a:cs typeface="Calibri" pitchFamily="34" charset="-120"/>
+              </a:rPr>
+              <a:t>y reconocer dependencias relevantes para interpretar los modelos</a:t>
+            </a:r>
+            <a:r>
+              <a:rPr lang="en-US" sz="1250" dirty="0">
+                <a:solidFill>
+                  <a:srgbClr val="E4EEF6"/>
+                </a:solidFill>
+                <a:latin typeface="Calibri" pitchFamily="34" charset="0"/>
+                <a:ea typeface="Calibri" pitchFamily="34" charset="-122"/>
+                <a:cs typeface="Calibri" pitchFamily="34" charset="-120"/>
+              </a:rPr>
+              <a:t>.</a:t>
             </a:r>
             <a:endParaRPr lang="en-US" sz="1250" dirty="0"/>
           </a:p>
@@ -11307,6 +13599,17 @@
               <a:buNone/>
             </a:pPr>
             <a:r>
+              <a:rPr lang="en-US" sz="1250">
+                <a:solidFill>
+                  <a:srgbClr val="FFFFFF"/>
+                </a:solidFill>
+                <a:latin typeface="Calibri" pitchFamily="34" charset="0"/>
+                <a:ea typeface="Calibri" pitchFamily="34" charset="-122"/>
+                <a:cs typeface="Calibri" pitchFamily="34" charset="-120"/>
+              </a:rPr>
+              <a:t>Contrato</a:t>
+            </a:r>
+            <a:r>
               <a:rPr lang="en-US" sz="1250" dirty="0">
                 <a:solidFill>
                   <a:srgbClr val="FFFFFF"/>
@@ -11315,7 +13618,73 @@
                 <a:ea typeface="Calibri" pitchFamily="34" charset="-122"/>
                 <a:cs typeface="Calibri" pitchFamily="34" charset="-120"/>
               </a:rPr>
-              <a:t>La duración del contrato, la frecuencia de visitas y la antigüedad son las más ligadas a la permanencia.</a:t>
+              <a:t>, </a:t>
+            </a:r>
+            <a:r>
+              <a:rPr lang="en-US" sz="1250">
+                <a:solidFill>
+                  <a:srgbClr val="FFFFFF"/>
+                </a:solidFill>
+                <a:latin typeface="Calibri" pitchFamily="34" charset="0"/>
+                <a:ea typeface="Calibri" pitchFamily="34" charset="-122"/>
+                <a:cs typeface="Calibri" pitchFamily="34" charset="-120"/>
+              </a:rPr>
+              <a:t>permanencia </a:t>
+            </a:r>
+            <a:r>
+              <a:rPr lang="en-US" sz="1250" dirty="0">
+                <a:solidFill>
+                  <a:srgbClr val="FFFFFF"/>
+                </a:solidFill>
+                <a:latin typeface="Calibri" pitchFamily="34" charset="0"/>
+                <a:ea typeface="Calibri" pitchFamily="34" charset="-122"/>
+                <a:cs typeface="Calibri" pitchFamily="34" charset="-120"/>
+              </a:rPr>
+              <a:t>y </a:t>
+            </a:r>
+            <a:r>
+              <a:rPr lang="en-US" sz="1250">
+                <a:solidFill>
+                  <a:srgbClr val="FFFFFF"/>
+                </a:solidFill>
+                <a:latin typeface="Calibri" pitchFamily="34" charset="0"/>
+                <a:ea typeface="Calibri" pitchFamily="34" charset="-122"/>
+                <a:cs typeface="Calibri" pitchFamily="34" charset="-120"/>
+              </a:rPr>
+              <a:t>asistencia se relacionan con el churn; </a:t>
+            </a:r>
+            <a:r>
+              <a:rPr lang="en-US" sz="1250" dirty="0">
+                <a:solidFill>
+                  <a:srgbClr val="FFFFFF"/>
+                </a:solidFill>
+                <a:latin typeface="Calibri" pitchFamily="34" charset="0"/>
+                <a:ea typeface="Calibri" pitchFamily="34" charset="-122"/>
+                <a:cs typeface="Calibri" pitchFamily="34" charset="-120"/>
+              </a:rPr>
+              <a:t>la </a:t>
+            </a:r>
+            <a:r>
+              <a:rPr lang="en-US" sz="1250">
+                <a:solidFill>
+                  <a:srgbClr val="FFFFFF"/>
+                </a:solidFill>
+                <a:latin typeface="Calibri" pitchFamily="34" charset="0"/>
+                <a:ea typeface="Calibri" pitchFamily="34" charset="-122"/>
+                <a:cs typeface="Calibri" pitchFamily="34" charset="-120"/>
+              </a:rPr>
+              <a:t>colinealidad exige interpretar los efectos con cautela</a:t>
+            </a:r>
+            <a:r>
+              <a:rPr lang="en-US" sz="1250" dirty="0">
+                <a:solidFill>
+                  <a:srgbClr val="FFFFFF"/>
+                </a:solidFill>
+                <a:latin typeface="Calibri" pitchFamily="34" charset="0"/>
+                <a:ea typeface="Calibri" pitchFamily="34" charset="-122"/>
+                <a:cs typeface="Calibri" pitchFamily="34" charset="-120"/>
+              </a:rPr>
+              <a:t>.</a:t>
             </a:r>
             <a:endParaRPr lang="en-US" sz="1250" dirty="0"/>
           </a:p>
@@ -11510,7 +13879,13 @@
         <p:nvGraphicFramePr>
           <p:cNvPr id="4" name="Comparación de modelos" descr="Gráfica de barras: Regresión Logística (Accuracy 0.93, Precision 0.86, Recall 0.83) vs Random Forest (Accuracy 0.92, Precision 0.85, Recall 0.83)."/>
           <p:cNvGraphicFramePr/>
-          <p:nvPr/>
+          <p:nvPr>
+            <p:extLst>
+              <p:ext uri="{D42A27DB-BD31-4B8C-83A1-F6EECF244321}">
+                <p14:modId xmlns:p14="http://schemas.microsoft.com/office/powerpoint/2010/main" val="1890025247"/>
+              </p:ext>
+            </p:extLst>
+          </p:nvPr>
         </p:nvGraphicFramePr>
         <p:xfrm>
           <a:off x="457200" y="1508760"/>
@@ -11592,7 +13967,7 @@
               <a:buNone/>
             </a:pPr>
             <a:r>
-              <a:rPr lang="en-US" sz="4600" b="1" dirty="0">
+              <a:rPr lang="en-US" sz="4600" b="1">
                 <a:solidFill>
                   <a:srgbClr val="FFFFFF"/>
                 </a:solidFill>
@@ -11600,7 +13975,18 @@
                 <a:ea typeface="Trebuchet MS" pitchFamily="34" charset="-122"/>
                 <a:cs typeface="Trebuchet MS" pitchFamily="34" charset="-120"/>
               </a:rPr>
-              <a:t>≈ 91%</a:t>
+              <a:t>93.50</a:t>
+            </a:r>
+            <a:r>
+              <a:rPr lang="en-US" sz="4600" b="1" dirty="0">
+                <a:solidFill>
+                  <a:srgbClr val="FFFFFF"/>
+                </a:solidFill>
+                <a:latin typeface="Trebuchet MS" pitchFamily="34" charset="0"/>
+                <a:ea typeface="Trebuchet MS" pitchFamily="34" charset="-122"/>
+                <a:cs typeface="Trebuchet MS" pitchFamily="34" charset="-120"/>
+              </a:rPr>
+              <a:t>%</a:t>
             </a:r>
             <a:endParaRPr lang="en-US" sz="4600" dirty="0"/>
           </a:p>
@@ -11631,7 +14017,7 @@
               <a:buNone/>
             </a:pPr>
             <a:r>
-              <a:rPr lang="en-US" sz="1200" dirty="0">
+              <a:rPr lang="en-US" sz="1200">
                 <a:solidFill>
                   <a:srgbClr val="AFD8E4"/>
                 </a:solidFill>
@@ -11639,7 +14025,7 @@
                 <a:ea typeface="Calibri" pitchFamily="34" charset="-122"/>
                 <a:cs typeface="Calibri" pitchFamily="34" charset="-120"/>
               </a:rPr>
-              <a:t>Accuracy en ambos modelos</a:t>
+              <a:t>Mejor accuracy · Regresión Logística</a:t>
             </a:r>
             <a:endParaRPr lang="en-US" sz="1200" dirty="0"/>
           </a:p>
@@ -11757,7 +14143,7 @@
               <a:buNone/>
             </a:pPr>
             <a:r>
-              <a:rPr lang="en-US" sz="1250" dirty="0">
+              <a:rPr lang="en-US" sz="1250">
                 <a:solidFill>
                   <a:srgbClr val="1B2A3A"/>
                 </a:solidFill>
@@ -11765,7 +14151,7 @@
                 <a:ea typeface="Calibri" pitchFamily="34" charset="-122"/>
                 <a:cs typeface="Calibri" pitchFamily="34" charset="-120"/>
               </a:rPr>
-              <a:t>Ambos modelos alcanzan un desempeño muy similar y una alta capacidad para identificar clientes en riesgo de abandono.</a:t>
+              <a:t>La Regresión Logística lidera las tres métricas y se selecciona como modelo principal. Recall: 85.38%.</a:t>
             </a:r>
             <a:endParaRPr lang="en-US" sz="1250" dirty="0"/>
           </a:p>
@@ -11796,6 +14182,17 @@
               <a:buNone/>
             </a:pPr>
             <a:r>
+              <a:rPr lang="en-US" sz="850">
+                <a:solidFill>
+                  <a:srgbClr val="5E7186"/>
+                </a:solidFill>
+                <a:latin typeface="Calibri" pitchFamily="34" charset="0"/>
+                <a:ea typeface="Calibri" pitchFamily="34" charset="-122"/>
+                <a:cs typeface="Calibri" pitchFamily="34" charset="-120"/>
+              </a:rPr>
+              <a:t>Model Fitness · Análisis de churn </a:t>
+            </a:r>
+            <a:r>
               <a:rPr lang="en-US" sz="850" dirty="0">
                 <a:solidFill>
                   <a:srgbClr val="5E7186"/>
@@ -11804,7 +14201,18 @@
                 <a:ea typeface="Calibri" pitchFamily="34" charset="-122"/>
                 <a:cs typeface="Calibri" pitchFamily="34" charset="-120"/>
               </a:rPr>
-              <a:t>Model Fitness · Análisis de churn y segmentación</a:t>
+              <a:t>y </a:t>
+            </a:r>
+            <a:r>
+              <a:rPr lang="en-US" sz="850">
+                <a:solidFill>
+                  <a:srgbClr val="5E7186"/>
+                </a:solidFill>
+                <a:latin typeface="Calibri" pitchFamily="34" charset="0"/>
+                <a:ea typeface="Calibri" pitchFamily="34" charset="-122"/>
+                <a:cs typeface="Calibri" pitchFamily="34" charset="-120"/>
+              </a:rPr>
+              <a:t>segmentación</a:t>
             </a:r>
             <a:endParaRPr lang="en-US" sz="850" dirty="0"/>
           </a:p>
@@ -11942,7 +14350,7 @@
               <a:buNone/>
             </a:pPr>
             <a:r>
-              <a:rPr lang="en-US" sz="2900" b="1" dirty="0">
+              <a:rPr lang="en-US" sz="2900" b="1">
                 <a:solidFill>
                   <a:srgbClr val="1B2A3A"/>
                 </a:solidFill>
@@ -11950,7 +14358,7 @@
                 <a:ea typeface="Trebuchet MS" pitchFamily="34" charset="-122"/>
                 <a:cs typeface="Trebuchet MS" pitchFamily="34" charset="-120"/>
               </a:rPr>
-              <a:t>Ambos modelos coinciden en los factores clave</a:t>
+              <a:t>Dos lecturas complementarias, no causales</a:t>
             </a:r>
             <a:endParaRPr lang="en-US" sz="2900" dirty="0"/>
           </a:p>
@@ -11989,7 +14397,73 @@
                 <a:ea typeface="Calibri" pitchFamily="34" charset="-122"/>
                 <a:cs typeface="Calibri" pitchFamily="34" charset="-120"/>
               </a:rPr>
-              <a:t>Los coeficientes de la Regresión Logística y las importancias de Random Forest apuntan a las mismas variables.</a:t>
+              <a:t>Los coeficientes </a:t>
+            </a:r>
+            <a:r>
+              <a:rPr lang="en-US" sz="1400" i="1">
+                <a:solidFill>
+                  <a:srgbClr val="5E7186"/>
+                </a:solidFill>
+                <a:latin typeface="Calibri" pitchFamily="34" charset="0"/>
+                <a:ea typeface="Calibri" pitchFamily="34" charset="-122"/>
+                <a:cs typeface="Calibri" pitchFamily="34" charset="-120"/>
+              </a:rPr>
+              <a:t>explican la dirección </a:t>
+            </a:r>
+            <a:r>
+              <a:rPr lang="en-US" sz="1400" i="1" dirty="0">
+                <a:solidFill>
+                  <a:srgbClr val="5E7186"/>
+                </a:solidFill>
+                <a:latin typeface="Calibri" pitchFamily="34" charset="0"/>
+                <a:ea typeface="Calibri" pitchFamily="34" charset="-122"/>
+                <a:cs typeface="Calibri" pitchFamily="34" charset="-120"/>
+              </a:rPr>
+              <a:t>de las </a:t>
+            </a:r>
+            <a:r>
+              <a:rPr lang="en-US" sz="1400" i="1">
+                <a:solidFill>
+                  <a:srgbClr val="5E7186"/>
+                </a:solidFill>
+                <a:latin typeface="Calibri" pitchFamily="34" charset="0"/>
+                <a:ea typeface="Calibri" pitchFamily="34" charset="-122"/>
+                <a:cs typeface="Calibri" pitchFamily="34" charset="-120"/>
+              </a:rPr>
+              <a:t>asociaciones; las </a:t>
+            </a:r>
+            <a:r>
+              <a:rPr lang="en-US" sz="1400" i="1" dirty="0">
+                <a:solidFill>
+                  <a:srgbClr val="5E7186"/>
+                </a:solidFill>
+                <a:latin typeface="Calibri" pitchFamily="34" charset="0"/>
+                <a:ea typeface="Calibri" pitchFamily="34" charset="-122"/>
+                <a:cs typeface="Calibri" pitchFamily="34" charset="-120"/>
+              </a:rPr>
+              <a:t>importancias </a:t>
+            </a:r>
+            <a:r>
+              <a:rPr lang="en-US" sz="1400" i="1">
+                <a:solidFill>
+                  <a:srgbClr val="5E7186"/>
+                </a:solidFill>
+                <a:latin typeface="Calibri" pitchFamily="34" charset="0"/>
+                <a:ea typeface="Calibri" pitchFamily="34" charset="-122"/>
+                <a:cs typeface="Calibri" pitchFamily="34" charset="-120"/>
+              </a:rPr>
+              <a:t>muestran cuánto contribuye cada variable a </a:t>
+            </a:r>
+            <a:r>
+              <a:rPr lang="en-US" sz="1400" i="1" dirty="0">
+                <a:solidFill>
+                  <a:srgbClr val="5E7186"/>
+                </a:solidFill>
+                <a:latin typeface="Calibri" pitchFamily="34" charset="0"/>
+                <a:ea typeface="Calibri" pitchFamily="34" charset="-122"/>
+                <a:cs typeface="Calibri" pitchFamily="34" charset="-120"/>
+              </a:rPr>
+              <a:t>Random Forest.</a:t>
             </a:r>
             <a:endParaRPr lang="en-US" sz="1400" dirty="0"/>
           </a:p>
@@ -12108,7 +14582,7 @@
               <a:buChar char="•"/>
             </a:pPr>
             <a:r>
-              <a:rPr lang="en-US" sz="1350" dirty="0">
+              <a:rPr lang="en-US" sz="1350">
                 <a:solidFill>
                   <a:srgbClr val="1B2A3A"/>
                 </a:solidFill>
@@ -12116,7 +14590,7 @@
                 <a:ea typeface="Calibri" pitchFamily="34" charset="-122"/>
                 <a:cs typeface="Calibri" pitchFamily="34" charset="-120"/>
               </a:rPr>
-              <a:t>Duración del contrato</a:t>
+              <a:t>Signo y magnitud de la asociación</a:t>
             </a:r>
             <a:endParaRPr lang="en-US" sz="1350" dirty="0"/>
           </a:p>
@@ -12129,6 +14603,17 @@
               <a:buChar char="•"/>
             </a:pPr>
             <a:r>
+              <a:rPr lang="en-US" sz="1350">
+                <a:solidFill>
+                  <a:srgbClr val="1B2A3A"/>
+                </a:solidFill>
+                <a:latin typeface="Calibri" pitchFamily="34" charset="0"/>
+                <a:ea typeface="Calibri" pitchFamily="34" charset="-122"/>
+                <a:cs typeface="Calibri" pitchFamily="34" charset="-120"/>
+              </a:rPr>
+              <a:t>Efecto sobre las log-odds </a:t>
+            </a:r>
+            <a:r>
               <a:rPr lang="en-US" sz="1350" dirty="0">
                 <a:solidFill>
                   <a:srgbClr val="1B2A3A"/>
@@ -12137,7 +14622,18 @@
                 <a:ea typeface="Calibri" pitchFamily="34" charset="-122"/>
                 <a:cs typeface="Calibri" pitchFamily="34" charset="-120"/>
               </a:rPr>
-              <a:t>Frecuencia de visitas</a:t>
+              <a:t>de </a:t>
+            </a:r>
+            <a:r>
+              <a:rPr lang="en-US" sz="1350">
+                <a:solidFill>
+                  <a:srgbClr val="1B2A3A"/>
+                </a:solidFill>
+                <a:latin typeface="Calibri" pitchFamily="34" charset="0"/>
+                <a:ea typeface="Calibri" pitchFamily="34" charset="-122"/>
+                <a:cs typeface="Calibri" pitchFamily="34" charset="-120"/>
+              </a:rPr>
+              <a:t>churn</a:t>
             </a:r>
             <a:endParaRPr lang="en-US" sz="1350" dirty="0"/>
           </a:p>
@@ -12147,7 +14643,7 @@
               <a:buChar char="•"/>
             </a:pPr>
             <a:r>
-              <a:rPr lang="en-US" sz="1350" dirty="0">
+              <a:rPr lang="en-US" sz="1350">
                 <a:solidFill>
                   <a:srgbClr val="1B2A3A"/>
                 </a:solidFill>
@@ -12155,7 +14651,7 @@
                 <a:ea typeface="Calibri" pitchFamily="34" charset="-122"/>
                 <a:cs typeface="Calibri" pitchFamily="34" charset="-120"/>
               </a:rPr>
-              <a:t>Antigüedad del cliente</a:t>
+              <a:t>Interpretación con las demás variables constantes</a:t>
             </a:r>
             <a:endParaRPr lang="en-US" sz="1350" dirty="0"/>
           </a:p>
@@ -12274,7 +14770,7 @@
               <a:buChar char="•"/>
             </a:pPr>
             <a:r>
-              <a:rPr lang="en-US" sz="1350" dirty="0">
+              <a:rPr lang="en-US" sz="1350">
                 <a:solidFill>
                   <a:srgbClr val="1B2A3A"/>
                 </a:solidFill>
@@ -12282,7 +14778,7 @@
                 <a:ea typeface="Calibri" pitchFamily="34" charset="-122"/>
                 <a:cs typeface="Calibri" pitchFamily="34" charset="-120"/>
               </a:rPr>
-              <a:t>Duración del contrato</a:t>
+              <a:t>Contribución a las predicciones</a:t>
             </a:r>
             <a:endParaRPr lang="en-US" sz="1350" dirty="0"/>
           </a:p>
@@ -12295,7 +14791,7 @@
               <a:buChar char="•"/>
             </a:pPr>
             <a:r>
-              <a:rPr lang="en-US" sz="1350" dirty="0">
+              <a:rPr lang="en-US" sz="1350">
                 <a:solidFill>
                   <a:srgbClr val="1B2A3A"/>
                 </a:solidFill>
@@ -12303,7 +14799,7 @@
                 <a:ea typeface="Calibri" pitchFamily="34" charset="-122"/>
                 <a:cs typeface="Calibri" pitchFamily="34" charset="-120"/>
               </a:rPr>
-              <a:t>Frecuencia de visitas</a:t>
+              <a:t>No indican si el efecto aumenta o disminuye</a:t>
             </a:r>
             <a:endParaRPr lang="en-US" sz="1350" dirty="0"/>
           </a:p>
@@ -12313,6 +14809,17 @@
               <a:buChar char="•"/>
             </a:pPr>
             <a:r>
+              <a:rPr lang="en-US" sz="1350">
+                <a:solidFill>
+                  <a:srgbClr val="1B2A3A"/>
+                </a:solidFill>
+                <a:latin typeface="Calibri" pitchFamily="34" charset="0"/>
+                <a:ea typeface="Calibri" pitchFamily="34" charset="-122"/>
+                <a:cs typeface="Calibri" pitchFamily="34" charset="-120"/>
+              </a:rPr>
+              <a:t>Complementan la lectura </a:t>
+            </a:r>
+            <a:r>
               <a:rPr lang="en-US" sz="1350" dirty="0">
                 <a:solidFill>
                   <a:srgbClr val="1B2A3A"/>
@@ -12321,7 +14828,18 @@
                 <a:ea typeface="Calibri" pitchFamily="34" charset="-122"/>
                 <a:cs typeface="Calibri" pitchFamily="34" charset="-120"/>
               </a:rPr>
-              <a:t>Antigüedad del cliente</a:t>
+              <a:t>del </a:t>
+            </a:r>
+            <a:r>
+              <a:rPr lang="en-US" sz="1350">
+                <a:solidFill>
+                  <a:srgbClr val="1B2A3A"/>
+                </a:solidFill>
+                <a:latin typeface="Calibri" pitchFamily="34" charset="0"/>
+                <a:ea typeface="Calibri" pitchFamily="34" charset="-122"/>
+                <a:cs typeface="Calibri" pitchFamily="34" charset="-120"/>
+              </a:rPr>
+              <a:t>modelo lineal</a:t>
             </a:r>
             <a:endParaRPr lang="en-US" sz="1350" dirty="0"/>
           </a:p>
@@ -12390,6 +14908,17 @@
               <a:buNone/>
             </a:pPr>
             <a:r>
+              <a:rPr lang="en-US" sz="1250" b="1">
+                <a:solidFill>
+                  <a:srgbClr val="17547F"/>
+                </a:solidFill>
+                <a:latin typeface="Calibri" pitchFamily="34" charset="0"/>
+                <a:ea typeface="Calibri" pitchFamily="34" charset="-122"/>
+                <a:cs typeface="Calibri" pitchFamily="34" charset="-120"/>
+              </a:rPr>
+              <a:t>Cautela</a:t>
+            </a:r>
+            <a:r>
               <a:rPr lang="en-US" sz="1250" b="1" dirty="0">
                 <a:solidFill>
                   <a:srgbClr val="17547F"/>
@@ -12398,18 +14927,18 @@
                 <a:ea typeface="Calibri" pitchFamily="34" charset="-122"/>
                 <a:cs typeface="Calibri" pitchFamily="34" charset="-120"/>
               </a:rPr>
-              <a:t>Coincidencia total.  </a:t>
-            </a:r>
-            <a:r>
-              <a:rPr lang="en-US" sz="1250" dirty="0">
-                <a:solidFill>
-                  <a:srgbClr val="1B2A3A"/>
-                </a:solidFill>
-                <a:latin typeface="Calibri" pitchFamily="34" charset="0"/>
-                <a:ea typeface="Calibri" pitchFamily="34" charset="-122"/>
-                <a:cs typeface="Calibri" pitchFamily="34" charset="-120"/>
-              </a:rPr>
-              <a:t>La duración del contrato, la frecuencia de visitas y la antigüedad son los tres principales predictores de la permanencia.</a:t>
+              <a:t>.  </a:t>
+            </a:r>
+            <a:r>
+              <a:rPr lang="en-US" sz="1250" b="1">
+                <a:solidFill>
+                  <a:srgbClr val="17547F"/>
+                </a:solidFill>
+                <a:latin typeface="Calibri" pitchFamily="34" charset="0"/>
+                <a:ea typeface="Calibri" pitchFamily="34" charset="-122"/>
+                <a:cs typeface="Calibri" pitchFamily="34" charset="-120"/>
+              </a:rPr>
+              <a:t>Asistencia y permanencia incluyen variables correlacionadas: los modelos explican predicciones, no prueban que una variable cause la cancelación.</a:t>
             </a:r>
             <a:endParaRPr lang="en-US" sz="1250" dirty="0"/>
           </a:p>
@@ -12586,7 +15115,7 @@
               <a:buNone/>
             </a:pPr>
             <a:r>
-              <a:rPr lang="en-US" sz="2900" b="1" dirty="0">
+              <a:rPr lang="en-US" sz="2900" b="1">
                 <a:solidFill>
                   <a:srgbClr val="1B2A3A"/>
                 </a:solidFill>
@@ -12594,7 +15123,7 @@
                 <a:ea typeface="Trebuchet MS" pitchFamily="34" charset="-122"/>
                 <a:cs typeface="Trebuchet MS" pitchFamily="34" charset="-120"/>
               </a:rPr>
-              <a:t>Cuántos grupos de clientes existen</a:t>
+              <a:t>La estructura no define un único número óptimo</a:t>
             </a:r>
             <a:endParaRPr lang="en-US" sz="2900" dirty="0"/>
           </a:p>
@@ -12745,6 +15274,17 @@
               <a:buNone/>
             </a:pPr>
             <a:r>
+              <a:rPr lang="en-US" sz="1250">
+                <a:solidFill>
+                  <a:srgbClr val="5E7186"/>
+                </a:solidFill>
+                <a:latin typeface="Calibri" pitchFamily="34" charset="0"/>
+                <a:ea typeface="Calibri" pitchFamily="34" charset="-122"/>
+                <a:cs typeface="Calibri" pitchFamily="34" charset="-120"/>
+              </a:rPr>
+              <a:t>Es una referencia exploratoria. Con 4,000 observaciones, sus ramas no justifican por sí solas </a:t>
+            </a:r>
+            <a:r>
               <a:rPr lang="en-US" sz="1250" dirty="0">
                 <a:solidFill>
                   <a:srgbClr val="5E7186"/>
@@ -12753,7 +15293,29 @@
                 <a:ea typeface="Calibri" pitchFamily="34" charset="-122"/>
                 <a:cs typeface="Calibri" pitchFamily="34" charset="-120"/>
               </a:rPr>
-              <a:t>Muestra una separación natural entre los clientes y orienta cuántos grupos formar antes de aplicar K-Means.</a:t>
+              <a:t>una </a:t>
+            </a:r>
+            <a:r>
+              <a:rPr lang="en-US" sz="1250">
+                <a:solidFill>
+                  <a:srgbClr val="5E7186"/>
+                </a:solidFill>
+                <a:latin typeface="Calibri" pitchFamily="34" charset="0"/>
+                <a:ea typeface="Calibri" pitchFamily="34" charset="-122"/>
+                <a:cs typeface="Calibri" pitchFamily="34" charset="-120"/>
+              </a:rPr>
+              <a:t>solución definitiva</a:t>
+            </a:r>
+            <a:r>
+              <a:rPr lang="en-US" sz="1250" dirty="0">
+                <a:solidFill>
+                  <a:srgbClr val="5E7186"/>
+                </a:solidFill>
+                <a:latin typeface="Calibri" pitchFamily="34" charset="0"/>
+                <a:ea typeface="Calibri" pitchFamily="34" charset="-122"/>
+                <a:cs typeface="Calibri" pitchFamily="34" charset="-120"/>
+              </a:rPr>
+              <a:t>.</a:t>
             </a:r>
             <a:endParaRPr lang="en-US" sz="1250" dirty="0"/>
           </a:p>
@@ -12904,6 +15466,17 @@
               <a:buNone/>
             </a:pPr>
             <a:r>
+              <a:rPr lang="en-US" sz="1250">
+                <a:solidFill>
+                  <a:srgbClr val="5E7186"/>
+                </a:solidFill>
+                <a:latin typeface="Calibri" pitchFamily="34" charset="0"/>
+                <a:ea typeface="Calibri" pitchFamily="34" charset="-122"/>
+                <a:cs typeface="Calibri" pitchFamily="34" charset="-120"/>
+              </a:rPr>
+              <a:t>El codo </a:t>
+            </a:r>
+            <a:r>
               <a:rPr lang="en-US" sz="1250" dirty="0">
                 <a:solidFill>
                   <a:srgbClr val="5E7186"/>
@@ -12912,7 +15485,29 @@
                 <a:ea typeface="Calibri" pitchFamily="34" charset="-122"/>
                 <a:cs typeface="Calibri" pitchFamily="34" charset="-120"/>
               </a:rPr>
-              <a:t>Ambos métodos determinan el número óptimo de clústeres y coinciden en el mismo resultado.</a:t>
+              <a:t>y </a:t>
+            </a:r>
+            <a:r>
+              <a:rPr lang="en-US" sz="1250">
+                <a:solidFill>
+                  <a:srgbClr val="5E7186"/>
+                </a:solidFill>
+                <a:latin typeface="Calibri" pitchFamily="34" charset="0"/>
+                <a:ea typeface="Calibri" pitchFamily="34" charset="-122"/>
+                <a:cs typeface="Calibri" pitchFamily="34" charset="-120"/>
+              </a:rPr>
+              <a:t>silhouette no señalan una única alternativa contundente; la separación entre grupos es limitada</a:t>
+            </a:r>
+            <a:r>
+              <a:rPr lang="en-US" sz="1250" dirty="0">
+                <a:solidFill>
+                  <a:srgbClr val="5E7186"/>
+                </a:solidFill>
+                <a:latin typeface="Calibri" pitchFamily="34" charset="0"/>
+                <a:ea typeface="Calibri" pitchFamily="34" charset="-122"/>
+                <a:cs typeface="Calibri" pitchFamily="34" charset="-120"/>
+              </a:rPr>
+              <a:t>.</a:t>
             </a:r>
             <a:endParaRPr lang="en-US" sz="1250" dirty="0"/>
           </a:p>
@@ -12988,7 +15583,7 @@
               <a:buNone/>
             </a:pPr>
             <a:r>
-              <a:rPr lang="en-US" sz="7800" b="1" dirty="0">
+              <a:rPr lang="en-US" sz="3600" b="1">
                 <a:solidFill>
                   <a:srgbClr val="7FE0EC"/>
                 </a:solidFill>
@@ -12996,7 +15591,7 @@
                 <a:ea typeface="Trebuchet MS" pitchFamily="34" charset="-122"/>
                 <a:cs typeface="Trebuchet MS" pitchFamily="34" charset="-120"/>
               </a:rPr>
-              <a:t>5</a:t>
+              <a:t>0.1647</a:t>
             </a:r>
             <a:endParaRPr lang="en-US" sz="7800" dirty="0"/>
           </a:p>
@@ -13027,7 +15622,7 @@
               <a:buNone/>
             </a:pPr>
             <a:r>
-              <a:rPr lang="en-US" sz="1600" b="1" dirty="0">
+              <a:rPr lang="en-US" sz="1200" b="1">
                 <a:solidFill>
                   <a:srgbClr val="FFFFFF"/>
                 </a:solidFill>
@@ -13035,7 +15630,7 @@
                 <a:ea typeface="Trebuchet MS" pitchFamily="34" charset="-122"/>
                 <a:cs typeface="Trebuchet MS" pitchFamily="34" charset="-120"/>
               </a:rPr>
-              <a:t>clústeres</a:t>
+              <a:t>silhouette máximo · k = 2</a:t>
             </a:r>
             <a:endParaRPr lang="en-US" sz="1600" dirty="0"/>
           </a:p>
@@ -13069,6 +15664,17 @@
               <a:buNone/>
             </a:pPr>
             <a:r>
+              <a:rPr lang="en-US" sz="1050">
+                <a:solidFill>
+                  <a:srgbClr val="AFD8E4"/>
+                </a:solidFill>
+                <a:latin typeface="Calibri" pitchFamily="34" charset="0"/>
+                <a:ea typeface="Calibri" pitchFamily="34" charset="-122"/>
+                <a:cs typeface="Calibri" pitchFamily="34" charset="-120"/>
+              </a:rPr>
+              <a:t>Se comparan k = 3 </a:t>
+            </a:r>
+            <a:r>
               <a:rPr lang="en-US" sz="1050" dirty="0">
                 <a:solidFill>
                   <a:srgbClr val="AFD8E4"/>
@@ -13077,7 +15683,18 @@
                 <a:ea typeface="Calibri" pitchFamily="34" charset="-122"/>
                 <a:cs typeface="Calibri" pitchFamily="34" charset="-120"/>
               </a:rPr>
-              <a:t>Equilibrio entre simplicidad y capacidad de diferenciación</a:t>
+              <a:t>y </a:t>
+            </a:r>
+            <a:r>
+              <a:rPr lang="en-US" sz="1050">
+                <a:solidFill>
+                  <a:srgbClr val="AFD8E4"/>
+                </a:solidFill>
+                <a:latin typeface="Calibri" pitchFamily="34" charset="0"/>
+                <a:ea typeface="Calibri" pitchFamily="34" charset="-122"/>
+                <a:cs typeface="Calibri" pitchFamily="34" charset="-120"/>
+              </a:rPr>
+              <a:t>k = 5 por su utilidad para describir perfiles.</a:t>
             </a:r>
             <a:endParaRPr lang="en-US" sz="1050" dirty="0"/>
           </a:p>
@@ -13108,6 +15725,17 @@
               <a:buNone/>
             </a:pPr>
             <a:r>
+              <a:rPr lang="en-US" sz="1250" b="1">
+                <a:solidFill>
+                  <a:srgbClr val="1F6FB2"/>
+                </a:solidFill>
+                <a:latin typeface="Calibri" pitchFamily="34" charset="0"/>
+                <a:ea typeface="Calibri" pitchFamily="34" charset="-122"/>
+                <a:cs typeface="Calibri" pitchFamily="34" charset="-120"/>
+              </a:rPr>
+              <a:t>Decisión analítica</a:t>
+            </a:r>
+            <a:r>
               <a:rPr lang="en-US" sz="1250" b="1" dirty="0">
                 <a:solidFill>
                   <a:srgbClr val="1F6FB2"/>
@@ -13116,18 +15744,18 @@
                 <a:ea typeface="Calibri" pitchFamily="34" charset="-122"/>
                 <a:cs typeface="Calibri" pitchFamily="34" charset="-120"/>
               </a:rPr>
-              <a:t>Objetivo.  </a:t>
-            </a:r>
-            <a:r>
-              <a:rPr lang="en-US" sz="1250" dirty="0">
-                <a:solidFill>
-                  <a:srgbClr val="1B2A3A"/>
-                </a:solidFill>
-                <a:latin typeface="Calibri" pitchFamily="34" charset="0"/>
-                <a:ea typeface="Calibri" pitchFamily="34" charset="-122"/>
-                <a:cs typeface="Calibri" pitchFamily="34" charset="-120"/>
-              </a:rPr>
-              <a:t>Estimar y confirmar el número adecuado de grupos para la segmentación de clientes.</a:t>
+              <a:t>.  </a:t>
+            </a:r>
+            <a:r>
+              <a:rPr lang="en-US" sz="1250" b="1">
+                <a:solidFill>
+                  <a:srgbClr val="1F6FB2"/>
+                </a:solidFill>
+                <a:latin typeface="Calibri" pitchFamily="34" charset="0"/>
+                <a:ea typeface="Calibri" pitchFamily="34" charset="-122"/>
+                <a:cs typeface="Calibri" pitchFamily="34" charset="-120"/>
+              </a:rPr>
+              <a:t>Evaluar 3 y 5 clústeres por sus características, tasas históricas de churn y utilidad potencial para el negocio.</a:t>
             </a:r>
             <a:endParaRPr lang="en-US" sz="1250" dirty="0"/>
           </a:p>
@@ -13515,7 +16143,7 @@
 </file>
 
 <file path=ppt/theme/theme2.xml><?xml version="1.0" encoding="utf-8"?>
-<a:theme xmlns:a="http://schemas.openxmlformats.org/drawingml/2006/main" name="Office Theme">
+<a:theme xmlns:a="http://schemas.openxmlformats.org/drawingml/2006/main" name="Tema de Office">
   <a:themeElements>
     <a:clrScheme name="Office">
       <a:dk1>
@@ -13525,39 +16153,39 @@
         <a:sysClr val="window" lastClr="FFFFFF"/>
       </a:lt1>
       <a:dk2>
-        <a:srgbClr val="44546A"/>
+        <a:srgbClr val="0E2841"/>
       </a:dk2>
       <a:lt2>
-        <a:srgbClr val="E7E6E6"/>
+        <a:srgbClr val="E8E8E8"/>
       </a:lt2>
       <a:accent1>
-        <a:srgbClr val="4472C4"/>
+        <a:srgbClr val="156082"/>
       </a:accent1>
       <a:accent2>
-        <a:srgbClr val="ED7D31"/>
+        <a:srgbClr val="E97132"/>
       </a:accent2>
       <a:accent3>
-        <a:srgbClr val="A5A5A5"/>
+        <a:srgbClr val="196B24"/>
       </a:accent3>
       <a:accent4>
-        <a:srgbClr val="FFC000"/>
+        <a:srgbClr val="0F9ED5"/>
       </a:accent4>
       <a:accent5>
-        <a:srgbClr val="5B9BD5"/>
+        <a:srgbClr val="A02B93"/>
       </a:accent5>
       <a:accent6>
-        <a:srgbClr val="70AD47"/>
+        <a:srgbClr val="4EA72E"/>
       </a:accent6>
       <a:hlink>
-        <a:srgbClr val="0563C1"/>
+        <a:srgbClr val="467886"/>
       </a:hlink>
       <a:folHlink>
-        <a:srgbClr val="954F72"/>
+        <a:srgbClr val="96607D"/>
       </a:folHlink>
     </a:clrScheme>
     <a:fontScheme name="Office">
       <a:majorFont>
-        <a:latin typeface="Calibri Light" panose="020F0302020204030204"/>
+        <a:latin typeface="Aptos Display" panose="02110004020202020204"/>
         <a:ea typeface=""/>
         <a:cs typeface=""/>
         <a:font script="Jpan" typeface="游ゴシック Light"/>
@@ -13609,7 +16237,7 @@
         <a:font script="Tfng" typeface="Ebrima"/>
       </a:majorFont>
       <a:minorFont>
-        <a:latin typeface="Calibri" panose="020F0502020204030204"/>
+        <a:latin typeface="Aptos" panose="02110004020202020204"/>
         <a:ea typeface=""/>
         <a:cs typeface=""/>
         <a:font script="Jpan" typeface="游ゴシック"/>
@@ -13720,13 +16348,6 @@
         </a:gradFill>
       </a:fillStyleLst>
       <a:lnStyleLst>
-        <a:ln w="6350" cap="flat" cmpd="sng" algn="ctr">
-          <a:solidFill>
-            <a:schemeClr val="phClr"/>
-          </a:solidFill>
-          <a:prstDash val="solid"/>
-          <a:miter lim="800000"/>
-        </a:ln>
         <a:ln w="12700" cap="flat" cmpd="sng" algn="ctr">
           <a:solidFill>
             <a:schemeClr val="phClr"/>
@@ -13735,6 +16356,13 @@
           <a:miter lim="800000"/>
         </a:ln>
         <a:ln w="19050" cap="flat" cmpd="sng" algn="ctr">
+          <a:solidFill>
+            <a:schemeClr val="phClr"/>
+          </a:solidFill>
+          <a:prstDash val="solid"/>
+          <a:miter lim="800000"/>
+        </a:ln>
+        <a:ln w="25400" cap="flat" cmpd="sng" algn="ctr">
           <a:solidFill>
             <a:schemeClr val="phClr"/>
           </a:solidFill>
@@ -13799,11 +16427,31 @@
       </a:bgFillStyleLst>
     </a:fmtScheme>
   </a:themeElements>
-  <a:objectDefaults/>
+  <a:objectDefaults>
+    <a:lnDef>
+      <a:spPr/>
+      <a:bodyPr/>
+      <a:lstStyle/>
+      <a:style>
+        <a:lnRef idx="2">
+          <a:schemeClr val="accent1"/>
+        </a:lnRef>
+        <a:fillRef idx="0">
+          <a:schemeClr val="accent1"/>
+        </a:fillRef>
+        <a:effectRef idx="1">
+          <a:schemeClr val="accent1"/>
+        </a:effectRef>
+        <a:fontRef idx="minor">
+          <a:schemeClr val="tx1"/>
+        </a:fontRef>
+      </a:style>
+    </a:lnDef>
+  </a:objectDefaults>
   <a:extraClrSchemeLst/>
   <a:extLst>
     <a:ext uri="{05A4C25C-085E-4340-85A3-A5531E510DB2}">
-      <thm15:themeFamily xmlns:thm15="http://schemas.microsoft.com/office/thememl/2012/main" name="Office Theme" id="{62F939B6-93AF-4DB8-9C6B-D6C7DFDC589F}" vid="{4A3C46E8-61CC-4603-A589-7422A47A8E4A}"/>
+      <thm15:themeFamily xmlns:thm15="http://schemas.microsoft.com/office/thememl/2012/main" name="Office Theme" id="{2E142A2C-CD16-42D6-873A-C26D2A0506FA}" vid="{1BDDFF52-6CD6-40A5-AB3C-68EB2F1E4D0A}"/>
     </a:ext>
   </a:extLst>
 </a:theme>
